--- a/lessons/lesson04_model_validation/theory/slides/Lecture4 - Model Improvement, Validation, and Interpretation.pptx
+++ b/lessons/lesson04_model_validation/theory/slides/Lecture4 - Model Improvement, Validation, and Interpretation.pptx
@@ -4,6 +4,9 @@
   <p:sldMasterIdLst>
     <p:sldMasterId id="2147483648" r:id="rId1"/>
   </p:sldMasterIdLst>
+  <p:notesMasterIdLst>
+    <p:notesMasterId r:id="rId30"/>
+  </p:notesMasterIdLst>
   <p:sldIdLst>
     <p:sldId id="256" r:id="rId2"/>
     <p:sldId id="257" r:id="rId3"/>
@@ -34,9 +37,6 @@
     <p:sldId id="282" r:id="rId28"/>
     <p:sldId id="283" r:id="rId29"/>
   </p:sldIdLst>
-  <p:notesMasterIdLst>
-    <p:notesMasterId r:id="rId30"/>
-  </p:notesMasterIdLst>
   <p:sldSz cx="12192000" cy="6858000"/>
   <p:notesSz cx="6858000" cy="12192000"/>
   <p:defaultTextStyle>
@@ -131,13 +131,20 @@
       </a:defRPr>
     </a:lvl9pPr>
   </p:defaultTextStyle>
+  <p:extLst>
+    <p:ext uri="{EFAFB233-063F-42B5-8137-9DF3F51BA10A}">
+      <p15:sldGuideLst xmlns:p15="http://schemas.microsoft.com/office/powerpoint/2012/main"/>
+    </p:ext>
+  </p:extLst>
 </p:presentation>
 </file>
 
 <file path=ppt/charts/chart1.xml><?xml version="1.0" encoding="utf-8"?>
-<c:chartSpace xmlns:c="http://schemas.openxmlformats.org/drawingml/2006/chart" xmlns:a="http://schemas.openxmlformats.org/drawingml/2006/main" xmlns:r="http://schemas.openxmlformats.org/officeDocument/2006/relationships">
+<c:chartSpace xmlns:c="http://schemas.openxmlformats.org/drawingml/2006/chart" xmlns:a="http://schemas.openxmlformats.org/drawingml/2006/main" xmlns:r="http://schemas.openxmlformats.org/officeDocument/2006/relationships" xmlns:c16r2="http://schemas.microsoft.com/office/drawing/2015/06/chart">
   <c:date1904 val="0"/>
+  <c:lang val="en-GB"/>
   <c:roundedCorners val="1"/>
+  <c:style val="2"/>
   <c:chart>
     <c:title>
       <c:tx>
@@ -165,7 +172,6 @@
           </a:p>
         </c:rich>
       </c:tx>
-      <c:layout/>
       <c:overlay val="0"/>
     </c:title>
     <c:autoTitleDeleted val="0"/>
@@ -198,18 +204,26 @@
           <c:invertIfNegative val="0"/>
           <c:dLbls>
             <c:numFmt formatCode="0.00" sourceLinked="0"/>
+            <c:spPr>
+              <a:noFill/>
+              <a:ln>
+                <a:noFill/>
+              </a:ln>
+              <a:effectLst/>
+            </c:spPr>
             <c:txPr>
               <a:bodyPr/>
               <a:lstStyle/>
               <a:p>
                 <a:pPr>
-                  <a:defRPr b="1" i="0" strike="noStrike" sz="1200" u="none">
+                  <a:defRPr sz="1200" b="1" i="0" u="none" strike="noStrike">
                     <a:solidFill>
                       <a:srgbClr val="12262B"/>
                     </a:solidFill>
                     <a:latin typeface="Arial"/>
                   </a:defRPr>
                 </a:pPr>
+                <a:endParaRPr lang="en-IT"/>
               </a:p>
             </c:txPr>
             <c:showLegendKey val="0"/>
@@ -219,22 +233,25 @@
             <c:showPercent val="0"/>
             <c:showBubbleSize val="0"/>
             <c:showLeaderLines val="0"/>
+            <c:extLst>
+              <c:ext xmlns:c15="http://schemas.microsoft.com/office/drawing/2012/chart" uri="{CE6537A1-D6FC-4f65-9D91-7224C49458BB}">
+                <c15:showLeaderLines val="0"/>
+              </c:ext>
+            </c:extLst>
           </c:dLbls>
           <c:cat>
-            <c:multiLvlStrRef>
+            <c:strRef>
               <c:f>Sheet1!$A$2:$A$3</c:f>
-              <c:multiLvlStrCache>
+              <c:strCache>
                 <c:ptCount val="2"/>
-                <c:lvl>
-                  <c:pt idx="0">
-                    <c:v>Tuned, non-nested CV</c:v>
-                  </c:pt>
-                  <c:pt idx="1">
-                    <c:v>Nested CV</c:v>
-                  </c:pt>
-                </c:lvl>
-              </c:multiLvlStrCache>
-            </c:multiLvlStrRef>
+                <c:pt idx="0">
+                  <c:v>Tuned, non-nested CV</c:v>
+                </c:pt>
+                <c:pt idx="1">
+                  <c:v>Nested CV</c:v>
+                </c:pt>
+              </c:strCache>
+            </c:strRef>
           </c:cat>
           <c:val>
             <c:numRef>
@@ -251,36 +268,23 @@
               </c:numCache>
             </c:numRef>
           </c:val>
+          <c:extLst>
+            <c:ext xmlns:c16="http://schemas.microsoft.com/office/drawing/2014/chart" uri="{C3380CC4-5D6E-409C-BE32-E72D297353CC}">
+              <c16:uniqueId val="{00000000-29C2-1F40-80B5-97C8C3FC02CF}"/>
+            </c:ext>
+          </c:extLst>
         </c:ser>
         <c:dLbls>
-          <c:numFmt formatCode="0.00" sourceLinked="0"/>
-          <c:txPr>
-            <a:bodyPr/>
-            <a:lstStyle/>
-            <a:p>
-              <a:pPr>
-                <a:defRPr b="1" i="0" strike="noStrike" sz="1200" u="none">
-                  <a:solidFill>
-                    <a:srgbClr val="12262B"/>
-                  </a:solidFill>
-                  <a:latin typeface="Arial"/>
-                </a:defRPr>
-              </a:pPr>
-            </a:p>
-          </c:txPr>
           <c:showLegendKey val="0"/>
           <c:showVal val="1"/>
           <c:showCatName val="0"/>
           <c:showSerName val="0"/>
           <c:showPercent val="0"/>
           <c:showBubbleSize val="0"/>
-          <c:showLeaderLines val="0"/>
         </c:dLbls>
         <c:gapWidth val="150"/>
-        <c:overlap val="0"/>
         <c:axId val="2094734554"/>
         <c:axId val="2094734552"/>
-        <c:axId val="2094734556"/>
       </c:barChart>
       <c:catAx>
         <c:axId val="2094734554"/>
@@ -314,13 +318,14 @@
                 <a:latin typeface="Arial"/>
               </a:defRPr>
             </a:pPr>
-            <a:endParaRPr lang="en-US"/>
+            <a:endParaRPr lang="en-IT"/>
           </a:p>
         </c:txPr>
         <c:crossAx val="2094734552"/>
         <c:crosses val="autoZero"/>
         <c:auto val="1"/>
         <c:lblAlgn val="ctr"/>
+        <c:lblOffset val="100"/>
         <c:noMultiLvlLbl val="1"/>
       </c:catAx>
       <c:valAx>
@@ -368,7 +373,7 @@
                 <a:latin typeface="Arial"/>
               </a:defRPr>
             </a:pPr>
-            <a:endParaRPr lang="en-US"/>
+            <a:endParaRPr lang="en-IT"/>
           </a:p>
         </c:txPr>
         <c:crossAx val="2094734554"/>
@@ -386,6 +391,7 @@
     </c:plotArea>
     <c:plotVisOnly val="1"/>
     <c:dispBlanksAs val="span"/>
+    <c:showDLblsOverMax val="1"/>
   </c:chart>
   <c:spPr>
     <a:noFill/>
@@ -401,9 +407,11 @@
 </file>
 
 <file path=ppt/charts/chart2.xml><?xml version="1.0" encoding="utf-8"?>
-<c:chartSpace xmlns:c="http://schemas.openxmlformats.org/drawingml/2006/chart" xmlns:a="http://schemas.openxmlformats.org/drawingml/2006/main" xmlns:r="http://schemas.openxmlformats.org/officeDocument/2006/relationships">
+<c:chartSpace xmlns:c="http://schemas.openxmlformats.org/drawingml/2006/chart" xmlns:a="http://schemas.openxmlformats.org/drawingml/2006/main" xmlns:r="http://schemas.openxmlformats.org/officeDocument/2006/relationships" xmlns:c16r2="http://schemas.microsoft.com/office/drawing/2015/06/chart">
   <c:date1904 val="0"/>
+  <c:lang val="en-GB"/>
   <c:roundedCorners val="1"/>
+  <c:style val="2"/>
   <c:chart>
     <c:title>
       <c:tx>
@@ -431,7 +439,6 @@
           </a:p>
         </c:rich>
       </c:tx>
-      <c:layout/>
       <c:overlay val="0"/>
     </c:title>
     <c:autoTitleDeleted val="0"/>
@@ -464,18 +471,26 @@
           <c:invertIfNegative val="0"/>
           <c:dLbls>
             <c:numFmt formatCode="0.00" sourceLinked="0"/>
+            <c:spPr>
+              <a:noFill/>
+              <a:ln>
+                <a:noFill/>
+              </a:ln>
+              <a:effectLst/>
+            </c:spPr>
             <c:txPr>
               <a:bodyPr/>
               <a:lstStyle/>
               <a:p>
                 <a:pPr>
-                  <a:defRPr b="1" i="0" strike="noStrike" sz="1200" u="none">
+                  <a:defRPr sz="1200" b="1" i="0" u="none" strike="noStrike">
                     <a:solidFill>
                       <a:srgbClr val="12262B"/>
                     </a:solidFill>
                     <a:latin typeface="Arial"/>
                   </a:defRPr>
                 </a:pPr>
+                <a:endParaRPr lang="en-IT"/>
               </a:p>
             </c:txPr>
             <c:showLegendKey val="0"/>
@@ -485,22 +500,25 @@
             <c:showPercent val="0"/>
             <c:showBubbleSize val="0"/>
             <c:showLeaderLines val="0"/>
+            <c:extLst>
+              <c:ext xmlns:c15="http://schemas.microsoft.com/office/drawing/2012/chart" uri="{CE6537A1-D6FC-4f65-9D91-7224C49458BB}">
+                <c15:showLeaderLines val="0"/>
+              </c:ext>
+            </c:extLst>
           </c:dLbls>
           <c:cat>
-            <c:multiLvlStrRef>
+            <c:strRef>
               <c:f>Sheet1!$A$2:$A$3</c:f>
-              <c:multiLvlStrCache>
+              <c:strCache>
                 <c:ptCount val="2"/>
-                <c:lvl>
-                  <c:pt idx="0">
-                    <c:v>METABRIC (internal CV)</c:v>
-                  </c:pt>
-                  <c:pt idx="1">
-                    <c:v>GSE6532 (external)</c:v>
-                  </c:pt>
-                </c:lvl>
-              </c:multiLvlStrCache>
-            </c:multiLvlStrRef>
+                <c:pt idx="0">
+                  <c:v>METABRIC (internal CV)</c:v>
+                </c:pt>
+                <c:pt idx="1">
+                  <c:v>GSE6532 (external)</c:v>
+                </c:pt>
+              </c:strCache>
+            </c:strRef>
           </c:cat>
           <c:val>
             <c:numRef>
@@ -517,36 +535,23 @@
               </c:numCache>
             </c:numRef>
           </c:val>
+          <c:extLst>
+            <c:ext xmlns:c16="http://schemas.microsoft.com/office/drawing/2014/chart" uri="{C3380CC4-5D6E-409C-BE32-E72D297353CC}">
+              <c16:uniqueId val="{00000000-6451-A14B-A39A-E848115B2083}"/>
+            </c:ext>
+          </c:extLst>
         </c:ser>
         <c:dLbls>
-          <c:numFmt formatCode="0.00" sourceLinked="0"/>
-          <c:txPr>
-            <a:bodyPr/>
-            <a:lstStyle/>
-            <a:p>
-              <a:pPr>
-                <a:defRPr b="1" i="0" strike="noStrike" sz="1200" u="none">
-                  <a:solidFill>
-                    <a:srgbClr val="12262B"/>
-                  </a:solidFill>
-                  <a:latin typeface="Arial"/>
-                </a:defRPr>
-              </a:pPr>
-            </a:p>
-          </c:txPr>
           <c:showLegendKey val="0"/>
           <c:showVal val="1"/>
           <c:showCatName val="0"/>
           <c:showSerName val="0"/>
           <c:showPercent val="0"/>
           <c:showBubbleSize val="0"/>
-          <c:showLeaderLines val="0"/>
         </c:dLbls>
         <c:gapWidth val="150"/>
-        <c:overlap val="0"/>
         <c:axId val="2094734554"/>
         <c:axId val="2094734552"/>
-        <c:axId val="2094734556"/>
       </c:barChart>
       <c:catAx>
         <c:axId val="2094734554"/>
@@ -580,13 +585,14 @@
                 <a:latin typeface="Arial"/>
               </a:defRPr>
             </a:pPr>
-            <a:endParaRPr lang="en-US"/>
+            <a:endParaRPr lang="en-IT"/>
           </a:p>
         </c:txPr>
         <c:crossAx val="2094734552"/>
         <c:crosses val="autoZero"/>
         <c:auto val="1"/>
         <c:lblAlgn val="ctr"/>
+        <c:lblOffset val="100"/>
         <c:noMultiLvlLbl val="1"/>
       </c:catAx>
       <c:valAx>
@@ -634,7 +640,7 @@
                 <a:latin typeface="Arial"/>
               </a:defRPr>
             </a:pPr>
-            <a:endParaRPr lang="en-US"/>
+            <a:endParaRPr lang="en-IT"/>
           </a:p>
         </c:txPr>
         <c:crossAx val="2094734554"/>
@@ -652,6 +658,7 @@
     </c:plotArea>
     <c:plotVisOnly val="1"/>
     <c:dispBlanksAs val="span"/>
+    <c:showDLblsOverMax val="1"/>
   </c:chart>
   <c:spPr>
     <a:noFill/>
@@ -688,234 +695,10 @@
           <a:chExt cx="0" cy="0"/>
         </a:xfrm>
       </p:grpSpPr>
-      <p:sp>
-        <p:nvSpPr>
-          <p:cNvPr id="2" name="Header Placeholder 1"/>
-          <p:cNvSpPr>
-            <a:spLocks noGrp="1"/>
-          </p:cNvSpPr>
-          <p:nvPr>
-            <p:ph type="hdr" sz="quarter"/>
-          </p:nvPr>
-        </p:nvSpPr>
-        <p:spPr>
-          <a:xfrm>
-            <a:off x="0" y="0"/>
-            <a:ext cx="2971800" cy="458788"/>
-          </a:xfrm>
-          <a:prstGeom prst="rect">
-            <a:avLst/>
-          </a:prstGeom>
-        </p:spPr>
-        <p:txBody>
-          <a:bodyPr vert="horz" lIns="91440" tIns="45720" rIns="91440" bIns="45720" rtlCol="0"/>
-          <a:lstStyle>
-            <a:lvl1pPr algn="l">
-              <a:defRPr sz="1200"/>
-            </a:lvl1pPr>
-          </a:lstStyle>
-          <a:p>
-            <a:endParaRPr lang="en-US"/>
-          </a:p>
-        </p:txBody>
-      </p:sp>
-      <p:sp>
-        <p:nvSpPr>
-          <p:cNvPr id="3" name="Date Placeholder 2"/>
-          <p:cNvSpPr>
-            <a:spLocks noGrp="1"/>
-          </p:cNvSpPr>
-          <p:nvPr>
-            <p:ph type="dt" idx="1"/>
-          </p:nvPr>
-        </p:nvSpPr>
-        <p:spPr>
-          <a:xfrm>
-            <a:off x="3884613" y="0"/>
-            <a:ext cx="2971800" cy="458788"/>
-          </a:xfrm>
-          <a:prstGeom prst="rect">
-            <a:avLst/>
-          </a:prstGeom>
-        </p:spPr>
-        <p:txBody>
-          <a:bodyPr vert="horz" lIns="91440" tIns="45720" rIns="91440" bIns="45720" rtlCol="0"/>
-          <a:lstStyle>
-            <a:lvl1pPr algn="r">
-              <a:defRPr sz="1200"/>
-            </a:lvl1pPr>
-          </a:lstStyle>
-          <a:p>
-            <a:fld id="{5282F153-3F37-0F45-9E97-73ACFA13230C}" type="datetimeFigureOut">
-              <a:rPr lang="en-US"/>
-              <a:t>7/23/19</a:t>
-            </a:fld>
-            <a:endParaRPr lang="en-US"/>
-          </a:p>
-        </p:txBody>
-      </p:sp>
-      <p:sp>
-        <p:nvSpPr>
-          <p:cNvPr id="4" name="Slide Image Placeholder 3"/>
-          <p:cNvSpPr>
-            <a:spLocks noGrp="1" noRot="1" noChangeAspect="1"/>
-          </p:cNvSpPr>
-          <p:nvPr>
-            <p:ph type="sldImg" idx="2"/>
-          </p:nvPr>
-        </p:nvSpPr>
-        <p:spPr>
-          <a:xfrm>
-            <a:off x="685800" y="1143000"/>
-            <a:ext cx="5486400" cy="3086100"/>
-          </a:xfrm>
-          <a:prstGeom prst="rect">
-            <a:avLst/>
-          </a:prstGeom>
-          <a:noFill/>
-          <a:ln w="12700">
-            <a:solidFill>
-              <a:prstClr val="black"/>
-            </a:solidFill>
-          </a:ln>
-        </p:spPr>
-        <p:txBody>
-          <a:bodyPr vert="horz" lIns="91440" tIns="45720" rIns="91440" bIns="45720" rtlCol="0" anchor="ctr"/>
-          <a:lstStyle/>
-          <a:p>
-            <a:endParaRPr lang="en-US"/>
-          </a:p>
-        </p:txBody>
-      </p:sp>
-      <p:sp>
-        <p:nvSpPr>
-          <p:cNvPr id="5" name="Notes Placeholder 4"/>
-          <p:cNvSpPr>
-            <a:spLocks noGrp="1"/>
-          </p:cNvSpPr>
-          <p:nvPr>
-            <p:ph type="body" sz="quarter" idx="3"/>
-          </p:nvPr>
-        </p:nvSpPr>
-        <p:spPr>
-          <a:xfrm>
-            <a:off x="685800" y="4400550"/>
-            <a:ext cx="5486400" cy="3600450"/>
-          </a:xfrm>
-          <a:prstGeom prst="rect">
-            <a:avLst/>
-          </a:prstGeom>
-        </p:spPr>
-        <p:txBody>
-          <a:bodyPr vert="horz" lIns="91440" tIns="45720" rIns="91440" bIns="45720" rtlCol="0"/>
-          <a:lstStyle/>
-          <a:p>
-            <a:pPr lvl="0"/>
-            <a:r>
-              <a:rPr lang="en-US"/>
-              <a:t>Click to edit Master text styles</a:t>
-            </a:r>
-          </a:p>
-          <a:p>
-            <a:pPr lvl="1"/>
-            <a:r>
-              <a:rPr lang="en-US"/>
-              <a:t>Second level</a:t>
-            </a:r>
-          </a:p>
-          <a:p>
-            <a:pPr lvl="2"/>
-            <a:r>
-              <a:rPr lang="en-US"/>
-              <a:t>Third level</a:t>
-            </a:r>
-          </a:p>
-          <a:p>
-            <a:pPr lvl="3"/>
-            <a:r>
-              <a:rPr lang="en-US"/>
-              <a:t>Fourth level</a:t>
-            </a:r>
-          </a:p>
-          <a:p>
-            <a:pPr lvl="4"/>
-            <a:r>
-              <a:rPr lang="en-US"/>
-              <a:t>Fifth level</a:t>
-            </a:r>
-          </a:p>
-        </p:txBody>
-      </p:sp>
-      <p:sp>
-        <p:nvSpPr>
-          <p:cNvPr id="6" name="Footer Placeholder 5"/>
-          <p:cNvSpPr>
-            <a:spLocks noGrp="1"/>
-          </p:cNvSpPr>
-          <p:nvPr>
-            <p:ph type="ftr" sz="quarter" idx="4"/>
-          </p:nvPr>
-        </p:nvSpPr>
-        <p:spPr>
-          <a:xfrm>
-            <a:off x="0" y="8685213"/>
-            <a:ext cx="2971800" cy="458787"/>
-          </a:xfrm>
-          <a:prstGeom prst="rect">
-            <a:avLst/>
-          </a:prstGeom>
-        </p:spPr>
-        <p:txBody>
-          <a:bodyPr vert="horz" lIns="91440" tIns="45720" rIns="91440" bIns="45720" rtlCol="0" anchor="b"/>
-          <a:lstStyle>
-            <a:lvl1pPr algn="l">
-              <a:defRPr sz="1200"/>
-            </a:lvl1pPr>
-          </a:lstStyle>
-          <a:p>
-            <a:endParaRPr lang="en-US"/>
-          </a:p>
-        </p:txBody>
-      </p:sp>
-      <p:sp>
-        <p:nvSpPr>
-          <p:cNvPr id="7" name="Slide Number Placeholder 6"/>
-          <p:cNvSpPr>
-            <a:spLocks noGrp="1"/>
-          </p:cNvSpPr>
-          <p:nvPr>
-            <p:ph type="sldNum" sz="quarter" idx="5"/>
-          </p:nvPr>
-        </p:nvSpPr>
-        <p:spPr>
-          <a:xfrm>
-            <a:off x="3884613" y="8685213"/>
-            <a:ext cx="2971800" cy="458787"/>
-          </a:xfrm>
-          <a:prstGeom prst="rect">
-            <a:avLst/>
-          </a:prstGeom>
-        </p:spPr>
-        <p:txBody>
-          <a:bodyPr vert="horz" lIns="91440" tIns="45720" rIns="91440" bIns="45720" rtlCol="0" anchor="b"/>
-          <a:lstStyle>
-            <a:lvl1pPr algn="r">
-              <a:defRPr sz="1200"/>
-            </a:lvl1pPr>
-          </a:lstStyle>
-          <a:p>
-            <a:fld id="{CE5E9CC1-C706-0F49-92D6-E571CC5EEA8F}" type="slidenum">
-              <a:rPr lang="en-US"/>
-              <a:t>‹#›</a:t>
-            </a:fld>
-            <a:endParaRPr lang="en-US"/>
-          </a:p>
-        </p:txBody>
-      </p:sp>
     </p:spTree>
     <p:extLst>
       <p:ext uri="{BB962C8B-B14F-4D97-AF65-F5344CB8AC3E}">
-        <p14:creationId xmlns:p14="http://schemas.microsoft.com/office/powerpoint/2010/main" val="1024086991"/>
+        <p14:creationId xmlns:p14="http://schemas.microsoft.com/office/powerpoint/2010/main" val="1494539618"/>
       </p:ext>
     </p:extLst>
   </p:cSld>
@@ -1063,7 +846,6 @@
               <a:rPr lang="en-US" dirty="0"/>
               <a:t>1 min. Frame the tension: students want fancier models; we'll honour that, but the lesson is that proving a model is better is harder than building a fancier one. A better algorithm is the easy part; a trustworthy estimate is the hard part.</a:t>
             </a:r>
-            <a:endParaRPr lang="en-US" dirty="0"/>
           </a:p>
         </p:txBody>
       </p:sp>
@@ -1151,7 +933,6 @@
               <a:rPr lang="en-US" dirty="0"/>
               <a:t>4 min. Parameters are learned FROM data during fitting (gene coefficients). Hyperparameters are set BEFORE fitting and control the model (depth, #trees, penalty C). You don't learn hyperparameters by fitting -- you search and must validate honestly.</a:t>
             </a:r>
-            <a:endParaRPr lang="en-US" dirty="0"/>
           </a:p>
         </p:txBody>
       </p:sp>
@@ -1239,7 +1020,6 @@
               <a:rPr lang="en-US" dirty="0"/>
               <a:t>5 min. Grid: every combination -- thorough but expensive. Random: sampled combinations -- often finds good values far cheaper. Every candidate scored by CV, never the test set. Cost explodes with #hyperparameters.</a:t>
             </a:r>
-            <a:endParaRPr lang="en-US" dirty="0"/>
           </a:p>
         </p:txBody>
       </p:sp>
@@ -1327,7 +1107,6 @@
               <a:rPr lang="en-US" dirty="0"/>
               <a:t>4 min. Every time you tune to the validation score, you use up its honesty. Tune hard enough and the score becomes optimistic -- you overfit the TUNING. The model never saw test data, yet the ESTIMATE is inflated. Fix is structural: nested CV.</a:t>
             </a:r>
-            <a:endParaRPr lang="en-US" dirty="0"/>
           </a:p>
         </p:txBody>
       </p:sp>
@@ -1415,7 +1194,6 @@
               <a:rPr lang="en-US" dirty="0"/>
               <a:t>4 min. k-fold rotates the held-out fold and averages. Everything data-dependent refits inside each fold. This estimates a FIXED modelling choice. But what if the choice (hyperparameters) was selected using the data?</a:t>
             </a:r>
-            <a:endParaRPr lang="en-US" dirty="0"/>
           </a:p>
         </p:txBody>
       </p:sp>
@@ -1503,7 +1281,6 @@
               <a:rPr lang="en-US" dirty="0"/>
               <a:t>5 min. Two loops: inner selects hyperparameters; outer estimates performance. The outer fold is never used to choose anything. Result: an honest estimate that INCLUDES the cost of tuning. Expensive but correct.</a:t>
             </a:r>
-            <a:endParaRPr lang="en-US" dirty="0"/>
           </a:p>
         </p:txBody>
       </p:sp>
@@ -1591,7 +1368,6 @@
               <a:rPr lang="en-US" dirty="0"/>
               <a:t>4 min. Without it, tuned models report optimistic scores that don't replicate -- worst at small n, many hyperparameters, flexible models. Rule: if you tuned on it, you can't also report performance on it. Measured in the practical.</a:t>
             </a:r>
-            <a:endParaRPr lang="en-US" dirty="0"/>
           </a:p>
         </p:txBody>
       </p:sp>
@@ -1679,7 +1455,6 @@
               <a:rPr lang="en-US" dirty="0"/>
               <a:t>5 min. A model can look great in-cohort and collapse on independent data. Usual culprit: technical variation between cohorts -- batch effects. Our setting: METABRIC (Illumina) vs GSE6532 (Affymetrix). Cross-cohort validation is the closest thing to truth.</a:t>
             </a:r>
-            <a:endParaRPr lang="en-US" dirty="0"/>
           </a:p>
         </p:txBody>
       </p:sp>
@@ -1767,7 +1542,6 @@
               <a:rPr lang="en-US" dirty="0"/>
               <a:t>4 min. Systematic technical differences by platform/site/date/protocol -- not biology. Dangerous when larger than signal or correlated with outcome (confounding). PCA diagnoses, doesn't fix. The single biggest reason biomarkers don't transfer.</a:t>
             </a:r>
-            <a:endParaRPr lang="en-US" dirty="0"/>
           </a:p>
         </p:txBody>
       </p:sp>
@@ -1855,7 +1629,6 @@
               <a:rPr lang="en-US" dirty="0"/>
               <a:t>5 min. ComBat/RUV estimate and subtract batch effects -&gt; cohorts become comparable. Risk: aggressive correction removes real biology, or done wrong leaks the outcome. Pathway features (L3) are a gentler, more platform-robust alternative.</a:t>
             </a:r>
-            <a:endParaRPr lang="en-US" dirty="0"/>
           </a:p>
         </p:txBody>
       </p:sp>
@@ -1943,7 +1716,6 @@
               <a:rPr lang="en-US" dirty="0"/>
               <a:t>5 min. Cardinal rule: correction must not use the outcome and must respect the split. Estimate on train, apply same transform to held-out. Correcting everything together is leakage. If batch is perfectly confounded with outcome, no method can rescue it.</a:t>
             </a:r>
-            <a:endParaRPr lang="en-US" dirty="0"/>
           </a:p>
         </p:txBody>
       </p:sp>
@@ -2031,7 +1803,6 @@
               <a:rPr lang="en-US" dirty="0"/>
               <a:t>2 min. Trustworthy problem (L1), model (L2), features (L3). You can build a biologically-informed baseline and you want to make it fancier. Today: more powerful families, proper tuning, and the validation that keeps them honest. Resist: 'more complex = better'.</a:t>
             </a:r>
-            <a:endParaRPr lang="en-US" dirty="0"/>
           </a:p>
         </p:txBody>
       </p:sp>
@@ -2119,7 +1890,6 @@
               <a:rPr lang="en-US" dirty="0"/>
               <a:t>4 min. Three tools: coefficients, tree importance, SHAP. All answer 'what is the model USING?' -- none answer 'what CAUSES recurrence?'. Interpretation is for hypothesis generation and sanity-checking, not causal claims.</a:t>
             </a:r>
-            <a:endParaRPr lang="en-US" dirty="0"/>
           </a:p>
         </p:txBody>
       </p:sp>
@@ -2207,7 +1977,6 @@
               <a:rPr lang="en-US" dirty="0"/>
               <a:t>4 min. Coefficients: direction+magnitude but scale/correlation-dependent. RF importance: biased, unstable. Correlated genes share/split importance. Always check stability across folds before believing a ranking.</a:t>
             </a:r>
-            <a:endParaRPr lang="en-US" dirty="0"/>
           </a:p>
         </p:txBody>
       </p:sp>
@@ -2295,7 +2064,6 @@
               <a:rPr lang="en-US" dirty="0"/>
               <a:t>4 min. SHAP attributes each prediction to its features -- a consistent per-patient explanation. Useful: shows HOW the model decided for an individual tumour. Limit: explains the MODEL, not the biology. Never present SHAP as mechanism/causation.</a:t>
             </a:r>
-            <a:endParaRPr lang="en-US" dirty="0"/>
           </a:p>
         </p:txBody>
       </p:sp>
@@ -2383,7 +2151,6 @@
               <a:rPr lang="en-US" dirty="0"/>
               <a:t>4 min. A predictive feature may be a bystander, a correlate of grade, or a batch artefact. Predictive value can be real &amp; useful WITHOUT a causal role -- but say so. Causal claims need interventional/causal-design evidence, not model weights.</a:t>
             </a:r>
-            <a:endParaRPr lang="en-US" dirty="0"/>
           </a:p>
         </p:txBody>
       </p:sp>
@@ -2471,7 +2238,6 @@
               <a:rPr lang="en-US" dirty="0"/>
               <a:t>4 min. Random seeds: fix &amp; report. Pipelines: encapsulate preprocessing+model so it refits inside CV. Version control + environment capture. Notebook organisation &amp; experiment tracking: every number regenerable.</a:t>
             </a:r>
-            <a:endParaRPr lang="en-US" dirty="0"/>
           </a:p>
         </p:txBody>
       </p:sp>
@@ -2559,7 +2325,6 @@
               <a:rPr lang="en-US" dirty="0"/>
               <a:t>3 min. Irreproducible biomarkers have harmed patients and wasted trials (Duke/Potti). A result you can't regenerate is an anecdote. Reproducibility is self-defense: it catches your own leakage early. Reviewers increasingly require code + data + environment.</a:t>
             </a:r>
-            <a:endParaRPr lang="en-US" dirty="0"/>
           </a:p>
         </p:txBody>
       </p:sp>
@@ -2647,7 +2412,6 @@
               <a:rPr lang="en-US" dirty="0"/>
               <a:t>4 min. Not the most complex, not the highest training score. The best model is robust, interpretable, reproducible, well-validated. Prefer the simplest model whose advantage survives honest (nested, cross-cohort) validation.</a:t>
             </a:r>
-            <a:endParaRPr lang="en-US" dirty="0"/>
           </a:p>
         </p:txBody>
       </p:sp>
@@ -2735,7 +2499,6 @@
               <a:rPr lang="en-US" dirty="0"/>
               <a:t>2 min. Deliver the thesis. Three corollaries: gains are smaller than expected; validation errors do more damage than model choice; plausibility is not causation. This is where students graduate from building models to judging them.</a:t>
             </a:r>
-            <a:endParaRPr lang="en-US" dirty="0"/>
           </a:p>
         </p:txBody>
       </p:sp>
@@ -2823,7 +2586,6 @@
               <a:rPr lang="en-US" dirty="0"/>
               <a:t>2 min. Tick objectives. Practical: compare LR/RF/GBM on the same features; tune one with grid/random search; estimate honestly with nested CV; batch-correction experiment (METABRIC-&gt;GSE6532, with/without); interpret importances responsibly; choose a model for publication. Next: research-grade ML -- survival models, external validation at scale.</a:t>
             </a:r>
-            <a:endParaRPr lang="en-US" dirty="0"/>
           </a:p>
         </p:txBody>
       </p:sp>
@@ -2911,7 +2673,6 @@
               <a:rPr lang="en-US" dirty="0"/>
               <a:t>2 min. Checklist ticked as we go. The two carrying the weight: nested cross-validation (why tuning inflates estimates) and batch correction done correctly (why models fail on new cohorts).</a:t>
             </a:r>
-            <a:endParaRPr lang="en-US" dirty="0"/>
           </a:p>
         </p:txBody>
       </p:sp>
@@ -2999,7 +2760,6 @@
               <a:rPr lang="en-US" dirty="0"/>
               <a:t>4 min. You own a validated baseline. The real question isn't 'can I build something fancier?' but 'can I SHOW it's better?' A complex model must EARN its complexity with validated gain.</a:t>
             </a:r>
-            <a:endParaRPr lang="en-US" dirty="0"/>
           </a:p>
         </p:txBody>
       </p:sp>
@@ -3087,7 +2847,6 @@
               <a:rPr lang="en-US" dirty="0"/>
               <a:t>4 min. Compare on the same split/metrics/validation -- change only the model. A difference within CV noise is NOT an improvement. Prefer the simpler model unless the gain is real, validated, meaningful.</a:t>
             </a:r>
-            <a:endParaRPr lang="en-US" dirty="0"/>
           </a:p>
         </p:txBody>
       </p:sp>
@@ -3175,7 +2934,6 @@
               <a:rPr lang="en-US" dirty="0"/>
               <a:t>5 min. A tree is a cascade of yes/no biological rules -- reads like clinical decision-making, very interpretable for ONE tree. But single trees are unstable (resample -&gt; different tree) and overfit without constraints.</a:t>
             </a:r>
-            <a:endParaRPr lang="en-US" dirty="0"/>
           </a:p>
         </p:txBody>
       </p:sp>
@@ -3263,7 +3021,6 @@
               <a:rPr lang="en-US" dirty="0"/>
               <a:t>5 min. Many trees on resampled data/features, voting. Averaging unstable trees -&gt; robust, lower-variance predictor. Free (caveated) importance. Limits: less interpretable, biased importances, not magic on small n.</a:t>
             </a:r>
-            <a:endParaRPr lang="en-US" dirty="0"/>
           </a:p>
         </p:txBody>
       </p:sp>
@@ -3351,7 +3108,6 @@
               <a:rPr lang="en-US" dirty="0"/>
               <a:t>5 min. Trees built sequentially, each correcting the last's mistakes. Often the strongest tabular predictor -- but the easiest to overfit and most tuning-sensitive. In p&gt;&gt;n with modest signal, its edge over a good baseline is often small.</a:t>
             </a:r>
-            <a:endParaRPr lang="en-US" dirty="0"/>
           </a:p>
         </p:txBody>
       </p:sp>
@@ -3439,7 +3195,6 @@
               <a:rPr lang="en-US" dirty="0"/>
               <a:t>4 min. Linear: interpretable, stable, strong in p&gt;&gt;n -- the default. RF: robust, low-tuning, weaker interpretability. GBM: highest ceiling, highest overfitting risk. Honest expectation: complex models rarely beat a good baseline by much here.</a:t>
             </a:r>
-            <a:endParaRPr lang="en-US" dirty="0"/>
           </a:p>
         </p:txBody>
       </p:sp>
@@ -3512,6 +3267,11 @@
 <file path=ppt/slideMasters/slideMaster1.xml><?xml version="1.0" encoding="utf-8"?>
 <p:sldMaster xmlns:a="http://schemas.openxmlformats.org/drawingml/2006/main" xmlns:r="http://schemas.openxmlformats.org/officeDocument/2006/relationships" xmlns:p="http://schemas.openxmlformats.org/presentationml/2006/main">
   <p:cSld>
+    <p:bg>
+      <p:bgRef idx="1001">
+        <a:schemeClr val="bg1"/>
+      </p:bgRef>
+    </p:bg>
     <p:spTree>
       <p:nvGrpSpPr>
         <p:cNvPr id="1" name=""/>
@@ -3794,6 +3554,7 @@
         <a:solidFill>
           <a:srgbClr val="0B3B40"/>
         </a:solidFill>
+        <a:effectLst/>
       </p:bgPr>
     </p:bg>
     <p:spTree>
@@ -3819,7 +3580,7 @@
         <p:spPr>
           <a:xfrm>
             <a:off x="8778240" y="914400"/>
-            <a:ext cx="1005840" cy="-457200"/>
+            <a:ext cx="1005840" cy="0"/>
           </a:xfrm>
           <a:prstGeom prst="line">
             <a:avLst/>
@@ -3854,7 +3615,7 @@
           <a:bodyPr wrap="square" lIns="0" tIns="0" rIns="0" bIns="0" rtlCol="0" anchor="ctr"/>
           <a:lstStyle/>
           <a:p>
-            <a:pPr algn="ctr" indent="0" marL="0">
+            <a:pPr marL="0" indent="0" algn="ctr">
               <a:buNone/>
             </a:pPr>
             <a:r>
@@ -3959,7 +3720,7 @@
           <a:bodyPr wrap="square" lIns="0" tIns="0" rIns="0" bIns="0" rtlCol="0" anchor="ctr"/>
           <a:lstStyle/>
           <a:p>
-            <a:pPr algn="ctr" indent="0" marL="0">
+            <a:pPr marL="0" indent="0" algn="ctr">
               <a:buNone/>
             </a:pPr>
             <a:r>
@@ -4064,7 +3825,7 @@
           <a:bodyPr wrap="square" lIns="0" tIns="0" rIns="0" bIns="0" rtlCol="0" anchor="ctr"/>
           <a:lstStyle/>
           <a:p>
-            <a:pPr algn="ctr" indent="0" marL="0">
+            <a:pPr marL="0" indent="0" algn="ctr">
               <a:buNone/>
             </a:pPr>
             <a:r>
@@ -4217,7 +3978,7 @@
           <a:bodyPr wrap="square" lIns="0" tIns="0" rIns="0" bIns="0" rtlCol="0" anchor="ctr"/>
           <a:lstStyle/>
           <a:p>
-            <a:pPr algn="ctr" indent="0" marL="0">
+            <a:pPr marL="0" indent="0" algn="ctr">
               <a:buNone/>
             </a:pPr>
             <a:r>
@@ -4256,11 +4017,11 @@
           <a:bodyPr wrap="square" lIns="0" tIns="0" rIns="0" bIns="0" rtlCol="0" anchor="ctr"/>
           <a:lstStyle/>
           <a:p>
-            <a:pPr indent="0" marL="0">
+            <a:pPr marL="0" indent="0">
               <a:buNone/>
             </a:pPr>
             <a:r>
-              <a:rPr lang="en-US" sz="1500" b="1" spc="300" kern="0" dirty="0">
+              <a:rPr lang="en-US" sz="1500" b="1" kern="0" spc="300" dirty="0">
                 <a:solidFill>
                   <a:srgbClr val="14A6B0"/>
                 </a:solidFill>
@@ -4295,7 +4056,7 @@
           <a:bodyPr wrap="square" lIns="0" tIns="0" rIns="0" bIns="0" rtlCol="0" anchor="ctr"/>
           <a:lstStyle/>
           <a:p>
-            <a:pPr indent="0" marL="0">
+            <a:pPr marL="0" indent="0">
               <a:lnSpc>
                 <a:spcPct val="102000"/>
               </a:lnSpc>
@@ -4315,7 +4076,7 @@
             <a:endParaRPr lang="en-US" sz="3500" dirty="0"/>
           </a:p>
           <a:p>
-            <a:pPr indent="0" marL="0">
+            <a:pPr marL="0" indent="0">
               <a:lnSpc>
                 <a:spcPct val="102000"/>
               </a:lnSpc>
@@ -4357,7 +4118,7 @@
           <a:bodyPr wrap="square" lIns="0" tIns="0" rIns="0" bIns="0" rtlCol="0" anchor="ctr"/>
           <a:lstStyle/>
           <a:p>
-            <a:pPr indent="0" marL="0">
+            <a:pPr marL="0" indent="0">
               <a:buNone/>
             </a:pPr>
             <a:r>
@@ -4396,7 +4157,7 @@
           <a:bodyPr wrap="square" lIns="0" tIns="0" rIns="0" bIns="0" rtlCol="0" anchor="ctr"/>
           <a:lstStyle/>
           <a:p>
-            <a:pPr indent="0" marL="0">
+            <a:pPr marL="0" indent="0">
               <a:buNone/>
             </a:pPr>
             <a:r>
@@ -4435,10 +4196,21 @@
           <a:bodyPr wrap="square" lIns="0" tIns="0" rIns="0" bIns="0" rtlCol="0" anchor="ctr"/>
           <a:lstStyle/>
           <a:p>
-            <a:pPr indent="0" marL="0">
+            <a:pPr marL="0" indent="0">
               <a:buNone/>
             </a:pPr>
             <a:r>
+              <a:rPr lang="en-US" sz="1200" dirty="0" err="1">
+                <a:solidFill>
+                  <a:srgbClr val="DCEDEE"/>
+                </a:solidFill>
+                <a:latin typeface="Calibri" pitchFamily="34" charset="0"/>
+                <a:ea typeface="Calibri" pitchFamily="34" charset="-122"/>
+                <a:cs typeface="Calibri" pitchFamily="34" charset="-120"/>
+              </a:rPr>
+              <a:t>Yinxiu</a:t>
+            </a:r>
+            <a:r>
               <a:rPr lang="en-US" sz="1200" dirty="0">
                 <a:solidFill>
                   <a:srgbClr val="DCEDEE"/>
@@ -4447,7 +4219,7 @@
                 <a:ea typeface="Calibri" pitchFamily="34" charset="-122"/>
                 <a:cs typeface="Calibri" pitchFamily="34" charset="-120"/>
               </a:rPr>
-              <a:t>Instructor name · Affiliation · 2026</a:t>
+              <a:t> Zhan · IEO/UNIMI · 2026</a:t>
             </a:r>
             <a:endParaRPr lang="en-US" sz="1200" dirty="0"/>
           </a:p>
@@ -4469,6 +4241,7 @@
         <a:solidFill>
           <a:srgbClr val="FFFFFF"/>
         </a:solidFill>
+        <a:effectLst/>
       </p:bgPr>
     </p:bg>
     <p:spTree>
@@ -4506,11 +4279,11 @@
           <a:bodyPr wrap="square" lIns="0" tIns="0" rIns="0" bIns="0" rtlCol="0" anchor="ctr"/>
           <a:lstStyle/>
           <a:p>
-            <a:pPr indent="0" marL="0">
+            <a:pPr marL="0" indent="0">
               <a:buNone/>
             </a:pPr>
             <a:r>
-              <a:rPr lang="en-US" sz="1200" b="1" spc="200" kern="0" dirty="0">
+              <a:rPr lang="en-US" sz="1200" b="1" kern="0" spc="200" dirty="0">
                 <a:solidFill>
                   <a:srgbClr val="0E7C86"/>
                 </a:solidFill>
@@ -4545,7 +4318,7 @@
           <a:bodyPr wrap="square" lIns="0" tIns="0" rIns="0" bIns="0" rtlCol="0" anchor="t"/>
           <a:lstStyle/>
           <a:p>
-            <a:pPr indent="0" marL="0">
+            <a:pPr marL="0" indent="0">
               <a:buNone/>
             </a:pPr>
             <a:r>
@@ -4584,7 +4357,7 @@
           <a:bodyPr wrap="square" lIns="0" tIns="0" rIns="0" bIns="0" rtlCol="0" anchor="ctr"/>
           <a:lstStyle/>
           <a:p>
-            <a:pPr indent="0" marL="0">
+            <a:pPr marL="0" indent="0">
               <a:buNone/>
             </a:pPr>
             <a:r>
@@ -4623,7 +4396,7 @@
           <a:bodyPr wrap="square" lIns="0" tIns="0" rIns="0" bIns="0" rtlCol="0" anchor="ctr"/>
           <a:lstStyle/>
           <a:p>
-            <a:pPr algn="r" indent="0" marL="0">
+            <a:pPr marL="0" indent="0" algn="r">
               <a:buNone/>
             </a:pPr>
             <a:r>
@@ -4768,7 +4541,7 @@
           </a:solidFill>
           <a:ln/>
           <a:effectLst>
-            <a:outerShdw sx="100000" sy="100000" kx="0" ky="0" algn="bl" rotWithShape="0" blurRad="88900" dist="38100" dir="5400000">
+            <a:outerShdw blurRad="88900" dist="38100" dir="5400000" algn="bl" rotWithShape="0">
               <a:srgbClr val="000000">
                 <a:alpha val="12000"/>
               </a:srgbClr>
@@ -4797,7 +4570,7 @@
           <a:bodyPr wrap="square" lIns="0" tIns="0" rIns="0" bIns="0" rtlCol="0" anchor="ctr"/>
           <a:lstStyle/>
           <a:p>
-            <a:pPr algn="ctr" indent="0" marL="0">
+            <a:pPr marL="0" indent="0" algn="ctr">
               <a:buNone/>
             </a:pPr>
             <a:r>
@@ -4836,7 +4609,7 @@
           <a:bodyPr wrap="square" lIns="0" tIns="0" rIns="0" bIns="0" rtlCol="0" anchor="ctr"/>
           <a:lstStyle/>
           <a:p>
-            <a:pPr algn="ctr" indent="0" marL="0">
+            <a:pPr marL="0" indent="0" algn="ctr">
               <a:buNone/>
             </a:pPr>
             <a:r>
@@ -4875,7 +4648,7 @@
           <a:bodyPr wrap="square" lIns="0" tIns="0" rIns="0" bIns="0" rtlCol="0" anchor="ctr"/>
           <a:lstStyle/>
           <a:p>
-            <a:pPr indent="0" marL="0">
+            <a:pPr marL="0" indent="0">
               <a:lnSpc>
                 <a:spcPct val="140000"/>
               </a:lnSpc>
@@ -4895,7 +4668,7 @@
             <a:endParaRPr lang="en-US" sz="1200" dirty="0"/>
           </a:p>
           <a:p>
-            <a:pPr indent="0" marL="0">
+            <a:pPr marL="0" indent="0">
               <a:lnSpc>
                 <a:spcPct val="140000"/>
               </a:lnSpc>
@@ -4937,7 +4710,7 @@
           </a:solidFill>
           <a:ln/>
           <a:effectLst>
-            <a:outerShdw sx="100000" sy="100000" kx="0" ky="0" algn="bl" rotWithShape="0" blurRad="88900" dist="38100" dir="5400000">
+            <a:outerShdw blurRad="88900" dist="38100" dir="5400000" algn="bl" rotWithShape="0">
               <a:srgbClr val="000000">
                 <a:alpha val="12000"/>
               </a:srgbClr>
@@ -4966,7 +4739,7 @@
           <a:bodyPr wrap="square" lIns="0" tIns="0" rIns="0" bIns="0" rtlCol="0" anchor="ctr"/>
           <a:lstStyle/>
           <a:p>
-            <a:pPr algn="ctr" indent="0" marL="0">
+            <a:pPr marL="0" indent="0" algn="ctr">
               <a:buNone/>
             </a:pPr>
             <a:r>
@@ -5005,7 +4778,7 @@
           <a:bodyPr wrap="square" lIns="0" tIns="0" rIns="0" bIns="0" rtlCol="0" anchor="ctr"/>
           <a:lstStyle/>
           <a:p>
-            <a:pPr algn="ctr" indent="0" marL="0">
+            <a:pPr marL="0" indent="0" algn="ctr">
               <a:buNone/>
             </a:pPr>
             <a:r>
@@ -5044,7 +4817,7 @@
           <a:bodyPr wrap="square" lIns="0" tIns="0" rIns="0" bIns="0" rtlCol="0" anchor="ctr"/>
           <a:lstStyle/>
           <a:p>
-            <a:pPr indent="0" marL="0">
+            <a:pPr marL="0" indent="0">
               <a:lnSpc>
                 <a:spcPct val="140000"/>
               </a:lnSpc>
@@ -5064,7 +4837,7 @@
             <a:endParaRPr lang="en-US" sz="1200" dirty="0"/>
           </a:p>
           <a:p>
-            <a:pPr indent="0" marL="0">
+            <a:pPr marL="0" indent="0">
               <a:lnSpc>
                 <a:spcPct val="140000"/>
               </a:lnSpc>
@@ -5084,7 +4857,7 @@
             <a:endParaRPr lang="en-US" sz="1200" dirty="0"/>
           </a:p>
           <a:p>
-            <a:pPr indent="0" marL="0">
+            <a:pPr marL="0" indent="0">
               <a:lnSpc>
                 <a:spcPct val="140000"/>
               </a:lnSpc>
@@ -5139,6 +4912,7 @@
         <a:solidFill>
           <a:srgbClr val="FFFFFF"/>
         </a:solidFill>
+        <a:effectLst/>
       </p:bgPr>
     </p:bg>
     <p:spTree>
@@ -5176,11 +4950,11 @@
           <a:bodyPr wrap="square" lIns="0" tIns="0" rIns="0" bIns="0" rtlCol="0" anchor="ctr"/>
           <a:lstStyle/>
           <a:p>
-            <a:pPr indent="0" marL="0">
+            <a:pPr marL="0" indent="0">
               <a:buNone/>
             </a:pPr>
             <a:r>
-              <a:rPr lang="en-US" sz="1200" b="1" spc="200" kern="0" dirty="0">
+              <a:rPr lang="en-US" sz="1200" b="1" kern="0" spc="200" dirty="0">
                 <a:solidFill>
                   <a:srgbClr val="0E7C86"/>
                 </a:solidFill>
@@ -5215,7 +4989,7 @@
           <a:bodyPr wrap="square" lIns="0" tIns="0" rIns="0" bIns="0" rtlCol="0" anchor="t"/>
           <a:lstStyle/>
           <a:p>
-            <a:pPr indent="0" marL="0">
+            <a:pPr marL="0" indent="0">
               <a:buNone/>
             </a:pPr>
             <a:r>
@@ -5254,7 +5028,7 @@
           <a:bodyPr wrap="square" lIns="0" tIns="0" rIns="0" bIns="0" rtlCol="0" anchor="ctr"/>
           <a:lstStyle/>
           <a:p>
-            <a:pPr indent="0" marL="0">
+            <a:pPr marL="0" indent="0">
               <a:buNone/>
             </a:pPr>
             <a:r>
@@ -5293,7 +5067,7 @@
           <a:bodyPr wrap="square" lIns="0" tIns="0" rIns="0" bIns="0" rtlCol="0" anchor="ctr"/>
           <a:lstStyle/>
           <a:p>
-            <a:pPr algn="r" indent="0" marL="0">
+            <a:pPr marL="0" indent="0" algn="r">
               <a:buNone/>
             </a:pPr>
             <a:r>
@@ -5463,7 +5237,7 @@
           <a:bodyPr wrap="square" lIns="0" tIns="0" rIns="0" bIns="0" rtlCol="0" anchor="ctr"/>
           <a:lstStyle/>
           <a:p>
-            <a:pPr algn="ctr" indent="0" marL="0">
+            <a:pPr marL="0" indent="0" algn="ctr">
               <a:buNone/>
             </a:pPr>
             <a:r>
@@ -5869,7 +5643,7 @@
           <a:bodyPr wrap="square" lIns="0" tIns="0" rIns="0" bIns="0" rtlCol="0" anchor="ctr"/>
           <a:lstStyle/>
           <a:p>
-            <a:pPr algn="ctr" indent="0" marL="0">
+            <a:pPr marL="0" indent="0" algn="ctr">
               <a:buNone/>
             </a:pPr>
             <a:r>
@@ -6250,7 +6024,7 @@
           <a:bodyPr wrap="square" lIns="0" tIns="0" rIns="0" bIns="0" rtlCol="0" anchor="ctr"/>
           <a:lstStyle/>
           <a:p>
-            <a:pPr algn="ctr" indent="0" marL="0">
+            <a:pPr marL="0" indent="0" algn="ctr">
               <a:buNone/>
             </a:pPr>
             <a:r>
@@ -6284,6 +6058,7 @@
         <a:solidFill>
           <a:srgbClr val="FFFFFF"/>
         </a:solidFill>
+        <a:effectLst/>
       </p:bgPr>
     </p:bg>
     <p:spTree>
@@ -6321,11 +6096,11 @@
           <a:bodyPr wrap="square" lIns="0" tIns="0" rIns="0" bIns="0" rtlCol="0" anchor="ctr"/>
           <a:lstStyle/>
           <a:p>
-            <a:pPr indent="0" marL="0">
+            <a:pPr marL="0" indent="0">
               <a:buNone/>
             </a:pPr>
             <a:r>
-              <a:rPr lang="en-US" sz="1200" b="1" spc="200" kern="0" dirty="0">
+              <a:rPr lang="en-US" sz="1200" b="1" kern="0" spc="200" dirty="0">
                 <a:solidFill>
                   <a:srgbClr val="0E7C86"/>
                 </a:solidFill>
@@ -6360,7 +6135,7 @@
           <a:bodyPr wrap="square" lIns="0" tIns="0" rIns="0" bIns="0" rtlCol="0" anchor="t"/>
           <a:lstStyle/>
           <a:p>
-            <a:pPr indent="0" marL="0">
+            <a:pPr marL="0" indent="0">
               <a:buNone/>
             </a:pPr>
             <a:r>
@@ -6399,7 +6174,7 @@
           <a:bodyPr wrap="square" lIns="0" tIns="0" rIns="0" bIns="0" rtlCol="0" anchor="ctr"/>
           <a:lstStyle/>
           <a:p>
-            <a:pPr indent="0" marL="0">
+            <a:pPr marL="0" indent="0">
               <a:buNone/>
             </a:pPr>
             <a:r>
@@ -6438,7 +6213,7 @@
           <a:bodyPr wrap="square" lIns="0" tIns="0" rIns="0" bIns="0" rtlCol="0" anchor="ctr"/>
           <a:lstStyle/>
           <a:p>
-            <a:pPr algn="r" indent="0" marL="0">
+            <a:pPr marL="0" indent="0" algn="r">
               <a:buNone/>
             </a:pPr>
             <a:r>
@@ -6826,7 +6601,7 @@
         <p:spPr>
           <a:xfrm>
             <a:off x="6583680" y="3886200"/>
-            <a:ext cx="475488" cy="-109728"/>
+            <a:ext cx="475488" cy="0"/>
           </a:xfrm>
           <a:prstGeom prst="line">
             <a:avLst/>
@@ -6849,7 +6624,7 @@
         <p:spPr>
           <a:xfrm>
             <a:off x="7059168" y="3776472"/>
-            <a:ext cx="475488" cy="-109728"/>
+            <a:ext cx="475488" cy="0"/>
           </a:xfrm>
           <a:prstGeom prst="line">
             <a:avLst/>
@@ -6872,7 +6647,7 @@
         <p:spPr>
           <a:xfrm>
             <a:off x="7534656" y="3666744"/>
-            <a:ext cx="475488" cy="-109728"/>
+            <a:ext cx="475488" cy="0"/>
           </a:xfrm>
           <a:prstGeom prst="line">
             <a:avLst/>
@@ -6895,7 +6670,7 @@
         <p:spPr>
           <a:xfrm>
             <a:off x="8010144" y="3557016"/>
-            <a:ext cx="475488" cy="-109728"/>
+            <a:ext cx="475488" cy="0"/>
           </a:xfrm>
           <a:prstGeom prst="line">
             <a:avLst/>
@@ -6918,7 +6693,7 @@
         <p:spPr>
           <a:xfrm>
             <a:off x="8485632" y="3447288"/>
-            <a:ext cx="475488" cy="-109728"/>
+            <a:ext cx="475488" cy="0"/>
           </a:xfrm>
           <a:prstGeom prst="line">
             <a:avLst/>
@@ -6941,7 +6716,7 @@
         <p:spPr>
           <a:xfrm>
             <a:off x="8961120" y="3337560"/>
-            <a:ext cx="475488" cy="-109728"/>
+            <a:ext cx="475488" cy="0"/>
           </a:xfrm>
           <a:prstGeom prst="line">
             <a:avLst/>
@@ -6964,7 +6739,7 @@
         <p:spPr>
           <a:xfrm>
             <a:off x="9436608" y="3227832"/>
-            <a:ext cx="475488" cy="-109728"/>
+            <a:ext cx="475488" cy="0"/>
           </a:xfrm>
           <a:prstGeom prst="line">
             <a:avLst/>
@@ -6987,7 +6762,7 @@
         <p:spPr>
           <a:xfrm>
             <a:off x="9912096" y="3118104"/>
-            <a:ext cx="475488" cy="-109728"/>
+            <a:ext cx="475488" cy="0"/>
           </a:xfrm>
           <a:prstGeom prst="line">
             <a:avLst/>
@@ -7010,7 +6785,7 @@
         <p:spPr>
           <a:xfrm>
             <a:off x="10387584" y="3008376"/>
-            <a:ext cx="475488" cy="-109728"/>
+            <a:ext cx="475488" cy="0"/>
           </a:xfrm>
           <a:prstGeom prst="line">
             <a:avLst/>
@@ -7033,7 +6808,7 @@
         <p:spPr>
           <a:xfrm>
             <a:off x="10863072" y="2898648"/>
-            <a:ext cx="475488" cy="-109728"/>
+            <a:ext cx="475488" cy="0"/>
           </a:xfrm>
           <a:prstGeom prst="line">
             <a:avLst/>
@@ -7068,7 +6843,7 @@
           <a:bodyPr wrap="square" lIns="0" tIns="0" rIns="0" bIns="0" rtlCol="0" anchor="ctr"/>
           <a:lstStyle/>
           <a:p>
-            <a:pPr indent="0" marL="0">
+            <a:pPr marL="0" indent="0">
               <a:buNone/>
             </a:pPr>
             <a:r>
@@ -7107,7 +6882,7 @@
           <a:bodyPr wrap="square" lIns="0" tIns="0" rIns="0" bIns="0" rtlCol="0" anchor="ctr"/>
           <a:lstStyle/>
           <a:p>
-            <a:pPr indent="0" marL="0">
+            <a:pPr marL="0" indent="0">
               <a:buNone/>
             </a:pPr>
             <a:r>
@@ -7146,7 +6921,7 @@
           <a:bodyPr wrap="square" lIns="0" tIns="0" rIns="0" bIns="0" rtlCol="0" anchor="ctr"/>
           <a:lstStyle/>
           <a:p>
-            <a:pPr algn="ctr" indent="0" marL="0">
+            <a:pPr marL="0" indent="0" algn="ctr">
               <a:buNone/>
             </a:pPr>
             <a:r>
@@ -7185,7 +6960,7 @@
           <a:bodyPr wrap="square" lIns="0" tIns="0" rIns="0" bIns="0" rtlCol="0" anchor="ctr"/>
           <a:lstStyle/>
           <a:p>
-            <a:pPr algn="r" indent="0" marL="0">
+            <a:pPr marL="0" indent="0" algn="r">
               <a:buNone/>
             </a:pPr>
             <a:r>
@@ -7219,6 +6994,7 @@
         <a:solidFill>
           <a:srgbClr val="FFFFFF"/>
         </a:solidFill>
+        <a:effectLst/>
       </p:bgPr>
     </p:bg>
     <p:spTree>
@@ -7256,11 +7032,11 @@
           <a:bodyPr wrap="square" lIns="0" tIns="0" rIns="0" bIns="0" rtlCol="0" anchor="ctr"/>
           <a:lstStyle/>
           <a:p>
-            <a:pPr indent="0" marL="0">
+            <a:pPr marL="0" indent="0">
               <a:buNone/>
             </a:pPr>
             <a:r>
-              <a:rPr lang="en-US" sz="1200" b="1" spc="200" kern="0" dirty="0">
+              <a:rPr lang="en-US" sz="1200" b="1" kern="0" spc="200" dirty="0">
                 <a:solidFill>
                   <a:srgbClr val="0E7C86"/>
                 </a:solidFill>
@@ -7295,7 +7071,7 @@
           <a:bodyPr wrap="square" lIns="0" tIns="0" rIns="0" bIns="0" rtlCol="0" anchor="t"/>
           <a:lstStyle/>
           <a:p>
-            <a:pPr indent="0" marL="0">
+            <a:pPr marL="0" indent="0">
               <a:buNone/>
             </a:pPr>
             <a:r>
@@ -7334,7 +7110,7 @@
           <a:bodyPr wrap="square" lIns="0" tIns="0" rIns="0" bIns="0" rtlCol="0" anchor="ctr"/>
           <a:lstStyle/>
           <a:p>
-            <a:pPr indent="0" marL="0">
+            <a:pPr marL="0" indent="0">
               <a:buNone/>
             </a:pPr>
             <a:r>
@@ -7373,7 +7149,7 @@
           <a:bodyPr wrap="square" lIns="0" tIns="0" rIns="0" bIns="0" rtlCol="0" anchor="ctr"/>
           <a:lstStyle/>
           <a:p>
-            <a:pPr algn="r" indent="0" marL="0">
+            <a:pPr marL="0" indent="0" algn="r">
               <a:buNone/>
             </a:pPr>
             <a:r>
@@ -8143,7 +7919,7 @@
           <a:bodyPr wrap="square" lIns="0" tIns="0" rIns="0" bIns="0" rtlCol="0" anchor="ctr"/>
           <a:lstStyle/>
           <a:p>
-            <a:pPr indent="0" marL="0">
+            <a:pPr marL="0" indent="0">
               <a:buNone/>
             </a:pPr>
             <a:r>
@@ -8177,6 +7953,7 @@
         <a:solidFill>
           <a:srgbClr val="FFFFFF"/>
         </a:solidFill>
+        <a:effectLst/>
       </p:bgPr>
     </p:bg>
     <p:spTree>
@@ -8214,11 +7991,11 @@
           <a:bodyPr wrap="square" lIns="0" tIns="0" rIns="0" bIns="0" rtlCol="0" anchor="ctr"/>
           <a:lstStyle/>
           <a:p>
-            <a:pPr indent="0" marL="0">
+            <a:pPr marL="0" indent="0">
               <a:buNone/>
             </a:pPr>
             <a:r>
-              <a:rPr lang="en-US" sz="1200" b="1" spc="200" kern="0" dirty="0">
+              <a:rPr lang="en-US" sz="1200" b="1" kern="0" spc="200" dirty="0">
                 <a:solidFill>
                   <a:srgbClr val="0E7C86"/>
                 </a:solidFill>
@@ -8253,7 +8030,7 @@
           <a:bodyPr wrap="square" lIns="0" tIns="0" rIns="0" bIns="0" rtlCol="0" anchor="t"/>
           <a:lstStyle/>
           <a:p>
-            <a:pPr indent="0" marL="0">
+            <a:pPr marL="0" indent="0">
               <a:buNone/>
             </a:pPr>
             <a:r>
@@ -8292,7 +8069,7 @@
           <a:bodyPr wrap="square" lIns="0" tIns="0" rIns="0" bIns="0" rtlCol="0" anchor="ctr"/>
           <a:lstStyle/>
           <a:p>
-            <a:pPr indent="0" marL="0">
+            <a:pPr marL="0" indent="0">
               <a:buNone/>
             </a:pPr>
             <a:r>
@@ -8331,7 +8108,7 @@
           <a:bodyPr wrap="square" lIns="0" tIns="0" rIns="0" bIns="0" rtlCol="0" anchor="ctr"/>
           <a:lstStyle/>
           <a:p>
-            <a:pPr algn="r" indent="0" marL="0">
+            <a:pPr marL="0" indent="0" algn="r">
               <a:buNone/>
             </a:pPr>
             <a:r>
@@ -8476,7 +8253,7 @@
           <a:bodyPr wrap="square" lIns="0" tIns="0" rIns="0" bIns="0" rtlCol="0" anchor="ctr"/>
           <a:lstStyle/>
           <a:p>
-            <a:pPr indent="0" marL="0">
+            <a:pPr marL="0" indent="0">
               <a:buNone/>
             </a:pPr>
             <a:r>
@@ -8640,7 +8417,7 @@
           <a:bodyPr wrap="square" lIns="0" tIns="0" rIns="0" bIns="0" rtlCol="0" anchor="ctr"/>
           <a:lstStyle/>
           <a:p>
-            <a:pPr indent="0" marL="0">
+            <a:pPr marL="0" indent="0">
               <a:buNone/>
             </a:pPr>
             <a:r>
@@ -8703,7 +8480,7 @@
           </a:solidFill>
           <a:ln/>
           <a:effectLst>
-            <a:outerShdw sx="100000" sy="100000" kx="0" ky="0" algn="bl" rotWithShape="0" blurRad="88900" dist="38100" dir="5400000">
+            <a:outerShdw blurRad="88900" dist="38100" dir="5400000" algn="bl" rotWithShape="0">
               <a:srgbClr val="000000">
                 <a:alpha val="12000"/>
               </a:srgbClr>
@@ -8732,7 +8509,7 @@
           <a:bodyPr wrap="square" lIns="0" tIns="0" rIns="0" bIns="0" rtlCol="0" anchor="ctr"/>
           <a:lstStyle/>
           <a:p>
-            <a:pPr indent="0" marL="0">
+            <a:pPr marL="0" indent="0">
               <a:buNone/>
             </a:pPr>
             <a:r>
@@ -9171,7 +8948,7 @@
           <a:bodyPr wrap="square" lIns="0" tIns="0" rIns="0" bIns="0" rtlCol="0" anchor="ctr"/>
           <a:lstStyle/>
           <a:p>
-            <a:pPr algn="ctr" indent="0" marL="0">
+            <a:pPr marL="0" indent="0" algn="ctr">
               <a:buNone/>
             </a:pPr>
             <a:r>
@@ -9205,6 +8982,7 @@
         <a:solidFill>
           <a:srgbClr val="FFFFFF"/>
         </a:solidFill>
+        <a:effectLst/>
       </p:bgPr>
     </p:bg>
     <p:spTree>
@@ -9242,11 +9020,11 @@
           <a:bodyPr wrap="square" lIns="0" tIns="0" rIns="0" bIns="0" rtlCol="0" anchor="ctr"/>
           <a:lstStyle/>
           <a:p>
-            <a:pPr indent="0" marL="0">
+            <a:pPr marL="0" indent="0">
               <a:buNone/>
             </a:pPr>
             <a:r>
-              <a:rPr lang="en-US" sz="1200" b="1" spc="200" kern="0" dirty="0">
+              <a:rPr lang="en-US" sz="1200" b="1" kern="0" spc="200" dirty="0">
                 <a:solidFill>
                   <a:srgbClr val="0E7C86"/>
                 </a:solidFill>
@@ -9281,7 +9059,7 @@
           <a:bodyPr wrap="square" lIns="0" tIns="0" rIns="0" bIns="0" rtlCol="0" anchor="t"/>
           <a:lstStyle/>
           <a:p>
-            <a:pPr indent="0" marL="0">
+            <a:pPr marL="0" indent="0">
               <a:buNone/>
             </a:pPr>
             <a:r>
@@ -9320,7 +9098,7 @@
           <a:bodyPr wrap="square" lIns="0" tIns="0" rIns="0" bIns="0" rtlCol="0" anchor="ctr"/>
           <a:lstStyle/>
           <a:p>
-            <a:pPr indent="0" marL="0">
+            <a:pPr marL="0" indent="0">
               <a:buNone/>
             </a:pPr>
             <a:r>
@@ -9359,7 +9137,7 @@
           <a:bodyPr wrap="square" lIns="0" tIns="0" rIns="0" bIns="0" rtlCol="0" anchor="ctr"/>
           <a:lstStyle/>
           <a:p>
-            <a:pPr algn="r" indent="0" marL="0">
+            <a:pPr marL="0" indent="0" algn="r">
               <a:buNone/>
             </a:pPr>
             <a:r>
@@ -9485,7 +9263,7 @@
       </p:sp>
       <p:graphicFrame>
         <p:nvGraphicFramePr>
-          <p:cNvPr id="8" name="Chart 0" descr=""/>
+          <p:cNvPr id="8" name="Chart 0"/>
           <p:cNvGraphicFramePr/>
           <p:nvPr/>
         </p:nvGraphicFramePr>
@@ -9493,9 +9271,9 @@
           <a:off x="6583680" y="2286000"/>
           <a:ext cx="4937760" cy="3291840"/>
         </p:xfrm>
-        <a:graphic xmlns:a="http://schemas.openxmlformats.org/drawingml/2006/main">
+        <a:graphic>
           <a:graphicData uri="http://schemas.openxmlformats.org/drawingml/2006/chart">
-            <c:chart xmlns:c="http://schemas.openxmlformats.org/drawingml/2006/chart" r:id="rId1"/>
+            <c:chart xmlns:c="http://schemas.openxmlformats.org/drawingml/2006/chart" xmlns:r="http://schemas.openxmlformats.org/officeDocument/2006/relationships" r:id="rId3"/>
           </a:graphicData>
         </a:graphic>
       </p:graphicFrame>
@@ -9520,7 +9298,7 @@
           <a:bodyPr wrap="square" lIns="0" tIns="0" rIns="0" bIns="0" rtlCol="0" anchor="ctr"/>
           <a:lstStyle/>
           <a:p>
-            <a:pPr algn="ctr" indent="0" marL="0">
+            <a:pPr marL="0" indent="0" algn="ctr">
               <a:buNone/>
             </a:pPr>
             <a:r>
@@ -9554,6 +9332,7 @@
         <a:solidFill>
           <a:srgbClr val="FFFFFF"/>
         </a:solidFill>
+        <a:effectLst/>
       </p:bgPr>
     </p:bg>
     <p:spTree>
@@ -9591,11 +9370,11 @@
           <a:bodyPr wrap="square" lIns="0" tIns="0" rIns="0" bIns="0" rtlCol="0" anchor="ctr"/>
           <a:lstStyle/>
           <a:p>
-            <a:pPr indent="0" marL="0">
+            <a:pPr marL="0" indent="0">
               <a:buNone/>
             </a:pPr>
             <a:r>
-              <a:rPr lang="en-US" sz="1200" b="1" spc="200" kern="0" dirty="0">
+              <a:rPr lang="en-US" sz="1200" b="1" kern="0" spc="200" dirty="0">
                 <a:solidFill>
                   <a:srgbClr val="0E7C86"/>
                 </a:solidFill>
@@ -9630,7 +9409,7 @@
           <a:bodyPr wrap="square" lIns="0" tIns="0" rIns="0" bIns="0" rtlCol="0" anchor="t"/>
           <a:lstStyle/>
           <a:p>
-            <a:pPr indent="0" marL="0">
+            <a:pPr marL="0" indent="0">
               <a:buNone/>
             </a:pPr>
             <a:r>
@@ -9669,7 +9448,7 @@
           <a:bodyPr wrap="square" lIns="0" tIns="0" rIns="0" bIns="0" rtlCol="0" anchor="ctr"/>
           <a:lstStyle/>
           <a:p>
-            <a:pPr indent="0" marL="0">
+            <a:pPr marL="0" indent="0">
               <a:buNone/>
             </a:pPr>
             <a:r>
@@ -9708,7 +9487,7 @@
           <a:bodyPr wrap="square" lIns="0" tIns="0" rIns="0" bIns="0" rtlCol="0" anchor="ctr"/>
           <a:lstStyle/>
           <a:p>
-            <a:pPr algn="r" indent="0" marL="0">
+            <a:pPr marL="0" indent="0" algn="r">
               <a:buNone/>
             </a:pPr>
             <a:r>
@@ -9834,7 +9613,7 @@
       </p:sp>
       <p:graphicFrame>
         <p:nvGraphicFramePr>
-          <p:cNvPr id="8" name="Chart 0" descr=""/>
+          <p:cNvPr id="8" name="Chart 0"/>
           <p:cNvGraphicFramePr/>
           <p:nvPr/>
         </p:nvGraphicFramePr>
@@ -9842,9 +9621,9 @@
           <a:off x="6583680" y="2286000"/>
           <a:ext cx="4937760" cy="3291840"/>
         </p:xfrm>
-        <a:graphic xmlns:a="http://schemas.openxmlformats.org/drawingml/2006/main">
+        <a:graphic>
           <a:graphicData uri="http://schemas.openxmlformats.org/drawingml/2006/chart">
-            <c:chart xmlns:c="http://schemas.openxmlformats.org/drawingml/2006/chart" r:id="rId1"/>
+            <c:chart xmlns:c="http://schemas.openxmlformats.org/drawingml/2006/chart" xmlns:r="http://schemas.openxmlformats.org/officeDocument/2006/relationships" r:id="rId3"/>
           </a:graphicData>
         </a:graphic>
       </p:graphicFrame>
@@ -9869,7 +9648,7 @@
           <a:bodyPr wrap="square" lIns="0" tIns="0" rIns="0" bIns="0" rtlCol="0" anchor="ctr"/>
           <a:lstStyle/>
           <a:p>
-            <a:pPr algn="ctr" indent="0" marL="0">
+            <a:pPr marL="0" indent="0" algn="ctr">
               <a:buNone/>
             </a:pPr>
             <a:r>
@@ -9903,6 +9682,7 @@
         <a:solidFill>
           <a:srgbClr val="FFFFFF"/>
         </a:solidFill>
+        <a:effectLst/>
       </p:bgPr>
     </p:bg>
     <p:spTree>
@@ -9940,11 +9720,11 @@
           <a:bodyPr wrap="square" lIns="0" tIns="0" rIns="0" bIns="0" rtlCol="0" anchor="ctr"/>
           <a:lstStyle/>
           <a:p>
-            <a:pPr indent="0" marL="0">
+            <a:pPr marL="0" indent="0">
               <a:buNone/>
             </a:pPr>
             <a:r>
-              <a:rPr lang="en-US" sz="1200" b="1" spc="200" kern="0" dirty="0">
+              <a:rPr lang="en-US" sz="1200" b="1" kern="0" spc="200" dirty="0">
                 <a:solidFill>
                   <a:srgbClr val="0E7C86"/>
                 </a:solidFill>
@@ -9979,7 +9759,7 @@
           <a:bodyPr wrap="square" lIns="0" tIns="0" rIns="0" bIns="0" rtlCol="0" anchor="t"/>
           <a:lstStyle/>
           <a:p>
-            <a:pPr indent="0" marL="0">
+            <a:pPr marL="0" indent="0">
               <a:buNone/>
             </a:pPr>
             <a:r>
@@ -10018,7 +9798,7 @@
           <a:bodyPr wrap="square" lIns="0" tIns="0" rIns="0" bIns="0" rtlCol="0" anchor="ctr"/>
           <a:lstStyle/>
           <a:p>
-            <a:pPr indent="0" marL="0">
+            <a:pPr marL="0" indent="0">
               <a:buNone/>
             </a:pPr>
             <a:r>
@@ -10057,7 +9837,7 @@
           <a:bodyPr wrap="square" lIns="0" tIns="0" rIns="0" bIns="0" rtlCol="0" anchor="ctr"/>
           <a:lstStyle/>
           <a:p>
-            <a:pPr algn="r" indent="0" marL="0">
+            <a:pPr marL="0" indent="0" algn="r">
               <a:buNone/>
             </a:pPr>
             <a:r>
@@ -11408,6 +11188,42 @@
       </p:sp>
       <p:sp>
         <p:nvSpPr>
+          <p:cNvPr id="780" name="PC2 label"/>
+          <p:cNvSpPr/>
+          <p:nvPr/>
+        </p:nvSpPr>
+        <p:spPr>
+          <a:xfrm rot="-5400000">
+            <a:off x="6448000" y="3611280"/>
+            <a:ext cx="1097280" cy="274320"/>
+          </a:xfrm>
+          <a:prstGeom prst="rect">
+            <a:avLst/>
+          </a:prstGeom>
+          <a:noFill/>
+          <a:ln/>
+        </p:spPr>
+        <p:txBody>
+          <a:bodyPr wrap="square" lIns="0" tIns="0" rIns="0" bIns="0" rtlCol="0" anchor="ctr"/>
+          <a:lstStyle/>
+          <a:p>
+            <a:pPr marL="0" indent="0" algn="ctr">
+              <a:buNone/>
+            </a:pPr>
+            <a:r>
+              <a:rPr lang="en-US" sz="1000" dirty="0">
+                <a:solidFill>
+                  <a:srgbClr val="5B6B70"/>
+                </a:solidFill>
+                <a:latin typeface="Calibri" pitchFamily="34" charset="0"/>
+              </a:rPr>
+              <a:t>↑ PC2</a:t>
+            </a:r>
+          </a:p>
+        </p:txBody>
+      </p:sp>
+      <p:sp>
+        <p:nvSpPr>
           <p:cNvPr id="69" name="Text 66"/>
           <p:cNvSpPr/>
           <p:nvPr/>
@@ -11427,7 +11243,7 @@
           <a:bodyPr wrap="square" lIns="0" tIns="0" rIns="0" bIns="0" rtlCol="0" anchor="ctr"/>
           <a:lstStyle/>
           <a:p>
-            <a:pPr algn="ctr" indent="0" marL="0">
+            <a:pPr marL="0" indent="0" algn="ctr">
               <a:buNone/>
             </a:pPr>
             <a:r>
@@ -11466,19 +11282,52 @@
           <a:bodyPr wrap="square" lIns="0" tIns="0" rIns="0" bIns="0" rtlCol="0" anchor="ctr"/>
           <a:lstStyle/>
           <a:p>
-            <a:pPr algn="ctr" indent="0" marL="0">
+            <a:pPr marL="0" indent="0" algn="ctr">
               <a:buNone/>
             </a:pPr>
             <a:r>
               <a:rPr lang="en-US" sz="1000" dirty="0">
                 <a:solidFill>
+                  <a:srgbClr val="C2772B"/>
+                </a:solidFill>
+                <a:latin typeface="Calibri" pitchFamily="34" charset="0"/>
+                <a:ea typeface="Calibri" pitchFamily="34" charset="-122"/>
+                <a:cs typeface="Calibri" pitchFamily="34" charset="-120"/>
+              </a:rPr>
+              <a:t>● </a:t>
+            </a:r>
+            <a:r>
+              <a:rPr lang="en-US" sz="1000" dirty="0">
+                <a:solidFill>
                   <a:srgbClr val="5B6B70"/>
                 </a:solidFill>
                 <a:latin typeface="Calibri" pitchFamily="34" charset="0"/>
                 <a:ea typeface="Calibri" pitchFamily="34" charset="-122"/>
                 <a:cs typeface="Calibri" pitchFamily="34" charset="-120"/>
               </a:rPr>
-              <a:t>● Illumina   ● Affymetrix</a:t>
+              <a:t>Illumina   </a:t>
+            </a:r>
+            <a:r>
+              <a:rPr lang="en-US" sz="1000" dirty="0">
+                <a:solidFill>
+                  <a:srgbClr val="0E7C86"/>
+                </a:solidFill>
+                <a:latin typeface="Calibri" pitchFamily="34" charset="0"/>
+                <a:ea typeface="Calibri" pitchFamily="34" charset="-122"/>
+                <a:cs typeface="Calibri" pitchFamily="34" charset="-120"/>
+              </a:rPr>
+              <a:t>● </a:t>
+            </a:r>
+            <a:r>
+              <a:rPr lang="en-US" sz="1000" dirty="0">
+                <a:solidFill>
+                  <a:srgbClr val="5B6B70"/>
+                </a:solidFill>
+                <a:latin typeface="Calibri" pitchFamily="34" charset="0"/>
+                <a:ea typeface="Calibri" pitchFamily="34" charset="-122"/>
+                <a:cs typeface="Calibri" pitchFamily="34" charset="-120"/>
+              </a:rPr>
+              <a:t>Affymetrix</a:t>
             </a:r>
             <a:endParaRPr lang="en-US" sz="1000" dirty="0"/>
           </a:p>
@@ -11505,7 +11354,7 @@
           <a:bodyPr wrap="square" lIns="0" tIns="0" rIns="0" bIns="0" rtlCol="0" anchor="ctr"/>
           <a:lstStyle/>
           <a:p>
-            <a:pPr algn="ctr" indent="0" marL="0">
+            <a:pPr marL="0" indent="0" algn="ctr">
               <a:buNone/>
             </a:pPr>
             <a:r>
@@ -11539,6 +11388,7 @@
         <a:solidFill>
           <a:srgbClr val="FFFFFF"/>
         </a:solidFill>
+        <a:effectLst/>
       </p:bgPr>
     </p:bg>
     <p:spTree>
@@ -11576,11 +11426,11 @@
           <a:bodyPr wrap="square" lIns="0" tIns="0" rIns="0" bIns="0" rtlCol="0" anchor="ctr"/>
           <a:lstStyle/>
           <a:p>
-            <a:pPr indent="0" marL="0">
+            <a:pPr marL="0" indent="0">
               <a:buNone/>
             </a:pPr>
             <a:r>
-              <a:rPr lang="en-US" sz="1200" b="1" spc="200" kern="0" dirty="0">
+              <a:rPr lang="en-US" sz="1200" b="1" kern="0" spc="200" dirty="0">
                 <a:solidFill>
                   <a:srgbClr val="0E7C86"/>
                 </a:solidFill>
@@ -11615,7 +11465,7 @@
           <a:bodyPr wrap="square" lIns="0" tIns="0" rIns="0" bIns="0" rtlCol="0" anchor="t"/>
           <a:lstStyle/>
           <a:p>
-            <a:pPr indent="0" marL="0">
+            <a:pPr marL="0" indent="0">
               <a:buNone/>
             </a:pPr>
             <a:r>
@@ -11654,7 +11504,7 @@
           <a:bodyPr wrap="square" lIns="0" tIns="0" rIns="0" bIns="0" rtlCol="0" anchor="ctr"/>
           <a:lstStyle/>
           <a:p>
-            <a:pPr indent="0" marL="0">
+            <a:pPr marL="0" indent="0">
               <a:buNone/>
             </a:pPr>
             <a:r>
@@ -11693,7 +11543,7 @@
           <a:bodyPr wrap="square" lIns="0" tIns="0" rIns="0" bIns="0" rtlCol="0" anchor="ctr"/>
           <a:lstStyle/>
           <a:p>
-            <a:pPr algn="r" indent="0" marL="0">
+            <a:pPr marL="0" indent="0" algn="r">
               <a:buNone/>
             </a:pPr>
             <a:r>
@@ -11863,7 +11713,7 @@
           <a:bodyPr wrap="square" lIns="0" tIns="0" rIns="0" bIns="0" rtlCol="0" anchor="ctr"/>
           <a:lstStyle/>
           <a:p>
-            <a:pPr algn="ctr" indent="0" marL="0">
+            <a:pPr marL="0" indent="0" algn="ctr">
               <a:buNone/>
             </a:pPr>
             <a:r>
@@ -12647,7 +12497,7 @@
           <a:bodyPr wrap="square" lIns="0" tIns="0" rIns="0" bIns="0" rtlCol="0" anchor="ctr"/>
           <a:lstStyle/>
           <a:p>
-            <a:pPr algn="ctr" indent="0" marL="0">
+            <a:pPr marL="0" indent="0" algn="ctr">
               <a:buNone/>
             </a:pPr>
             <a:r>
@@ -13406,7 +13256,7 @@
           <a:bodyPr wrap="square" lIns="0" tIns="0" rIns="0" bIns="0" rtlCol="0" anchor="ctr"/>
           <a:lstStyle/>
           <a:p>
-            <a:pPr indent="0" marL="0">
+            <a:pPr marL="0" indent="0">
               <a:buNone/>
             </a:pPr>
             <a:r>
@@ -13440,6 +13290,7 @@
         <a:solidFill>
           <a:srgbClr val="FFFFFF"/>
         </a:solidFill>
+        <a:effectLst/>
       </p:bgPr>
     </p:bg>
     <p:spTree>
@@ -13477,11 +13328,11 @@
           <a:bodyPr wrap="square" lIns="0" tIns="0" rIns="0" bIns="0" rtlCol="0" anchor="ctr"/>
           <a:lstStyle/>
           <a:p>
-            <a:pPr indent="0" marL="0">
+            <a:pPr marL="0" indent="0">
               <a:buNone/>
             </a:pPr>
             <a:r>
-              <a:rPr lang="en-US" sz="1200" b="1" spc="200" kern="0" dirty="0">
+              <a:rPr lang="en-US" sz="1200" b="1" kern="0" spc="200" dirty="0">
                 <a:solidFill>
                   <a:srgbClr val="0E7C86"/>
                 </a:solidFill>
@@ -13516,7 +13367,7 @@
           <a:bodyPr wrap="square" lIns="0" tIns="0" rIns="0" bIns="0" rtlCol="0" anchor="t"/>
           <a:lstStyle/>
           <a:p>
-            <a:pPr indent="0" marL="0">
+            <a:pPr marL="0" indent="0">
               <a:buNone/>
             </a:pPr>
             <a:r>
@@ -13555,7 +13406,7 @@
           <a:bodyPr wrap="square" lIns="0" tIns="0" rIns="0" bIns="0" rtlCol="0" anchor="ctr"/>
           <a:lstStyle/>
           <a:p>
-            <a:pPr indent="0" marL="0">
+            <a:pPr marL="0" indent="0">
               <a:buNone/>
             </a:pPr>
             <a:r>
@@ -13594,7 +13445,7 @@
           <a:bodyPr wrap="square" lIns="0" tIns="0" rIns="0" bIns="0" rtlCol="0" anchor="ctr"/>
           <a:lstStyle/>
           <a:p>
-            <a:pPr algn="r" indent="0" marL="0">
+            <a:pPr marL="0" indent="0" algn="r">
               <a:buNone/>
             </a:pPr>
             <a:r>
@@ -13766,7 +13617,7 @@
           <a:bodyPr wrap="square" lIns="0" tIns="0" rIns="0" bIns="0" rtlCol="0" anchor="ctr"/>
           <a:lstStyle/>
           <a:p>
-            <a:pPr algn="ctr" indent="0" marL="0">
+            <a:pPr marL="0" indent="0" algn="ctr">
               <a:buNone/>
             </a:pPr>
             <a:r>
@@ -13856,7 +13707,7 @@
           <a:bodyPr wrap="square" lIns="0" tIns="0" rIns="0" bIns="0" rtlCol="0" anchor="ctr"/>
           <a:lstStyle/>
           <a:p>
-            <a:pPr algn="ctr" indent="0" marL="0">
+            <a:pPr marL="0" indent="0" algn="ctr">
               <a:buNone/>
             </a:pPr>
             <a:r>
@@ -13873,7 +13724,7 @@
             <a:endParaRPr lang="en-US" sz="1100" dirty="0"/>
           </a:p>
           <a:p>
-            <a:pPr algn="ctr" indent="0" marL="0">
+            <a:pPr marL="0" indent="0" algn="ctr">
               <a:buNone/>
             </a:pPr>
             <a:r>
@@ -13963,7 +13814,7 @@
           <a:bodyPr wrap="square" lIns="0" tIns="0" rIns="0" bIns="0" rtlCol="0" anchor="ctr"/>
           <a:lstStyle/>
           <a:p>
-            <a:pPr algn="ctr" indent="0" marL="0">
+            <a:pPr marL="0" indent="0" algn="ctr">
               <a:buNone/>
             </a:pPr>
             <a:r>
@@ -13980,7 +13831,7 @@
             <a:endParaRPr lang="en-US" sz="1100" dirty="0"/>
           </a:p>
           <a:p>
-            <a:pPr algn="ctr" indent="0" marL="0">
+            <a:pPr marL="0" indent="0" algn="ctr">
               <a:buNone/>
             </a:pPr>
             <a:r>
@@ -14070,7 +13921,7 @@
           <a:bodyPr wrap="square" lIns="0" tIns="0" rIns="0" bIns="0" rtlCol="0" anchor="ctr"/>
           <a:lstStyle/>
           <a:p>
-            <a:pPr algn="ctr" indent="0" marL="0">
+            <a:pPr marL="0" indent="0" algn="ctr">
               <a:buNone/>
             </a:pPr>
             <a:r>
@@ -14136,7 +13987,7 @@
           <a:bodyPr wrap="square" lIns="0" tIns="0" rIns="0" bIns="0" rtlCol="0" anchor="ctr"/>
           <a:lstStyle/>
           <a:p>
-            <a:pPr algn="ctr" indent="0" marL="0">
+            <a:pPr marL="0" indent="0" algn="ctr">
               <a:buNone/>
             </a:pPr>
             <a:r>
@@ -14175,7 +14026,7 @@
           <a:bodyPr wrap="square" lIns="0" tIns="0" rIns="0" bIns="0" rtlCol="0" anchor="ctr"/>
           <a:lstStyle/>
           <a:p>
-            <a:pPr indent="0" marL="0">
+            <a:pPr marL="0" indent="0">
               <a:buNone/>
             </a:pPr>
             <a:r>
@@ -14209,6 +14060,7 @@
         <a:solidFill>
           <a:srgbClr val="FFFFFF"/>
         </a:solidFill>
+        <a:effectLst/>
       </p:bgPr>
     </p:bg>
     <p:spTree>
@@ -14246,11 +14098,11 @@
           <a:bodyPr wrap="square" lIns="0" tIns="0" rIns="0" bIns="0" rtlCol="0" anchor="ctr"/>
           <a:lstStyle/>
           <a:p>
-            <a:pPr indent="0" marL="0">
+            <a:pPr marL="0" indent="0">
               <a:buNone/>
             </a:pPr>
             <a:r>
-              <a:rPr lang="en-US" sz="1200" b="1" spc="200" kern="0" dirty="0">
+              <a:rPr lang="en-US" sz="1200" b="1" kern="0" spc="200" dirty="0">
                 <a:solidFill>
                   <a:srgbClr val="0E7C86"/>
                 </a:solidFill>
@@ -14285,7 +14137,7 @@
           <a:bodyPr wrap="square" lIns="0" tIns="0" rIns="0" bIns="0" rtlCol="0" anchor="t"/>
           <a:lstStyle/>
           <a:p>
-            <a:pPr indent="0" marL="0">
+            <a:pPr marL="0" indent="0">
               <a:buNone/>
             </a:pPr>
             <a:r>
@@ -14324,7 +14176,7 @@
           <a:bodyPr wrap="square" lIns="0" tIns="0" rIns="0" bIns="0" rtlCol="0" anchor="ctr"/>
           <a:lstStyle/>
           <a:p>
-            <a:pPr indent="0" marL="0">
+            <a:pPr marL="0" indent="0">
               <a:buNone/>
             </a:pPr>
             <a:r>
@@ -14363,7 +14215,7 @@
           <a:bodyPr wrap="square" lIns="0" tIns="0" rIns="0" bIns="0" rtlCol="0" anchor="ctr"/>
           <a:lstStyle/>
           <a:p>
-            <a:pPr algn="r" indent="0" marL="0">
+            <a:pPr marL="0" indent="0" algn="r">
               <a:buNone/>
             </a:pPr>
             <a:r>
@@ -14555,7 +14407,7 @@
           <a:bodyPr wrap="square" lIns="0" tIns="0" rIns="0" bIns="0" rtlCol="0" anchor="ctr"/>
           <a:lstStyle/>
           <a:p>
-            <a:pPr algn="ctr" indent="0" marL="0">
+            <a:pPr marL="0" indent="0" algn="ctr">
               <a:buNone/>
             </a:pPr>
             <a:r>
@@ -14594,7 +14446,7 @@
           <a:bodyPr wrap="square" lIns="0" tIns="0" rIns="0" bIns="0" rtlCol="0" anchor="ctr"/>
           <a:lstStyle/>
           <a:p>
-            <a:pPr indent="0" marL="0">
+            <a:pPr marL="0" indent="0">
               <a:buNone/>
             </a:pPr>
             <a:r>
@@ -14680,7 +14532,7 @@
           <a:bodyPr wrap="square" lIns="0" tIns="0" rIns="0" bIns="0" rtlCol="0" anchor="ctr"/>
           <a:lstStyle/>
           <a:p>
-            <a:pPr algn="ctr" indent="0" marL="0">
+            <a:pPr marL="0" indent="0" algn="ctr">
               <a:buNone/>
             </a:pPr>
             <a:r>
@@ -14719,7 +14571,7 @@
           <a:bodyPr wrap="square" lIns="0" tIns="0" rIns="0" bIns="0" rtlCol="0" anchor="ctr"/>
           <a:lstStyle/>
           <a:p>
-            <a:pPr indent="0" marL="0">
+            <a:pPr marL="0" indent="0">
               <a:buNone/>
             </a:pPr>
             <a:r>
@@ -14805,7 +14657,7 @@
           <a:bodyPr wrap="square" lIns="0" tIns="0" rIns="0" bIns="0" rtlCol="0" anchor="ctr"/>
           <a:lstStyle/>
           <a:p>
-            <a:pPr algn="ctr" indent="0" marL="0">
+            <a:pPr marL="0" indent="0" algn="ctr">
               <a:buNone/>
             </a:pPr>
             <a:r>
@@ -14844,7 +14696,7 @@
           <a:bodyPr wrap="square" lIns="0" tIns="0" rIns="0" bIns="0" rtlCol="0" anchor="ctr"/>
           <a:lstStyle/>
           <a:p>
-            <a:pPr indent="0" marL="0">
+            <a:pPr marL="0" indent="0">
               <a:buNone/>
             </a:pPr>
             <a:r>
@@ -14883,7 +14735,7 @@
           </a:solidFill>
           <a:ln/>
           <a:effectLst>
-            <a:outerShdw sx="100000" sy="100000" kx="0" ky="0" algn="bl" rotWithShape="0" blurRad="88900" dist="38100" dir="5400000">
+            <a:outerShdw blurRad="88900" dist="38100" dir="5400000" algn="bl" rotWithShape="0">
               <a:srgbClr val="000000">
                 <a:alpha val="12000"/>
               </a:srgbClr>
@@ -14932,7 +14784,7 @@
           <a:bodyPr wrap="square" lIns="0" tIns="0" rIns="0" bIns="0" rtlCol="0" anchor="ctr"/>
           <a:lstStyle/>
           <a:p>
-            <a:pPr algn="ctr" indent="0" marL="0">
+            <a:pPr marL="0" indent="0" algn="ctr">
               <a:buNone/>
             </a:pPr>
             <a:r>
@@ -14971,7 +14823,7 @@
           <a:bodyPr wrap="square" lIns="0" tIns="0" rIns="0" bIns="0" rtlCol="0" anchor="ctr"/>
           <a:lstStyle/>
           <a:p>
-            <a:pPr indent="0" marL="0">
+            <a:pPr marL="0" indent="0">
               <a:buNone/>
             </a:pPr>
             <a:r>
@@ -15057,7 +14909,7 @@
           <a:bodyPr wrap="square" lIns="0" tIns="0" rIns="0" bIns="0" rtlCol="0" anchor="ctr"/>
           <a:lstStyle/>
           <a:p>
-            <a:pPr algn="ctr" indent="0" marL="0">
+            <a:pPr marL="0" indent="0" algn="ctr">
               <a:buNone/>
             </a:pPr>
             <a:r>
@@ -15096,7 +14948,7 @@
           <a:bodyPr wrap="square" lIns="0" tIns="0" rIns="0" bIns="0" rtlCol="0" anchor="ctr"/>
           <a:lstStyle/>
           <a:p>
-            <a:pPr indent="0" marL="0">
+            <a:pPr marL="0" indent="0">
               <a:buNone/>
             </a:pPr>
             <a:r>
@@ -15130,6 +14982,7 @@
         <a:solidFill>
           <a:srgbClr val="FFFFFF"/>
         </a:solidFill>
+        <a:effectLst/>
       </p:bgPr>
     </p:bg>
     <p:spTree>
@@ -15167,11 +15020,11 @@
           <a:bodyPr wrap="square" lIns="0" tIns="0" rIns="0" bIns="0" rtlCol="0" anchor="ctr"/>
           <a:lstStyle/>
           <a:p>
-            <a:pPr indent="0" marL="0">
+            <a:pPr marL="0" indent="0">
               <a:buNone/>
             </a:pPr>
             <a:r>
-              <a:rPr lang="en-US" sz="1200" b="1" spc="200" kern="0" dirty="0">
+              <a:rPr lang="en-US" sz="1200" b="1" kern="0" spc="200" dirty="0">
                 <a:solidFill>
                   <a:srgbClr val="0E7C86"/>
                 </a:solidFill>
@@ -15206,7 +15059,7 @@
           <a:bodyPr wrap="square" lIns="0" tIns="0" rIns="0" bIns="0" rtlCol="0" anchor="t"/>
           <a:lstStyle/>
           <a:p>
-            <a:pPr indent="0" marL="0">
+            <a:pPr marL="0" indent="0">
               <a:buNone/>
             </a:pPr>
             <a:r>
@@ -15245,7 +15098,7 @@
           <a:bodyPr wrap="square" lIns="0" tIns="0" rIns="0" bIns="0" rtlCol="0" anchor="ctr"/>
           <a:lstStyle/>
           <a:p>
-            <a:pPr indent="0" marL="0">
+            <a:pPr marL="0" indent="0">
               <a:buNone/>
             </a:pPr>
             <a:r>
@@ -15284,7 +15137,7 @@
           <a:bodyPr wrap="square" lIns="0" tIns="0" rIns="0" bIns="0" rtlCol="0" anchor="ctr"/>
           <a:lstStyle/>
           <a:p>
-            <a:pPr algn="r" indent="0" marL="0">
+            <a:pPr marL="0" indent="0" algn="r">
               <a:buNone/>
             </a:pPr>
             <a:r>
@@ -15429,7 +15282,7 @@
           </a:solidFill>
           <a:ln/>
           <a:effectLst>
-            <a:outerShdw sx="100000" sy="100000" kx="0" ky="0" algn="bl" rotWithShape="0" blurRad="88900" dist="38100" dir="5400000">
+            <a:outerShdw blurRad="88900" dist="38100" dir="5400000" algn="bl" rotWithShape="0">
               <a:srgbClr val="000000">
                 <a:alpha val="12000"/>
               </a:srgbClr>
@@ -15458,7 +15311,7 @@
           <a:bodyPr wrap="square" lIns="0" tIns="0" rIns="0" bIns="0" rtlCol="0" anchor="ctr"/>
           <a:lstStyle/>
           <a:p>
-            <a:pPr algn="ctr" indent="0" marL="0">
+            <a:pPr marL="0" indent="0" algn="ctr">
               <a:buNone/>
             </a:pPr>
             <a:r>
@@ -15521,7 +15374,7 @@
           <a:bodyPr wrap="square" lIns="0" tIns="0" rIns="0" bIns="0" rtlCol="0" anchor="ctr"/>
           <a:lstStyle/>
           <a:p>
-            <a:pPr indent="0" marL="0">
+            <a:pPr marL="0" indent="0">
               <a:buNone/>
             </a:pPr>
             <a:r>
@@ -15560,7 +15413,7 @@
           </a:solidFill>
           <a:ln/>
           <a:effectLst>
-            <a:outerShdw sx="100000" sy="100000" kx="0" ky="0" algn="bl" rotWithShape="0" blurRad="88900" dist="38100" dir="5400000">
+            <a:outerShdw blurRad="88900" dist="38100" dir="5400000" algn="bl" rotWithShape="0">
               <a:srgbClr val="000000">
                 <a:alpha val="12000"/>
               </a:srgbClr>
@@ -15589,7 +15442,7 @@
           <a:bodyPr wrap="square" lIns="0" tIns="0" rIns="0" bIns="0" rtlCol="0" anchor="ctr"/>
           <a:lstStyle/>
           <a:p>
-            <a:pPr algn="ctr" indent="0" marL="0">
+            <a:pPr marL="0" indent="0" algn="ctr">
               <a:buNone/>
             </a:pPr>
             <a:r>
@@ -15616,7 +15469,7 @@
         <p:spPr>
           <a:xfrm>
             <a:off x="7132320" y="4892040"/>
-            <a:ext cx="3840480" cy="-685800"/>
+            <a:ext cx="3840480" cy="0"/>
           </a:xfrm>
           <a:prstGeom prst="line">
             <a:avLst/>
@@ -15646,6 +15499,7 @@
         <a:solidFill>
           <a:srgbClr val="FFFFFF"/>
         </a:solidFill>
+        <a:effectLst/>
       </p:bgPr>
     </p:bg>
     <p:spTree>
@@ -15683,11 +15537,11 @@
           <a:bodyPr wrap="square" lIns="0" tIns="0" rIns="0" bIns="0" rtlCol="0" anchor="ctr"/>
           <a:lstStyle/>
           <a:p>
-            <a:pPr indent="0" marL="0">
+            <a:pPr marL="0" indent="0">
               <a:buNone/>
             </a:pPr>
             <a:r>
-              <a:rPr lang="en-US" sz="1200" b="1" spc="200" kern="0" dirty="0">
+              <a:rPr lang="en-US" sz="1200" b="1" kern="0" spc="200" dirty="0">
                 <a:solidFill>
                   <a:srgbClr val="0E7C86"/>
                 </a:solidFill>
@@ -15722,7 +15576,7 @@
           <a:bodyPr wrap="square" lIns="0" tIns="0" rIns="0" bIns="0" rtlCol="0" anchor="t"/>
           <a:lstStyle/>
           <a:p>
-            <a:pPr indent="0" marL="0">
+            <a:pPr marL="0" indent="0">
               <a:buNone/>
             </a:pPr>
             <a:r>
@@ -15761,7 +15615,7 @@
           <a:bodyPr wrap="square" lIns="0" tIns="0" rIns="0" bIns="0" rtlCol="0" anchor="ctr"/>
           <a:lstStyle/>
           <a:p>
-            <a:pPr indent="0" marL="0">
+            <a:pPr marL="0" indent="0">
               <a:buNone/>
             </a:pPr>
             <a:r>
@@ -15800,7 +15654,7 @@
           <a:bodyPr wrap="square" lIns="0" tIns="0" rIns="0" bIns="0" rtlCol="0" anchor="ctr"/>
           <a:lstStyle/>
           <a:p>
-            <a:pPr algn="r" indent="0" marL="0">
+            <a:pPr marL="0" indent="0" algn="r">
               <a:buNone/>
             </a:pPr>
             <a:r>
@@ -15990,7 +15844,7 @@
           <a:bodyPr wrap="square" lIns="0" tIns="0" rIns="0" bIns="0" rtlCol="0" anchor="ctr"/>
           <a:lstStyle/>
           <a:p>
-            <a:pPr algn="r" indent="0" marL="0">
+            <a:pPr marL="0" indent="0" algn="r">
               <a:buNone/>
             </a:pPr>
             <a:r>
@@ -16072,7 +15926,7 @@
           <a:bodyPr wrap="square" lIns="0" tIns="0" rIns="0" bIns="0" rtlCol="0" anchor="ctr"/>
           <a:lstStyle/>
           <a:p>
-            <a:pPr algn="r" indent="0" marL="0">
+            <a:pPr marL="0" indent="0" algn="r">
               <a:buNone/>
             </a:pPr>
             <a:r>
@@ -16154,7 +16008,7 @@
           <a:bodyPr wrap="square" lIns="0" tIns="0" rIns="0" bIns="0" rtlCol="0" anchor="ctr"/>
           <a:lstStyle/>
           <a:p>
-            <a:pPr algn="r" indent="0" marL="0">
+            <a:pPr marL="0" indent="0" algn="r">
               <a:buNone/>
             </a:pPr>
             <a:r>
@@ -16236,7 +16090,7 @@
           <a:bodyPr wrap="square" lIns="0" tIns="0" rIns="0" bIns="0" rtlCol="0" anchor="ctr"/>
           <a:lstStyle/>
           <a:p>
-            <a:pPr algn="r" indent="0" marL="0">
+            <a:pPr marL="0" indent="0" algn="r">
               <a:buNone/>
             </a:pPr>
             <a:r>
@@ -16318,7 +16172,7 @@
           <a:bodyPr wrap="square" lIns="0" tIns="0" rIns="0" bIns="0" rtlCol="0" anchor="ctr"/>
           <a:lstStyle/>
           <a:p>
-            <a:pPr algn="r" indent="0" marL="0">
+            <a:pPr marL="0" indent="0" algn="r">
               <a:buNone/>
             </a:pPr>
             <a:r>
@@ -16380,7 +16234,7 @@
           <a:bodyPr wrap="square" lIns="0" tIns="0" rIns="0" bIns="0" rtlCol="0" anchor="ctr"/>
           <a:lstStyle/>
           <a:p>
-            <a:pPr algn="ctr" indent="0" marL="0">
+            <a:pPr marL="0" indent="0" algn="ctr">
               <a:buNone/>
             </a:pPr>
             <a:r>
@@ -16414,6 +16268,7 @@
         <a:solidFill>
           <a:srgbClr val="FFFFFF"/>
         </a:solidFill>
+        <a:effectLst/>
       </p:bgPr>
     </p:bg>
     <p:spTree>
@@ -16451,11 +16306,11 @@
           <a:bodyPr wrap="square" lIns="0" tIns="0" rIns="0" bIns="0" rtlCol="0" anchor="ctr"/>
           <a:lstStyle/>
           <a:p>
-            <a:pPr indent="0" marL="0">
+            <a:pPr marL="0" indent="0">
               <a:buNone/>
             </a:pPr>
             <a:r>
-              <a:rPr lang="en-US" sz="1200" b="1" spc="200" kern="0" dirty="0">
+              <a:rPr lang="en-US" sz="1200" b="1" kern="0" spc="200" dirty="0">
                 <a:solidFill>
                   <a:srgbClr val="0E7C86"/>
                 </a:solidFill>
@@ -16490,7 +16345,7 @@
           <a:bodyPr wrap="square" lIns="0" tIns="0" rIns="0" bIns="0" rtlCol="0" anchor="t"/>
           <a:lstStyle/>
           <a:p>
-            <a:pPr indent="0" marL="0">
+            <a:pPr marL="0" indent="0">
               <a:buNone/>
             </a:pPr>
             <a:r>
@@ -16529,7 +16384,7 @@
           <a:bodyPr wrap="square" lIns="0" tIns="0" rIns="0" bIns="0" rtlCol="0" anchor="ctr"/>
           <a:lstStyle/>
           <a:p>
-            <a:pPr indent="0" marL="0">
+            <a:pPr marL="0" indent="0">
               <a:buNone/>
             </a:pPr>
             <a:r>
@@ -16568,7 +16423,7 @@
           <a:bodyPr wrap="square" lIns="0" tIns="0" rIns="0" bIns="0" rtlCol="0" anchor="ctr"/>
           <a:lstStyle/>
           <a:p>
-            <a:pPr algn="r" indent="0" marL="0">
+            <a:pPr marL="0" indent="0" algn="r">
               <a:buNone/>
             </a:pPr>
             <a:r>
@@ -16736,7 +16591,7 @@
           <a:bodyPr wrap="square" lIns="0" tIns="0" rIns="0" bIns="0" rtlCol="0" anchor="ctr"/>
           <a:lstStyle/>
           <a:p>
-            <a:pPr algn="ctr" indent="0" marL="0">
+            <a:pPr marL="0" indent="0" algn="ctr">
               <a:buNone/>
             </a:pPr>
             <a:r>
@@ -16795,7 +16650,7 @@
           <a:bodyPr wrap="square" lIns="0" tIns="0" rIns="0" bIns="0" rtlCol="0" anchor="ctr"/>
           <a:lstStyle/>
           <a:p>
-            <a:pPr algn="r" indent="0" marL="0">
+            <a:pPr marL="0" indent="0" algn="r">
               <a:buNone/>
             </a:pPr>
             <a:r>
@@ -16854,7 +16709,7 @@
           <a:bodyPr wrap="square" lIns="0" tIns="0" rIns="0" bIns="0" rtlCol="0" anchor="ctr"/>
           <a:lstStyle/>
           <a:p>
-            <a:pPr algn="r" indent="0" marL="0">
+            <a:pPr marL="0" indent="0" algn="r">
               <a:buNone/>
             </a:pPr>
             <a:r>
@@ -16913,7 +16768,7 @@
           <a:bodyPr wrap="square" lIns="0" tIns="0" rIns="0" bIns="0" rtlCol="0" anchor="ctr"/>
           <a:lstStyle/>
           <a:p>
-            <a:pPr algn="r" indent="0" marL="0">
+            <a:pPr marL="0" indent="0" algn="r">
               <a:buNone/>
             </a:pPr>
             <a:r>
@@ -16972,7 +16827,7 @@
           <a:bodyPr wrap="square" lIns="0" tIns="0" rIns="0" bIns="0" rtlCol="0" anchor="ctr"/>
           <a:lstStyle/>
           <a:p>
-            <a:pPr algn="r" indent="0" marL="0">
+            <a:pPr marL="0" indent="0" algn="r">
               <a:buNone/>
             </a:pPr>
             <a:r>
@@ -17011,7 +16866,7 @@
           <a:bodyPr wrap="square" lIns="0" tIns="0" rIns="0" bIns="0" rtlCol="0" anchor="ctr"/>
           <a:lstStyle/>
           <a:p>
-            <a:pPr algn="ctr" indent="0" marL="0">
+            <a:pPr marL="0" indent="0" algn="ctr">
               <a:buNone/>
             </a:pPr>
             <a:r>
@@ -17045,6 +16900,7 @@
         <a:solidFill>
           <a:srgbClr val="FFFFFF"/>
         </a:solidFill>
+        <a:effectLst/>
       </p:bgPr>
     </p:bg>
     <p:spTree>
@@ -17082,11 +16938,11 @@
           <a:bodyPr wrap="square" lIns="0" tIns="0" rIns="0" bIns="0" rtlCol="0" anchor="ctr"/>
           <a:lstStyle/>
           <a:p>
-            <a:pPr indent="0" marL="0">
+            <a:pPr marL="0" indent="0">
               <a:buNone/>
             </a:pPr>
             <a:r>
-              <a:rPr lang="en-US" sz="1200" b="1" spc="200" kern="0" dirty="0">
+              <a:rPr lang="en-US" sz="1200" b="1" kern="0" spc="200" dirty="0">
                 <a:solidFill>
                   <a:srgbClr val="0E7C86"/>
                 </a:solidFill>
@@ -17121,7 +16977,7 @@
           <a:bodyPr wrap="square" lIns="0" tIns="0" rIns="0" bIns="0" rtlCol="0" anchor="t"/>
           <a:lstStyle/>
           <a:p>
-            <a:pPr indent="0" marL="0">
+            <a:pPr marL="0" indent="0">
               <a:buNone/>
             </a:pPr>
             <a:r>
@@ -17160,7 +17016,7 @@
           <a:bodyPr wrap="square" lIns="0" tIns="0" rIns="0" bIns="0" rtlCol="0" anchor="ctr"/>
           <a:lstStyle/>
           <a:p>
-            <a:pPr indent="0" marL="0">
+            <a:pPr marL="0" indent="0">
               <a:buNone/>
             </a:pPr>
             <a:r>
@@ -17199,7 +17055,7 @@
           <a:bodyPr wrap="square" lIns="0" tIns="0" rIns="0" bIns="0" rtlCol="0" anchor="ctr"/>
           <a:lstStyle/>
           <a:p>
-            <a:pPr algn="r" indent="0" marL="0">
+            <a:pPr marL="0" indent="0" algn="r">
               <a:buNone/>
             </a:pPr>
             <a:r>
@@ -17344,7 +17200,7 @@
           </a:solidFill>
           <a:ln/>
           <a:effectLst>
-            <a:outerShdw sx="100000" sy="100000" kx="0" ky="0" algn="bl" rotWithShape="0" blurRad="88900" dist="38100" dir="5400000">
+            <a:outerShdw blurRad="88900" dist="38100" dir="5400000" algn="bl" rotWithShape="0">
               <a:srgbClr val="000000">
                 <a:alpha val="12000"/>
               </a:srgbClr>
@@ -17373,7 +17229,7 @@
           <a:bodyPr wrap="square" lIns="0" tIns="0" rIns="0" bIns="0" rtlCol="0" anchor="ctr"/>
           <a:lstStyle/>
           <a:p>
-            <a:pPr algn="ctr" indent="0" marL="0">
+            <a:pPr marL="0" indent="0" algn="ctr">
               <a:buNone/>
             </a:pPr>
             <a:r>
@@ -17390,7 +17246,7 @@
             <a:endParaRPr lang="en-US" sz="1100" dirty="0"/>
           </a:p>
           <a:p>
-            <a:pPr algn="ctr" indent="0" marL="0">
+            <a:pPr marL="0" indent="0" algn="ctr">
               <a:buNone/>
             </a:pPr>
             <a:r>
@@ -17456,7 +17312,7 @@
           <a:bodyPr wrap="square" lIns="0" tIns="0" rIns="0" bIns="0" rtlCol="0" anchor="ctr"/>
           <a:lstStyle/>
           <a:p>
-            <a:pPr algn="ctr" indent="0" marL="0">
+            <a:pPr marL="0" indent="0" algn="ctr">
               <a:buNone/>
             </a:pPr>
             <a:r>
@@ -17546,7 +17402,7 @@
           <a:bodyPr wrap="square" lIns="0" tIns="0" rIns="0" bIns="0" rtlCol="0" anchor="ctr"/>
           <a:lstStyle/>
           <a:p>
-            <a:pPr algn="ctr" indent="0" marL="0">
+            <a:pPr marL="0" indent="0" algn="ctr">
               <a:buNone/>
             </a:pPr>
             <a:r>
@@ -17563,7 +17419,7 @@
             <a:endParaRPr lang="en-US" sz="1000" dirty="0"/>
           </a:p>
           <a:p>
-            <a:pPr algn="ctr" indent="0" marL="0">
+            <a:pPr marL="0" indent="0" algn="ctr">
               <a:buNone/>
             </a:pPr>
             <a:r>
@@ -17653,7 +17509,7 @@
           <a:bodyPr wrap="square" lIns="0" tIns="0" rIns="0" bIns="0" rtlCol="0" anchor="ctr"/>
           <a:lstStyle/>
           <a:p>
-            <a:pPr algn="ctr" indent="0" marL="0">
+            <a:pPr marL="0" indent="0" algn="ctr">
               <a:buNone/>
             </a:pPr>
             <a:r>
@@ -17670,7 +17526,7 @@
             <a:endParaRPr lang="en-US" sz="1000" dirty="0"/>
           </a:p>
           <a:p>
-            <a:pPr algn="ctr" indent="0" marL="0">
+            <a:pPr marL="0" indent="0" algn="ctr">
               <a:buNone/>
             </a:pPr>
             <a:r>
@@ -17688,30 +17544,28 @@
           </a:p>
         </p:txBody>
       </p:sp>
-      <p:sp>
-        <p:nvSpPr>
-          <p:cNvPr id="18" name="Shape 15"/>
-          <p:cNvSpPr/>
-          <p:nvPr/>
-        </p:nvSpPr>
-        <p:spPr>
-          <a:xfrm>
-            <a:off x="8823960" y="4754880"/>
-            <a:ext cx="1005840" cy="-1051560"/>
-          </a:xfrm>
-          <a:prstGeom prst="line">
-            <a:avLst/>
-          </a:prstGeom>
-          <a:noFill/>
+      <p:cxnSp>
+        <p:nvCxnSpPr>
+          <p:cNvPr id="755" name="Shape 15"/>
+          <p:cNvCxnSpPr/>
+          <p:nvPr/>
+        </p:nvCxnSpPr>
+        <p:spPr>
+          <a:xfrm flipV="1">
+            <a:off x="8823960" y="4000000"/>
+            <a:ext cx="1051560" cy="754880"/>
+          </a:xfrm>
+          <a:prstGeom prst="straightConnector1">
+            <a:avLst/>
+          </a:prstGeom>
           <a:ln w="19050">
             <a:solidFill>
-              <a:srgbClr val="A8403A"/>
+              <a:srgbClr val="9E2B25"/>
             </a:solidFill>
-            <a:prstDash val="solid"/>
-            <a:tailEnd type="triangle"/>
+            <a:tailEnd type="triangle" w="med" len="med"/>
           </a:ln>
         </p:spPr>
-      </p:sp>
+      </p:cxnSp>
       <p:sp>
         <p:nvSpPr>
           <p:cNvPr id="19" name="Text 16"/>
@@ -17733,7 +17587,7 @@
           <a:bodyPr wrap="square" lIns="0" tIns="0" rIns="0" bIns="0" rtlCol="0" anchor="ctr"/>
           <a:lstStyle/>
           <a:p>
-            <a:pPr indent="0" marL="0">
+            <a:pPr marL="0" indent="0">
               <a:buNone/>
             </a:pPr>
             <a:r>
@@ -17767,6 +17621,7 @@
         <a:solidFill>
           <a:srgbClr val="FFFFFF"/>
         </a:solidFill>
+        <a:effectLst/>
       </p:bgPr>
     </p:bg>
     <p:spTree>
@@ -17804,11 +17659,11 @@
           <a:bodyPr wrap="square" lIns="0" tIns="0" rIns="0" bIns="0" rtlCol="0" anchor="ctr"/>
           <a:lstStyle/>
           <a:p>
-            <a:pPr indent="0" marL="0">
+            <a:pPr marL="0" indent="0">
               <a:buNone/>
             </a:pPr>
             <a:r>
-              <a:rPr lang="en-US" sz="1200" b="1" spc="200" kern="0" dirty="0">
+              <a:rPr lang="en-US" sz="1200" b="1" kern="0" spc="200" dirty="0">
                 <a:solidFill>
                   <a:srgbClr val="0E7C86"/>
                 </a:solidFill>
@@ -17843,7 +17698,7 @@
           <a:bodyPr wrap="square" lIns="0" tIns="0" rIns="0" bIns="0" rtlCol="0" anchor="t"/>
           <a:lstStyle/>
           <a:p>
-            <a:pPr indent="0" marL="0">
+            <a:pPr marL="0" indent="0">
               <a:buNone/>
             </a:pPr>
             <a:r>
@@ -17882,7 +17737,7 @@
           <a:bodyPr wrap="square" lIns="0" tIns="0" rIns="0" bIns="0" rtlCol="0" anchor="ctr"/>
           <a:lstStyle/>
           <a:p>
-            <a:pPr indent="0" marL="0">
+            <a:pPr marL="0" indent="0">
               <a:buNone/>
             </a:pPr>
             <a:r>
@@ -17921,7 +17776,7 @@
           <a:bodyPr wrap="square" lIns="0" tIns="0" rIns="0" bIns="0" rtlCol="0" anchor="ctr"/>
           <a:lstStyle/>
           <a:p>
-            <a:pPr algn="r" indent="0" marL="0">
+            <a:pPr marL="0" indent="0" algn="r">
               <a:buNone/>
             </a:pPr>
             <a:r>
@@ -18088,7 +17943,7 @@
           <a:bodyPr wrap="square" lIns="0" tIns="0" rIns="0" bIns="0" rtlCol="0" anchor="ctr"/>
           <a:lstStyle/>
           <a:p>
-            <a:pPr algn="ctr" indent="0" marL="0">
+            <a:pPr marL="0" indent="0" algn="ctr">
               <a:buNone/>
             </a:pPr>
             <a:r>
@@ -18173,7 +18028,7 @@
           <a:bodyPr wrap="square" lIns="0" tIns="0" rIns="0" bIns="0" rtlCol="0" anchor="ctr"/>
           <a:lstStyle/>
           <a:p>
-            <a:pPr algn="ctr" indent="0" marL="0">
+            <a:pPr marL="0" indent="0" algn="ctr">
               <a:buNone/>
             </a:pPr>
             <a:r>
@@ -18258,7 +18113,7 @@
           <a:bodyPr wrap="square" lIns="0" tIns="0" rIns="0" bIns="0" rtlCol="0" anchor="ctr"/>
           <a:lstStyle/>
           <a:p>
-            <a:pPr algn="ctr" indent="0" marL="0">
+            <a:pPr marL="0" indent="0" algn="ctr">
               <a:buNone/>
             </a:pPr>
             <a:r>
@@ -18343,7 +18198,7 @@
           <a:bodyPr wrap="square" lIns="0" tIns="0" rIns="0" bIns="0" rtlCol="0" anchor="ctr"/>
           <a:lstStyle/>
           <a:p>
-            <a:pPr algn="ctr" indent="0" marL="0">
+            <a:pPr marL="0" indent="0" algn="ctr">
               <a:buNone/>
             </a:pPr>
             <a:r>
@@ -18428,7 +18283,7 @@
           <a:bodyPr wrap="square" lIns="0" tIns="0" rIns="0" bIns="0" rtlCol="0" anchor="ctr"/>
           <a:lstStyle/>
           <a:p>
-            <a:pPr algn="ctr" indent="0" marL="0">
+            <a:pPr marL="0" indent="0" algn="ctr">
               <a:buNone/>
             </a:pPr>
             <a:r>
@@ -18462,6 +18317,7 @@
         <a:solidFill>
           <a:srgbClr val="FFFFFF"/>
         </a:solidFill>
+        <a:effectLst/>
       </p:bgPr>
     </p:bg>
     <p:spTree>
@@ -18499,11 +18355,11 @@
           <a:bodyPr wrap="square" lIns="0" tIns="0" rIns="0" bIns="0" rtlCol="0" anchor="ctr"/>
           <a:lstStyle/>
           <a:p>
-            <a:pPr indent="0" marL="0">
+            <a:pPr marL="0" indent="0">
               <a:buNone/>
             </a:pPr>
             <a:r>
-              <a:rPr lang="en-US" sz="1200" b="1" spc="200" kern="0" dirty="0">
+              <a:rPr lang="en-US" sz="1200" b="1" kern="0" spc="200" dirty="0">
                 <a:solidFill>
                   <a:srgbClr val="0E7C86"/>
                 </a:solidFill>
@@ -18538,7 +18394,7 @@
           <a:bodyPr wrap="square" lIns="0" tIns="0" rIns="0" bIns="0" rtlCol="0" anchor="t"/>
           <a:lstStyle/>
           <a:p>
-            <a:pPr indent="0" marL="0">
+            <a:pPr marL="0" indent="0">
               <a:buNone/>
             </a:pPr>
             <a:r>
@@ -18577,7 +18433,7 @@
           <a:bodyPr wrap="square" lIns="0" tIns="0" rIns="0" bIns="0" rtlCol="0" anchor="ctr"/>
           <a:lstStyle/>
           <a:p>
-            <a:pPr indent="0" marL="0">
+            <a:pPr marL="0" indent="0">
               <a:buNone/>
             </a:pPr>
             <a:r>
@@ -18616,7 +18472,7 @@
           <a:bodyPr wrap="square" lIns="0" tIns="0" rIns="0" bIns="0" rtlCol="0" anchor="ctr"/>
           <a:lstStyle/>
           <a:p>
-            <a:pPr algn="r" indent="0" marL="0">
+            <a:pPr marL="0" indent="0" algn="r">
               <a:buNone/>
             </a:pPr>
             <a:r>
@@ -18788,7 +18644,7 @@
           <a:bodyPr wrap="square" lIns="0" tIns="0" rIns="0" bIns="0" rtlCol="0" anchor="ctr"/>
           <a:lstStyle/>
           <a:p>
-            <a:pPr algn="ctr" indent="0" marL="0">
+            <a:pPr marL="0" indent="0" algn="ctr">
               <a:buNone/>
             </a:pPr>
             <a:r>
@@ -18827,7 +18683,7 @@
           <a:bodyPr wrap="square" lIns="0" tIns="0" rIns="0" bIns="0" rtlCol="0" anchor="ctr"/>
           <a:lstStyle/>
           <a:p>
-            <a:pPr algn="ctr" indent="0" marL="0">
+            <a:pPr marL="0" indent="0" algn="ctr">
               <a:buNone/>
             </a:pPr>
             <a:r>
@@ -18893,7 +18749,7 @@
           <a:bodyPr wrap="square" lIns="0" tIns="0" rIns="0" bIns="0" rtlCol="0" anchor="ctr"/>
           <a:lstStyle/>
           <a:p>
-            <a:pPr algn="ctr" indent="0" marL="0">
+            <a:pPr marL="0" indent="0" algn="ctr">
               <a:buNone/>
             </a:pPr>
             <a:r>
@@ -18927,6 +18783,7 @@
         <a:solidFill>
           <a:srgbClr val="FFFFFF"/>
         </a:solidFill>
+        <a:effectLst/>
       </p:bgPr>
     </p:bg>
     <p:spTree>
@@ -18964,11 +18821,11 @@
           <a:bodyPr wrap="square" lIns="0" tIns="0" rIns="0" bIns="0" rtlCol="0" anchor="ctr"/>
           <a:lstStyle/>
           <a:p>
-            <a:pPr indent="0" marL="0">
+            <a:pPr marL="0" indent="0">
               <a:buNone/>
             </a:pPr>
             <a:r>
-              <a:rPr lang="en-US" sz="1200" b="1" spc="200" kern="0" dirty="0">
+              <a:rPr lang="en-US" sz="1200" b="1" kern="0" spc="200" dirty="0">
                 <a:solidFill>
                   <a:srgbClr val="0E7C86"/>
                 </a:solidFill>
@@ -19003,7 +18860,7 @@
           <a:bodyPr wrap="square" lIns="0" tIns="0" rIns="0" bIns="0" rtlCol="0" anchor="t"/>
           <a:lstStyle/>
           <a:p>
-            <a:pPr indent="0" marL="0">
+            <a:pPr marL="0" indent="0">
               <a:buNone/>
             </a:pPr>
             <a:r>
@@ -19042,7 +18899,7 @@
           <a:bodyPr wrap="square" lIns="0" tIns="0" rIns="0" bIns="0" rtlCol="0" anchor="ctr"/>
           <a:lstStyle/>
           <a:p>
-            <a:pPr indent="0" marL="0">
+            <a:pPr marL="0" indent="0">
               <a:buNone/>
             </a:pPr>
             <a:r>
@@ -19081,7 +18938,7 @@
           <a:bodyPr wrap="square" lIns="0" tIns="0" rIns="0" bIns="0" rtlCol="0" anchor="ctr"/>
           <a:lstStyle/>
           <a:p>
-            <a:pPr algn="r" indent="0" marL="0">
+            <a:pPr marL="0" indent="0" algn="r">
               <a:buNone/>
             </a:pPr>
             <a:r>
@@ -19297,95 +19154,173 @@
       </p:sp>
       <p:sp>
         <p:nvSpPr>
-          <p:cNvPr id="12" name="Shape 9"/>
-          <p:cNvSpPr/>
-          <p:nvPr/>
-        </p:nvSpPr>
-        <p:spPr>
-          <a:xfrm>
-            <a:off x="9144000" y="2423160"/>
-            <a:ext cx="1165860" cy="1234440"/>
-          </a:xfrm>
-          <a:prstGeom prst="line">
-            <a:avLst/>
-          </a:prstGeom>
-          <a:noFill/>
-          <a:ln w="31750">
+          <p:cNvPr id="703" name="radar"/>
+          <p:cNvSpPr/>
+          <p:nvPr/>
+        </p:nvSpPr>
+        <p:spPr>
+          <a:xfrm>
+            <a:off x="8321040" y="2532888"/>
+            <a:ext cx="1810512" cy="1741932"/>
+          </a:xfrm>
+          <a:custGeom>
+            <a:avLst/>
+            <a:gdLst/>
+            <a:ahLst/>
+            <a:cxnLst/>
+            <a:rect l="0" t="0" r="0" b="0"/>
+            <a:pathLst>
+              <a:path w="1810512" h="1741932">
+                <a:moveTo>
+                  <a:pt x="822960" y="0"/>
+                </a:moveTo>
+                <a:lnTo>
+                  <a:pt x="1810512" y="1124712"/>
+                </a:lnTo>
+                <a:lnTo>
+                  <a:pt x="822960" y="1741932"/>
+                </a:lnTo>
+                <a:lnTo>
+                  <a:pt x="0" y="1124712"/>
+                </a:lnTo>
+                <a:close/>
+              </a:path>
+            </a:pathLst>
+          </a:custGeom>
+          <a:solidFill>
+            <a:srgbClr val="0E7C86">
+              <a:alpha val="22000"/>
+            </a:srgbClr>
+          </a:solidFill>
+          <a:ln w="25400">
             <a:solidFill>
               <a:srgbClr val="0E7C86"/>
             </a:solidFill>
-            <a:prstDash val="solid"/>
           </a:ln>
         </p:spPr>
-      </p:sp>
-      <p:sp>
-        <p:nvSpPr>
-          <p:cNvPr id="13" name="Shape 10"/>
-          <p:cNvSpPr/>
-          <p:nvPr/>
-        </p:nvSpPr>
-        <p:spPr>
-          <a:xfrm>
-            <a:off x="10309860" y="3657600"/>
-            <a:ext cx="-1165860" cy="1097280"/>
-          </a:xfrm>
-          <a:prstGeom prst="line">
-            <a:avLst/>
-          </a:prstGeom>
-          <a:noFill/>
-          <a:ln w="31750">
-            <a:solidFill>
-              <a:srgbClr val="0E7C86"/>
-            </a:solidFill>
-            <a:prstDash val="solid"/>
+        <p:txBody>
+          <a:bodyPr/>
+          <a:lstStyle/>
+          <a:p>
+            <a:endParaRPr lang="en-US"/>
+          </a:p>
+        </p:txBody>
+      </p:sp>
+      <p:sp>
+        <p:nvSpPr>
+          <p:cNvPr id="704" name="vtx"/>
+          <p:cNvSpPr/>
+          <p:nvPr/>
+        </p:nvSpPr>
+        <p:spPr>
+          <a:xfrm>
+            <a:off x="9092000" y="2480888"/>
+            <a:ext cx="104000" cy="104000"/>
+          </a:xfrm>
+          <a:prstGeom prst="ellipse">
+            <a:avLst/>
+          </a:prstGeom>
+          <a:solidFill>
+            <a:srgbClr val="0E7C86"/>
+          </a:solidFill>
+          <a:ln>
+            <a:noFill/>
           </a:ln>
         </p:spPr>
-      </p:sp>
-      <p:sp>
-        <p:nvSpPr>
-          <p:cNvPr id="14" name="Shape 11"/>
-          <p:cNvSpPr/>
-          <p:nvPr/>
-        </p:nvSpPr>
-        <p:spPr>
-          <a:xfrm>
-            <a:off x="9144000" y="4754880"/>
-            <a:ext cx="-1165860" cy="-1097280"/>
-          </a:xfrm>
-          <a:prstGeom prst="line">
-            <a:avLst/>
-          </a:prstGeom>
-          <a:noFill/>
-          <a:ln w="31750">
-            <a:solidFill>
-              <a:srgbClr val="0E7C86"/>
-            </a:solidFill>
-            <a:prstDash val="solid"/>
+        <p:txBody>
+          <a:bodyPr/>
+          <a:lstStyle/>
+          <a:p>
+            <a:endParaRPr lang="en-US"/>
+          </a:p>
+        </p:txBody>
+      </p:sp>
+      <p:sp>
+        <p:nvSpPr>
+          <p:cNvPr id="705" name="vtx"/>
+          <p:cNvSpPr/>
+          <p:nvPr/>
+        </p:nvSpPr>
+        <p:spPr>
+          <a:xfrm>
+            <a:off x="10079552" y="3605600"/>
+            <a:ext cx="104000" cy="104000"/>
+          </a:xfrm>
+          <a:prstGeom prst="ellipse">
+            <a:avLst/>
+          </a:prstGeom>
+          <a:solidFill>
+            <a:srgbClr val="0E7C86"/>
+          </a:solidFill>
+          <a:ln>
+            <a:noFill/>
           </a:ln>
         </p:spPr>
-      </p:sp>
-      <p:sp>
-        <p:nvSpPr>
-          <p:cNvPr id="15" name="Shape 12"/>
-          <p:cNvSpPr/>
-          <p:nvPr/>
-        </p:nvSpPr>
-        <p:spPr>
-          <a:xfrm>
-            <a:off x="7978140" y="3657600"/>
-            <a:ext cx="1165860" cy="-1234440"/>
-          </a:xfrm>
-          <a:prstGeom prst="line">
-            <a:avLst/>
-          </a:prstGeom>
-          <a:noFill/>
-          <a:ln w="31750">
-            <a:solidFill>
-              <a:srgbClr val="0E7C86"/>
-            </a:solidFill>
-            <a:prstDash val="solid"/>
+        <p:txBody>
+          <a:bodyPr/>
+          <a:lstStyle/>
+          <a:p>
+            <a:endParaRPr lang="en-US"/>
+          </a:p>
+        </p:txBody>
+      </p:sp>
+      <p:sp>
+        <p:nvSpPr>
+          <p:cNvPr id="706" name="vtx"/>
+          <p:cNvSpPr/>
+          <p:nvPr/>
+        </p:nvSpPr>
+        <p:spPr>
+          <a:xfrm>
+            <a:off x="9092000" y="4222820"/>
+            <a:ext cx="104000" cy="104000"/>
+          </a:xfrm>
+          <a:prstGeom prst="ellipse">
+            <a:avLst/>
+          </a:prstGeom>
+          <a:solidFill>
+            <a:srgbClr val="0E7C86"/>
+          </a:solidFill>
+          <a:ln>
+            <a:noFill/>
           </a:ln>
         </p:spPr>
+        <p:txBody>
+          <a:bodyPr/>
+          <a:lstStyle/>
+          <a:p>
+            <a:endParaRPr lang="en-US"/>
+          </a:p>
+        </p:txBody>
+      </p:sp>
+      <p:sp>
+        <p:nvSpPr>
+          <p:cNvPr id="707" name="vtx"/>
+          <p:cNvSpPr/>
+          <p:nvPr/>
+        </p:nvSpPr>
+        <p:spPr>
+          <a:xfrm>
+            <a:off x="8269040" y="3605600"/>
+            <a:ext cx="104000" cy="104000"/>
+          </a:xfrm>
+          <a:prstGeom prst="ellipse">
+            <a:avLst/>
+          </a:prstGeom>
+          <a:solidFill>
+            <a:srgbClr val="0E7C86"/>
+          </a:solidFill>
+          <a:ln>
+            <a:noFill/>
+          </a:ln>
+        </p:spPr>
+        <p:txBody>
+          <a:bodyPr/>
+          <a:lstStyle/>
+          <a:p>
+            <a:endParaRPr lang="en-US"/>
+          </a:p>
+        </p:txBody>
       </p:sp>
       <p:sp>
         <p:nvSpPr>
@@ -19408,7 +19343,7 @@
           <a:bodyPr wrap="square" lIns="0" tIns="0" rIns="0" bIns="0" rtlCol="0" anchor="ctr"/>
           <a:lstStyle/>
           <a:p>
-            <a:pPr algn="ctr" indent="0" marL="0">
+            <a:pPr marL="0" indent="0" algn="ctr">
               <a:buNone/>
             </a:pPr>
             <a:r>
@@ -19447,7 +19382,7 @@
           <a:bodyPr wrap="square" lIns="0" tIns="0" rIns="0" bIns="0" rtlCol="0" anchor="ctr"/>
           <a:lstStyle/>
           <a:p>
-            <a:pPr indent="0" marL="0">
+            <a:pPr marL="0" indent="0">
               <a:buNone/>
             </a:pPr>
             <a:r>
@@ -19486,7 +19421,7 @@
           <a:bodyPr wrap="square" lIns="0" tIns="0" rIns="0" bIns="0" rtlCol="0" anchor="ctr"/>
           <a:lstStyle/>
           <a:p>
-            <a:pPr algn="ctr" indent="0" marL="0">
+            <a:pPr marL="0" indent="0" algn="ctr">
               <a:buNone/>
             </a:pPr>
             <a:r>
@@ -19525,7 +19460,7 @@
           <a:bodyPr wrap="square" lIns="0" tIns="0" rIns="0" bIns="0" rtlCol="0" anchor="ctr"/>
           <a:lstStyle/>
           <a:p>
-            <a:pPr algn="r" indent="0" marL="0">
+            <a:pPr marL="0" indent="0" algn="r">
               <a:buNone/>
             </a:pPr>
             <a:r>
@@ -19564,7 +19499,7 @@
           <a:bodyPr wrap="square" lIns="0" tIns="0" rIns="0" bIns="0" rtlCol="0" anchor="ctr"/>
           <a:lstStyle/>
           <a:p>
-            <a:pPr algn="ctr" indent="0" marL="0">
+            <a:pPr marL="0" indent="0" algn="ctr">
               <a:buNone/>
             </a:pPr>
             <a:r>
@@ -19598,6 +19533,7 @@
         <a:solidFill>
           <a:srgbClr val="0B3B40"/>
         </a:solidFill>
+        <a:effectLst/>
       </p:bgPr>
     </p:bg>
     <p:spTree>
@@ -19635,11 +19571,11 @@
           <a:bodyPr wrap="square" lIns="0" tIns="0" rIns="0" bIns="0" rtlCol="0" anchor="ctr"/>
           <a:lstStyle/>
           <a:p>
-            <a:pPr indent="0" marL="0">
+            <a:pPr marL="0" indent="0">
               <a:buNone/>
             </a:pPr>
             <a:r>
-              <a:rPr lang="en-US" sz="1400" b="1" spc="300" kern="0" dirty="0">
+              <a:rPr lang="en-US" sz="1400" b="1" kern="0" spc="300" dirty="0">
                 <a:solidFill>
                   <a:srgbClr val="14A6B0"/>
                 </a:solidFill>
@@ -19674,7 +19610,7 @@
           <a:bodyPr wrap="square" lIns="0" tIns="0" rIns="0" bIns="0" rtlCol="0" anchor="t"/>
           <a:lstStyle/>
           <a:p>
-            <a:pPr indent="0" marL="0">
+            <a:pPr marL="0" indent="0">
               <a:lnSpc>
                 <a:spcPct val="108000"/>
               </a:lnSpc>
@@ -19716,7 +19652,7 @@
           <a:bodyPr wrap="square" lIns="0" tIns="0" rIns="0" bIns="0" rtlCol="0" anchor="ctr"/>
           <a:lstStyle/>
           <a:p>
-            <a:pPr indent="0" marL="0">
+            <a:pPr marL="0" indent="0">
               <a:spcAft>
                 <a:spcPts val="1000"/>
               </a:spcAft>
@@ -19736,7 +19672,7 @@
             <a:endParaRPr lang="en-US" sz="1600" dirty="0"/>
           </a:p>
           <a:p>
-            <a:pPr indent="0" marL="0">
+            <a:pPr marL="0" indent="0">
               <a:buNone/>
             </a:pPr>
             <a:r>
@@ -19770,6 +19706,7 @@
         <a:solidFill>
           <a:srgbClr val="FFFFFF"/>
         </a:solidFill>
+        <a:effectLst/>
       </p:bgPr>
     </p:bg>
     <p:spTree>
@@ -19807,11 +19744,11 @@
           <a:bodyPr wrap="square" lIns="0" tIns="0" rIns="0" bIns="0" rtlCol="0" anchor="ctr"/>
           <a:lstStyle/>
           <a:p>
-            <a:pPr indent="0" marL="0">
+            <a:pPr marL="0" indent="0">
               <a:buNone/>
             </a:pPr>
             <a:r>
-              <a:rPr lang="en-US" sz="1200" b="1" spc="200" kern="0" dirty="0">
+              <a:rPr lang="en-US" sz="1200" b="1" kern="0" spc="200" dirty="0">
                 <a:solidFill>
                   <a:srgbClr val="0E7C86"/>
                 </a:solidFill>
@@ -19846,7 +19783,7 @@
           <a:bodyPr wrap="square" lIns="0" tIns="0" rIns="0" bIns="0" rtlCol="0" anchor="t"/>
           <a:lstStyle/>
           <a:p>
-            <a:pPr indent="0" marL="0">
+            <a:pPr marL="0" indent="0">
               <a:buNone/>
             </a:pPr>
             <a:r>
@@ -19885,7 +19822,7 @@
           <a:bodyPr wrap="square" lIns="0" tIns="0" rIns="0" bIns="0" rtlCol="0" anchor="ctr"/>
           <a:lstStyle/>
           <a:p>
-            <a:pPr indent="0" marL="0">
+            <a:pPr marL="0" indent="0">
               <a:buNone/>
             </a:pPr>
             <a:r>
@@ -19924,7 +19861,7 @@
           <a:bodyPr wrap="square" lIns="0" tIns="0" rIns="0" bIns="0" rtlCol="0" anchor="ctr"/>
           <a:lstStyle/>
           <a:p>
-            <a:pPr algn="r" indent="0" marL="0">
+            <a:pPr marL="0" indent="0" algn="r">
               <a:buNone/>
             </a:pPr>
             <a:r>
@@ -19963,7 +19900,7 @@
           <a:bodyPr wrap="square" lIns="0" tIns="0" rIns="0" bIns="0" rtlCol="0" anchor="ctr"/>
           <a:lstStyle/>
           <a:p>
-            <a:pPr indent="0" marL="0">
+            <a:pPr marL="0" indent="0">
               <a:buNone/>
             </a:pPr>
             <a:r>
@@ -20002,7 +19939,7 @@
           <a:bodyPr wrap="square" lIns="0" tIns="0" rIns="0" bIns="0" rtlCol="0" anchor="t"/>
           <a:lstStyle/>
           <a:p>
-            <a:pPr indent="0" marL="0">
+            <a:pPr marL="0" indent="0">
               <a:buNone/>
             </a:pPr>
             <a:r>
@@ -20016,13 +19953,35 @@
               </a:rPr>
               <a:t>✓  </a:t>
             </a:r>
-            <a:pPr indent="0" marL="0">
-              <a:spcAft>
-                <a:spcPts val="1200"/>
-              </a:spcAft>
+            <a:r>
+              <a:rPr lang="en-US" sz="1450" dirty="0">
+                <a:solidFill>
+                  <a:srgbClr val="12262B"/>
+                </a:solidFill>
+                <a:latin typeface="Calibri" pitchFamily="34" charset="0"/>
+                <a:ea typeface="Calibri" pitchFamily="34" charset="-122"/>
+                <a:cs typeface="Calibri" pitchFamily="34" charset="-120"/>
+              </a:rPr>
+              <a:t>Compare model families; when trees help</a:t>
+            </a:r>
+            <a:endParaRPr lang="en-US" sz="1450" dirty="0"/>
+          </a:p>
+          <a:p>
+            <a:pPr marL="0" indent="0">
               <a:buNone/>
             </a:pPr>
             <a:r>
+              <a:rPr lang="en-US" sz="1450" b="1" dirty="0">
+                <a:solidFill>
+                  <a:srgbClr val="2E7D57"/>
+                </a:solidFill>
+                <a:latin typeface="Calibri" pitchFamily="34" charset="0"/>
+                <a:ea typeface="Calibri" pitchFamily="34" charset="-122"/>
+                <a:cs typeface="Calibri" pitchFamily="34" charset="-120"/>
+              </a:rPr>
+              <a:t>✓  </a:t>
+            </a:r>
+            <a:r>
               <a:rPr lang="en-US" sz="1450" dirty="0">
                 <a:solidFill>
                   <a:srgbClr val="12262B"/>
@@ -20031,12 +19990,12 @@
                 <a:ea typeface="Calibri" pitchFamily="34" charset="-122"/>
                 <a:cs typeface="Calibri" pitchFamily="34" charset="-120"/>
               </a:rPr>
-              <a:t>Compare model families; when trees help</a:t>
+              <a:t>Hyperparameters &amp; tuning (grid/random)</a:t>
             </a:r>
             <a:endParaRPr lang="en-US" sz="1450" dirty="0"/>
           </a:p>
           <a:p>
-            <a:pPr indent="0" marL="0">
+            <a:pPr marL="0" indent="0">
               <a:buNone/>
             </a:pPr>
             <a:r>
@@ -20050,13 +20009,35 @@
               </a:rPr>
               <a:t>✓  </a:t>
             </a:r>
-            <a:pPr indent="0" marL="0">
-              <a:spcAft>
-                <a:spcPts val="1200"/>
-              </a:spcAft>
+            <a:r>
+              <a:rPr lang="en-US" sz="1450" dirty="0">
+                <a:solidFill>
+                  <a:srgbClr val="12262B"/>
+                </a:solidFill>
+                <a:latin typeface="Calibri" pitchFamily="34" charset="0"/>
+                <a:ea typeface="Calibri" pitchFamily="34" charset="-122"/>
+                <a:cs typeface="Calibri" pitchFamily="34" charset="-120"/>
+              </a:rPr>
+              <a:t>Nested cross-validation</a:t>
+            </a:r>
+            <a:endParaRPr lang="en-US" sz="1450" dirty="0"/>
+          </a:p>
+          <a:p>
+            <a:pPr marL="0" indent="0">
               <a:buNone/>
             </a:pPr>
             <a:r>
+              <a:rPr lang="en-US" sz="1450" b="1" dirty="0">
+                <a:solidFill>
+                  <a:srgbClr val="2E7D57"/>
+                </a:solidFill>
+                <a:latin typeface="Calibri" pitchFamily="34" charset="0"/>
+                <a:ea typeface="Calibri" pitchFamily="34" charset="-122"/>
+                <a:cs typeface="Calibri" pitchFamily="34" charset="-120"/>
+              </a:rPr>
+              <a:t>✓  </a:t>
+            </a:r>
+            <a:r>
               <a:rPr lang="en-US" sz="1450" dirty="0">
                 <a:solidFill>
                   <a:srgbClr val="12262B"/>
@@ -20065,12 +20046,12 @@
                 <a:ea typeface="Calibri" pitchFamily="34" charset="-122"/>
                 <a:cs typeface="Calibri" pitchFamily="34" charset="-120"/>
               </a:rPr>
-              <a:t>Hyperparameters &amp; tuning (grid/random)</a:t>
+              <a:t>Batch effects &amp; correction in the pipeline</a:t>
             </a:r>
             <a:endParaRPr lang="en-US" sz="1450" dirty="0"/>
           </a:p>
           <a:p>
-            <a:pPr indent="0" marL="0">
+            <a:pPr marL="0" indent="0">
               <a:buNone/>
             </a:pPr>
             <a:r>
@@ -20084,30 +20065,24 @@
               </a:rPr>
               <a:t>✓  </a:t>
             </a:r>
-            <a:pPr indent="0" marL="0">
-              <a:spcAft>
-                <a:spcPts val="1200"/>
-              </a:spcAft>
+            <a:r>
+              <a:rPr lang="en-US" sz="1450" dirty="0">
+                <a:solidFill>
+                  <a:srgbClr val="12262B"/>
+                </a:solidFill>
+                <a:latin typeface="Calibri" pitchFamily="34" charset="0"/>
+                <a:ea typeface="Calibri" pitchFamily="34" charset="-122"/>
+                <a:cs typeface="Calibri" pitchFamily="34" charset="-120"/>
+              </a:rPr>
+              <a:t>Interpretation; prediction ≠ causation</a:t>
+            </a:r>
+            <a:endParaRPr lang="en-US" sz="1450" dirty="0"/>
+          </a:p>
+          <a:p>
+            <a:pPr marL="0" indent="0">
               <a:buNone/>
             </a:pPr>
             <a:r>
-              <a:rPr lang="en-US" sz="1450" dirty="0">
-                <a:solidFill>
-                  <a:srgbClr val="12262B"/>
-                </a:solidFill>
-                <a:latin typeface="Calibri" pitchFamily="34" charset="0"/>
-                <a:ea typeface="Calibri" pitchFamily="34" charset="-122"/>
-                <a:cs typeface="Calibri" pitchFamily="34" charset="-120"/>
-              </a:rPr>
-              <a:t>Nested cross-validation</a:t>
-            </a:r>
-            <a:endParaRPr lang="en-US" sz="1450" dirty="0"/>
-          </a:p>
-          <a:p>
-            <a:pPr indent="0" marL="0">
-              <a:buNone/>
-            </a:pPr>
-            <a:r>
               <a:rPr lang="en-US" sz="1450" b="1" dirty="0">
                 <a:solidFill>
                   <a:srgbClr val="2E7D57"/>
@@ -20118,80 +20093,6 @@
               </a:rPr>
               <a:t>✓  </a:t>
             </a:r>
-            <a:pPr indent="0" marL="0">
-              <a:spcAft>
-                <a:spcPts val="1200"/>
-              </a:spcAft>
-              <a:buNone/>
-            </a:pPr>
-            <a:r>
-              <a:rPr lang="en-US" sz="1450" dirty="0">
-                <a:solidFill>
-                  <a:srgbClr val="12262B"/>
-                </a:solidFill>
-                <a:latin typeface="Calibri" pitchFamily="34" charset="0"/>
-                <a:ea typeface="Calibri" pitchFamily="34" charset="-122"/>
-                <a:cs typeface="Calibri" pitchFamily="34" charset="-120"/>
-              </a:rPr>
-              <a:t>Batch effects &amp; correction in the pipeline</a:t>
-            </a:r>
-            <a:endParaRPr lang="en-US" sz="1450" dirty="0"/>
-          </a:p>
-          <a:p>
-            <a:pPr indent="0" marL="0">
-              <a:buNone/>
-            </a:pPr>
-            <a:r>
-              <a:rPr lang="en-US" sz="1450" b="1" dirty="0">
-                <a:solidFill>
-                  <a:srgbClr val="2E7D57"/>
-                </a:solidFill>
-                <a:latin typeface="Calibri" pitchFamily="34" charset="0"/>
-                <a:ea typeface="Calibri" pitchFamily="34" charset="-122"/>
-                <a:cs typeface="Calibri" pitchFamily="34" charset="-120"/>
-              </a:rPr>
-              <a:t>✓  </a:t>
-            </a:r>
-            <a:pPr indent="0" marL="0">
-              <a:spcAft>
-                <a:spcPts val="1200"/>
-              </a:spcAft>
-              <a:buNone/>
-            </a:pPr>
-            <a:r>
-              <a:rPr lang="en-US" sz="1450" dirty="0">
-                <a:solidFill>
-                  <a:srgbClr val="12262B"/>
-                </a:solidFill>
-                <a:latin typeface="Calibri" pitchFamily="34" charset="0"/>
-                <a:ea typeface="Calibri" pitchFamily="34" charset="-122"/>
-                <a:cs typeface="Calibri" pitchFamily="34" charset="-120"/>
-              </a:rPr>
-              <a:t>Interpretation; prediction ≠ causation</a:t>
-            </a:r>
-            <a:endParaRPr lang="en-US" sz="1450" dirty="0"/>
-          </a:p>
-          <a:p>
-            <a:pPr indent="0" marL="0">
-              <a:buNone/>
-            </a:pPr>
-            <a:r>
-              <a:rPr lang="en-US" sz="1450" b="1" dirty="0">
-                <a:solidFill>
-                  <a:srgbClr val="2E7D57"/>
-                </a:solidFill>
-                <a:latin typeface="Calibri" pitchFamily="34" charset="0"/>
-                <a:ea typeface="Calibri" pitchFamily="34" charset="-122"/>
-                <a:cs typeface="Calibri" pitchFamily="34" charset="-120"/>
-              </a:rPr>
-              <a:t>✓  </a:t>
-            </a:r>
-            <a:pPr indent="0" marL="0">
-              <a:spcAft>
-                <a:spcPts val="1200"/>
-              </a:spcAft>
-              <a:buNone/>
-            </a:pPr>
             <a:r>
               <a:rPr lang="en-US" sz="1450" dirty="0">
                 <a:solidFill>
@@ -20228,7 +20129,7 @@
           </a:solidFill>
           <a:ln/>
           <a:effectLst>
-            <a:outerShdw sx="100000" sy="100000" kx="0" ky="0" algn="bl" rotWithShape="0" blurRad="88900" dist="38100" dir="5400000">
+            <a:outerShdw blurRad="88900" dist="38100" dir="5400000" algn="bl" rotWithShape="0">
               <a:srgbClr val="000000">
                 <a:alpha val="12000"/>
               </a:srgbClr>
@@ -20257,7 +20158,7 @@
           <a:bodyPr wrap="square" lIns="0" tIns="0" rIns="0" bIns="0" rtlCol="0" anchor="ctr"/>
           <a:lstStyle/>
           <a:p>
-            <a:pPr indent="0" marL="0">
+            <a:pPr marL="0" indent="0">
               <a:buNone/>
             </a:pPr>
             <a:r>
@@ -20423,7 +20324,7 @@
           <a:bodyPr wrap="square" lIns="0" tIns="0" rIns="0" bIns="0" rtlCol="0" anchor="ctr"/>
           <a:lstStyle/>
           <a:p>
-            <a:pPr indent="0" marL="0">
+            <a:pPr marL="0" indent="0">
               <a:buNone/>
             </a:pPr>
             <a:r>
@@ -20457,6 +20358,7 @@
         <a:solidFill>
           <a:srgbClr val="FFFFFF"/>
         </a:solidFill>
+        <a:effectLst/>
       </p:bgPr>
     </p:bg>
     <p:spTree>
@@ -20494,11 +20396,11 @@
           <a:bodyPr wrap="square" lIns="0" tIns="0" rIns="0" bIns="0" rtlCol="0" anchor="ctr"/>
           <a:lstStyle/>
           <a:p>
-            <a:pPr indent="0" marL="0">
+            <a:pPr marL="0" indent="0">
               <a:buNone/>
             </a:pPr>
             <a:r>
-              <a:rPr lang="en-US" sz="1200" b="1" spc="200" kern="0" dirty="0">
+              <a:rPr lang="en-US" sz="1200" b="1" kern="0" spc="200" dirty="0">
                 <a:solidFill>
                   <a:srgbClr val="0E7C86"/>
                 </a:solidFill>
@@ -20533,7 +20435,7 @@
           <a:bodyPr wrap="square" lIns="0" tIns="0" rIns="0" bIns="0" rtlCol="0" anchor="t"/>
           <a:lstStyle/>
           <a:p>
-            <a:pPr indent="0" marL="0">
+            <a:pPr marL="0" indent="0">
               <a:buNone/>
             </a:pPr>
             <a:r>
@@ -20572,7 +20474,7 @@
           <a:bodyPr wrap="square" lIns="0" tIns="0" rIns="0" bIns="0" rtlCol="0" anchor="ctr"/>
           <a:lstStyle/>
           <a:p>
-            <a:pPr indent="0" marL="0">
+            <a:pPr marL="0" indent="0">
               <a:buNone/>
             </a:pPr>
             <a:r>
@@ -20611,7 +20513,7 @@
           <a:bodyPr wrap="square" lIns="0" tIns="0" rIns="0" bIns="0" rtlCol="0" anchor="ctr"/>
           <a:lstStyle/>
           <a:p>
-            <a:pPr algn="r" indent="0" marL="0">
+            <a:pPr marL="0" indent="0" algn="r">
               <a:buNone/>
             </a:pPr>
             <a:r>
@@ -20697,7 +20599,7 @@
           <a:bodyPr wrap="square" lIns="0" tIns="0" rIns="0" bIns="0" rtlCol="0" anchor="ctr"/>
           <a:lstStyle/>
           <a:p>
-            <a:pPr algn="ctr" indent="0" marL="0">
+            <a:pPr marL="0" indent="0" algn="ctr">
               <a:buNone/>
             </a:pPr>
             <a:r>
@@ -20736,7 +20638,7 @@
           <a:bodyPr wrap="square" lIns="0" tIns="0" rIns="0" bIns="0" rtlCol="0" anchor="ctr"/>
           <a:lstStyle/>
           <a:p>
-            <a:pPr indent="0" marL="0">
+            <a:pPr marL="0" indent="0">
               <a:buNone/>
             </a:pPr>
             <a:r>
@@ -20822,7 +20724,7 @@
           <a:bodyPr wrap="square" lIns="0" tIns="0" rIns="0" bIns="0" rtlCol="0" anchor="ctr"/>
           <a:lstStyle/>
           <a:p>
-            <a:pPr algn="ctr" indent="0" marL="0">
+            <a:pPr marL="0" indent="0" algn="ctr">
               <a:buNone/>
             </a:pPr>
             <a:r>
@@ -20861,7 +20763,7 @@
           <a:bodyPr wrap="square" lIns="0" tIns="0" rIns="0" bIns="0" rtlCol="0" anchor="ctr"/>
           <a:lstStyle/>
           <a:p>
-            <a:pPr indent="0" marL="0">
+            <a:pPr marL="0" indent="0">
               <a:buNone/>
             </a:pPr>
             <a:r>
@@ -20947,7 +20849,7 @@
           <a:bodyPr wrap="square" lIns="0" tIns="0" rIns="0" bIns="0" rtlCol="0" anchor="ctr"/>
           <a:lstStyle/>
           <a:p>
-            <a:pPr algn="ctr" indent="0" marL="0">
+            <a:pPr marL="0" indent="0" algn="ctr">
               <a:buNone/>
             </a:pPr>
             <a:r>
@@ -20986,7 +20888,7 @@
           <a:bodyPr wrap="square" lIns="0" tIns="0" rIns="0" bIns="0" rtlCol="0" anchor="ctr"/>
           <a:lstStyle/>
           <a:p>
-            <a:pPr indent="0" marL="0">
+            <a:pPr marL="0" indent="0">
               <a:buNone/>
             </a:pPr>
             <a:r>
@@ -21072,7 +20974,7 @@
           <a:bodyPr wrap="square" lIns="0" tIns="0" rIns="0" bIns="0" rtlCol="0" anchor="ctr"/>
           <a:lstStyle/>
           <a:p>
-            <a:pPr algn="ctr" indent="0" marL="0">
+            <a:pPr marL="0" indent="0" algn="ctr">
               <a:buNone/>
             </a:pPr>
             <a:r>
@@ -21111,7 +21013,7 @@
           <a:bodyPr wrap="square" lIns="0" tIns="0" rIns="0" bIns="0" rtlCol="0" anchor="ctr"/>
           <a:lstStyle/>
           <a:p>
-            <a:pPr indent="0" marL="0">
+            <a:pPr marL="0" indent="0">
               <a:buNone/>
             </a:pPr>
             <a:r>
@@ -21197,7 +21099,7 @@
           <a:bodyPr wrap="square" lIns="0" tIns="0" rIns="0" bIns="0" rtlCol="0" anchor="ctr"/>
           <a:lstStyle/>
           <a:p>
-            <a:pPr algn="ctr" indent="0" marL="0">
+            <a:pPr marL="0" indent="0" algn="ctr">
               <a:buNone/>
             </a:pPr>
             <a:r>
@@ -21236,7 +21138,7 @@
           <a:bodyPr wrap="square" lIns="0" tIns="0" rIns="0" bIns="0" rtlCol="0" anchor="ctr"/>
           <a:lstStyle/>
           <a:p>
-            <a:pPr indent="0" marL="0">
+            <a:pPr marL="0" indent="0">
               <a:buNone/>
             </a:pPr>
             <a:r>
@@ -21322,7 +21224,7 @@
           <a:bodyPr wrap="square" lIns="0" tIns="0" rIns="0" bIns="0" rtlCol="0" anchor="ctr"/>
           <a:lstStyle/>
           <a:p>
-            <a:pPr algn="ctr" indent="0" marL="0">
+            <a:pPr marL="0" indent="0" algn="ctr">
               <a:buNone/>
             </a:pPr>
             <a:r>
@@ -21361,7 +21263,7 @@
           <a:bodyPr wrap="square" lIns="0" tIns="0" rIns="0" bIns="0" rtlCol="0" anchor="ctr"/>
           <a:lstStyle/>
           <a:p>
-            <a:pPr indent="0" marL="0">
+            <a:pPr marL="0" indent="0">
               <a:buNone/>
             </a:pPr>
             <a:r>
@@ -21447,7 +21349,7 @@
           <a:bodyPr wrap="square" lIns="0" tIns="0" rIns="0" bIns="0" rtlCol="0" anchor="ctr"/>
           <a:lstStyle/>
           <a:p>
-            <a:pPr algn="ctr" indent="0" marL="0">
+            <a:pPr marL="0" indent="0" algn="ctr">
               <a:buNone/>
             </a:pPr>
             <a:r>
@@ -21486,7 +21388,7 @@
           <a:bodyPr wrap="square" lIns="0" tIns="0" rIns="0" bIns="0" rtlCol="0" anchor="ctr"/>
           <a:lstStyle/>
           <a:p>
-            <a:pPr indent="0" marL="0">
+            <a:pPr marL="0" indent="0">
               <a:buNone/>
             </a:pPr>
             <a:r>
@@ -21572,7 +21474,7 @@
           <a:bodyPr wrap="square" lIns="0" tIns="0" rIns="0" bIns="0" rtlCol="0" anchor="ctr"/>
           <a:lstStyle/>
           <a:p>
-            <a:pPr algn="ctr" indent="0" marL="0">
+            <a:pPr marL="0" indent="0" algn="ctr">
               <a:buNone/>
             </a:pPr>
             <a:r>
@@ -21611,7 +21513,7 @@
           <a:bodyPr wrap="square" lIns="0" tIns="0" rIns="0" bIns="0" rtlCol="0" anchor="ctr"/>
           <a:lstStyle/>
           <a:p>
-            <a:pPr indent="0" marL="0">
+            <a:pPr marL="0" indent="0">
               <a:buNone/>
             </a:pPr>
             <a:r>
@@ -21645,6 +21547,7 @@
         <a:solidFill>
           <a:srgbClr val="FFFFFF"/>
         </a:solidFill>
+        <a:effectLst/>
       </p:bgPr>
     </p:bg>
     <p:spTree>
@@ -21682,11 +21585,11 @@
           <a:bodyPr wrap="square" lIns="0" tIns="0" rIns="0" bIns="0" rtlCol="0" anchor="ctr"/>
           <a:lstStyle/>
           <a:p>
-            <a:pPr indent="0" marL="0">
+            <a:pPr marL="0" indent="0">
               <a:buNone/>
             </a:pPr>
             <a:r>
-              <a:rPr lang="en-US" sz="1200" b="1" spc="200" kern="0" dirty="0">
+              <a:rPr lang="en-US" sz="1200" b="1" kern="0" spc="200" dirty="0">
                 <a:solidFill>
                   <a:srgbClr val="0E7C86"/>
                 </a:solidFill>
@@ -21721,7 +21624,7 @@
           <a:bodyPr wrap="square" lIns="0" tIns="0" rIns="0" bIns="0" rtlCol="0" anchor="t"/>
           <a:lstStyle/>
           <a:p>
-            <a:pPr indent="0" marL="0">
+            <a:pPr marL="0" indent="0">
               <a:buNone/>
             </a:pPr>
             <a:r>
@@ -21760,7 +21663,7 @@
           <a:bodyPr wrap="square" lIns="0" tIns="0" rIns="0" bIns="0" rtlCol="0" anchor="ctr"/>
           <a:lstStyle/>
           <a:p>
-            <a:pPr indent="0" marL="0">
+            <a:pPr marL="0" indent="0">
               <a:buNone/>
             </a:pPr>
             <a:r>
@@ -21799,7 +21702,7 @@
           <a:bodyPr wrap="square" lIns="0" tIns="0" rIns="0" bIns="0" rtlCol="0" anchor="ctr"/>
           <a:lstStyle/>
           <a:p>
-            <a:pPr algn="r" indent="0" marL="0">
+            <a:pPr marL="0" indent="0" algn="r">
               <a:buNone/>
             </a:pPr>
             <a:r>
@@ -21932,7 +21835,7 @@
         <p:spPr>
           <a:xfrm>
             <a:off x="9052560" y="4572000"/>
-            <a:ext cx="0" cy="-1828800"/>
+            <a:ext cx="0" cy="0"/>
           </a:xfrm>
           <a:prstGeom prst="line">
             <a:avLst/>
@@ -22012,7 +21915,7 @@
           <a:bodyPr wrap="square" lIns="0" tIns="0" rIns="0" bIns="0" rtlCol="0" anchor="ctr"/>
           <a:lstStyle/>
           <a:p>
-            <a:pPr algn="ctr" indent="0" marL="0">
+            <a:pPr marL="0" indent="0" algn="ctr">
               <a:buNone/>
             </a:pPr>
             <a:r>
@@ -22029,7 +21932,7 @@
             <a:endParaRPr lang="en-US" sz="1000" dirty="0"/>
           </a:p>
           <a:p>
-            <a:pPr algn="ctr" indent="0" marL="0">
+            <a:pPr marL="0" indent="0" algn="ctr">
               <a:buNone/>
             </a:pPr>
             <a:r>
@@ -22090,7 +21993,7 @@
           <a:bodyPr wrap="square" lIns="0" tIns="0" rIns="0" bIns="0" rtlCol="0" anchor="ctr"/>
           <a:lstStyle/>
           <a:p>
-            <a:pPr algn="ctr" indent="0" marL="0">
+            <a:pPr marL="0" indent="0" algn="ctr">
               <a:buNone/>
             </a:pPr>
             <a:r>
@@ -22107,7 +22010,7 @@
             <a:endParaRPr lang="en-US" sz="1000" dirty="0"/>
           </a:p>
           <a:p>
-            <a:pPr algn="ctr" indent="0" marL="0">
+            <a:pPr marL="0" indent="0" algn="ctr">
               <a:buNone/>
             </a:pPr>
             <a:r>
@@ -22146,7 +22049,7 @@
           <a:bodyPr wrap="square" lIns="0" tIns="0" rIns="0" bIns="0" rtlCol="0" anchor="ctr"/>
           <a:lstStyle/>
           <a:p>
-            <a:pPr algn="ctr" indent="0" marL="0">
+            <a:pPr marL="0" indent="0" algn="ctr">
               <a:buNone/>
             </a:pPr>
             <a:r>
@@ -22180,6 +22083,7 @@
         <a:solidFill>
           <a:srgbClr val="FFFFFF"/>
         </a:solidFill>
+        <a:effectLst/>
       </p:bgPr>
     </p:bg>
     <p:spTree>
@@ -22217,11 +22121,11 @@
           <a:bodyPr wrap="square" lIns="0" tIns="0" rIns="0" bIns="0" rtlCol="0" anchor="ctr"/>
           <a:lstStyle/>
           <a:p>
-            <a:pPr indent="0" marL="0">
+            <a:pPr marL="0" indent="0">
               <a:buNone/>
             </a:pPr>
             <a:r>
-              <a:rPr lang="en-US" sz="1200" b="1" spc="200" kern="0" dirty="0">
+              <a:rPr lang="en-US" sz="1200" b="1" kern="0" spc="200" dirty="0">
                 <a:solidFill>
                   <a:srgbClr val="0E7C86"/>
                 </a:solidFill>
@@ -22256,7 +22160,7 @@
           <a:bodyPr wrap="square" lIns="0" tIns="0" rIns="0" bIns="0" rtlCol="0" anchor="t"/>
           <a:lstStyle/>
           <a:p>
-            <a:pPr indent="0" marL="0">
+            <a:pPr marL="0" indent="0">
               <a:buNone/>
             </a:pPr>
             <a:r>
@@ -22295,7 +22199,7 @@
           <a:bodyPr wrap="square" lIns="0" tIns="0" rIns="0" bIns="0" rtlCol="0" anchor="ctr"/>
           <a:lstStyle/>
           <a:p>
-            <a:pPr indent="0" marL="0">
+            <a:pPr marL="0" indent="0">
               <a:buNone/>
             </a:pPr>
             <a:r>
@@ -22334,7 +22238,7 @@
           <a:bodyPr wrap="square" lIns="0" tIns="0" rIns="0" bIns="0" rtlCol="0" anchor="ctr"/>
           <a:lstStyle/>
           <a:p>
-            <a:pPr algn="r" indent="0" marL="0">
+            <a:pPr marL="0" indent="0" algn="r">
               <a:buNone/>
             </a:pPr>
             <a:r>
@@ -22554,7 +22458,7 @@
           <a:bodyPr wrap="square" lIns="0" tIns="0" rIns="0" bIns="0" rtlCol="0" anchor="ctr"/>
           <a:lstStyle/>
           <a:p>
-            <a:pPr algn="ctr" indent="0" marL="0">
+            <a:pPr marL="0" indent="0" algn="ctr">
               <a:buNone/>
             </a:pPr>
             <a:r>
@@ -22643,7 +22547,7 @@
           <a:bodyPr wrap="square" lIns="0" tIns="0" rIns="0" bIns="0" rtlCol="0" anchor="ctr"/>
           <a:lstStyle/>
           <a:p>
-            <a:pPr algn="ctr" indent="0" marL="0">
+            <a:pPr marL="0" indent="0" algn="ctr">
               <a:buNone/>
             </a:pPr>
             <a:r>
@@ -22682,7 +22586,7 @@
           <a:bodyPr wrap="square" lIns="0" tIns="0" rIns="0" bIns="0" rtlCol="0" anchor="ctr"/>
           <a:lstStyle/>
           <a:p>
-            <a:pPr algn="ctr" indent="0" marL="0">
+            <a:pPr marL="0" indent="0" algn="ctr">
               <a:buNone/>
             </a:pPr>
             <a:r>
@@ -22708,7 +22612,7 @@
         </p:nvSpPr>
         <p:spPr>
           <a:xfrm rot="16200000">
-            <a:off x="6400800" y="3840480"/>
+            <a:off x="6263640" y="3593592"/>
             <a:ext cx="457200" cy="274320"/>
           </a:xfrm>
           <a:prstGeom prst="rect">
@@ -22721,7 +22625,7 @@
           <a:bodyPr wrap="square" lIns="0" tIns="0" rIns="0" bIns="0" rtlCol="0" anchor="ctr"/>
           <a:lstStyle/>
           <a:p>
-            <a:pPr indent="0" marL="0">
+            <a:pPr marL="0" indent="0">
               <a:buNone/>
             </a:pPr>
             <a:r>
@@ -22755,6 +22659,7 @@
         <a:solidFill>
           <a:srgbClr val="FFFFFF"/>
         </a:solidFill>
+        <a:effectLst/>
       </p:bgPr>
     </p:bg>
     <p:spTree>
@@ -22792,11 +22697,11 @@
           <a:bodyPr wrap="square" lIns="0" tIns="0" rIns="0" bIns="0" rtlCol="0" anchor="ctr"/>
           <a:lstStyle/>
           <a:p>
-            <a:pPr indent="0" marL="0">
+            <a:pPr marL="0" indent="0">
               <a:buNone/>
             </a:pPr>
             <a:r>
-              <a:rPr lang="en-US" sz="1200" b="1" spc="200" kern="0" dirty="0">
+              <a:rPr lang="en-US" sz="1200" b="1" kern="0" spc="200" dirty="0">
                 <a:solidFill>
                   <a:srgbClr val="0E7C86"/>
                 </a:solidFill>
@@ -22831,7 +22736,7 @@
           <a:bodyPr wrap="square" lIns="0" tIns="0" rIns="0" bIns="0" rtlCol="0" anchor="t"/>
           <a:lstStyle/>
           <a:p>
-            <a:pPr indent="0" marL="0">
+            <a:pPr marL="0" indent="0">
               <a:buNone/>
             </a:pPr>
             <a:r>
@@ -22870,7 +22775,7 @@
           <a:bodyPr wrap="square" lIns="0" tIns="0" rIns="0" bIns="0" rtlCol="0" anchor="ctr"/>
           <a:lstStyle/>
           <a:p>
-            <a:pPr indent="0" marL="0">
+            <a:pPr marL="0" indent="0">
               <a:buNone/>
             </a:pPr>
             <a:r>
@@ -22909,7 +22814,7 @@
           <a:bodyPr wrap="square" lIns="0" tIns="0" rIns="0" bIns="0" rtlCol="0" anchor="ctr"/>
           <a:lstStyle/>
           <a:p>
-            <a:pPr algn="r" indent="0" marL="0">
+            <a:pPr marL="0" indent="0" algn="r">
               <a:buNone/>
             </a:pPr>
             <a:r>
@@ -23054,7 +22959,7 @@
           </a:solidFill>
           <a:ln/>
           <a:effectLst>
-            <a:outerShdw sx="100000" sy="100000" kx="0" ky="0" algn="bl" rotWithShape="0" blurRad="88900" dist="38100" dir="5400000">
+            <a:outerShdw blurRad="88900" dist="38100" dir="5400000" algn="bl" rotWithShape="0">
               <a:srgbClr val="000000">
                 <a:alpha val="12000"/>
               </a:srgbClr>
@@ -23083,7 +22988,7 @@
           <a:bodyPr wrap="square" lIns="0" tIns="0" rIns="0" bIns="0" rtlCol="0" anchor="ctr"/>
           <a:lstStyle/>
           <a:p>
-            <a:pPr algn="ctr" indent="0" marL="0">
+            <a:pPr marL="0" indent="0" algn="ctr">
               <a:buNone/>
             </a:pPr>
             <a:r>
@@ -23122,7 +23027,7 @@
           </a:solidFill>
           <a:ln/>
           <a:effectLst>
-            <a:outerShdw sx="100000" sy="100000" kx="0" ky="0" algn="bl" rotWithShape="0" blurRad="88900" dist="38100" dir="5400000">
+            <a:outerShdw blurRad="88900" dist="38100" dir="5400000" algn="bl" rotWithShape="0">
               <a:srgbClr val="000000">
                 <a:alpha val="12000"/>
               </a:srgbClr>
@@ -23151,7 +23056,7 @@
           <a:bodyPr wrap="square" lIns="0" tIns="0" rIns="0" bIns="0" rtlCol="0" anchor="ctr"/>
           <a:lstStyle/>
           <a:p>
-            <a:pPr algn="ctr" indent="0" marL="0">
+            <a:pPr marL="0" indent="0" algn="ctr">
               <a:buNone/>
             </a:pPr>
             <a:r>
@@ -23190,7 +23095,7 @@
           </a:solidFill>
           <a:ln/>
           <a:effectLst>
-            <a:outerShdw sx="100000" sy="100000" kx="0" ky="0" algn="bl" rotWithShape="0" blurRad="88900" dist="38100" dir="5400000">
+            <a:outerShdw blurRad="88900" dist="38100" dir="5400000" algn="bl" rotWithShape="0">
               <a:srgbClr val="000000">
                 <a:alpha val="12000"/>
               </a:srgbClr>
@@ -23219,7 +23124,7 @@
           <a:bodyPr wrap="square" lIns="0" tIns="0" rIns="0" bIns="0" rtlCol="0" anchor="ctr"/>
           <a:lstStyle/>
           <a:p>
-            <a:pPr algn="ctr" indent="0" marL="0">
+            <a:pPr marL="0" indent="0" algn="ctr">
               <a:buNone/>
             </a:pPr>
             <a:r>
@@ -23258,7 +23163,7 @@
           </a:solidFill>
           <a:ln/>
           <a:effectLst>
-            <a:outerShdw sx="100000" sy="100000" kx="0" ky="0" algn="bl" rotWithShape="0" blurRad="88900" dist="38100" dir="5400000">
+            <a:outerShdw blurRad="88900" dist="38100" dir="5400000" algn="bl" rotWithShape="0">
               <a:srgbClr val="000000">
                 <a:alpha val="12000"/>
               </a:srgbClr>
@@ -23287,7 +23192,7 @@
           <a:bodyPr wrap="square" lIns="0" tIns="0" rIns="0" bIns="0" rtlCol="0" anchor="ctr"/>
           <a:lstStyle/>
           <a:p>
-            <a:pPr algn="ctr" indent="0" marL="0">
+            <a:pPr marL="0" indent="0" algn="ctr">
               <a:buNone/>
             </a:pPr>
             <a:r>
@@ -23326,7 +23231,7 @@
           </a:solidFill>
           <a:ln/>
           <a:effectLst>
-            <a:outerShdw sx="100000" sy="100000" kx="0" ky="0" algn="bl" rotWithShape="0" blurRad="88900" dist="38100" dir="5400000">
+            <a:outerShdw blurRad="88900" dist="38100" dir="5400000" algn="bl" rotWithShape="0">
               <a:srgbClr val="000000">
                 <a:alpha val="12000"/>
               </a:srgbClr>
@@ -23355,7 +23260,7 @@
           <a:bodyPr wrap="square" lIns="0" tIns="0" rIns="0" bIns="0" rtlCol="0" anchor="ctr"/>
           <a:lstStyle/>
           <a:p>
-            <a:pPr algn="ctr" indent="0" marL="0">
+            <a:pPr marL="0" indent="0" algn="ctr">
               <a:buNone/>
             </a:pPr>
             <a:r>
@@ -23380,9 +23285,9 @@
           <p:nvPr/>
         </p:nvSpPr>
         <p:spPr>
-          <a:xfrm>
-            <a:off x="8229600" y="2606040"/>
-            <a:ext cx="-822960" cy="502920"/>
+          <a:xfrm flipH="1">
+            <a:off x="8138160" y="2613822"/>
+            <a:ext cx="548640" cy="457200"/>
           </a:xfrm>
           <a:prstGeom prst="line">
             <a:avLst/>
@@ -23428,7 +23333,7 @@
         <p:spPr>
           <a:xfrm>
             <a:off x="6949440" y="3566160"/>
-            <a:ext cx="-502920" cy="548640"/>
+            <a:ext cx="0" cy="548640"/>
           </a:xfrm>
           <a:prstGeom prst="line">
             <a:avLst/>
@@ -23473,7 +23378,7 @@
         </p:nvSpPr>
         <p:spPr>
           <a:xfrm>
-            <a:off x="7132320" y="2651760"/>
+            <a:off x="7498080" y="2613822"/>
             <a:ext cx="2377440" cy="274320"/>
           </a:xfrm>
           <a:prstGeom prst="rect">
@@ -23486,7 +23391,7 @@
           <a:bodyPr wrap="square" lIns="0" tIns="0" rIns="0" bIns="0" rtlCol="0" anchor="ctr"/>
           <a:lstStyle/>
           <a:p>
-            <a:pPr algn="ctr" indent="0" marL="0">
+            <a:pPr marL="0" indent="0" algn="ctr">
               <a:buNone/>
             </a:pPr>
             <a:r>
@@ -23498,7 +23403,7 @@
                 <a:ea typeface="Calibri" pitchFamily="34" charset="-122"/>
                 <a:cs typeface="Calibri" pitchFamily="34" charset="-120"/>
               </a:rPr>
-              <a:t>yes ↙        ↘ no</a:t>
+              <a:t>yes ↙                                          ↘ no</a:t>
             </a:r>
             <a:endParaRPr lang="en-US" sz="800" dirty="0"/>
           </a:p>
@@ -23520,6 +23425,7 @@
         <a:solidFill>
           <a:srgbClr val="FFFFFF"/>
         </a:solidFill>
+        <a:effectLst/>
       </p:bgPr>
     </p:bg>
     <p:spTree>
@@ -23557,11 +23463,11 @@
           <a:bodyPr wrap="square" lIns="0" tIns="0" rIns="0" bIns="0" rtlCol="0" anchor="ctr"/>
           <a:lstStyle/>
           <a:p>
-            <a:pPr indent="0" marL="0">
+            <a:pPr marL="0" indent="0">
               <a:buNone/>
             </a:pPr>
             <a:r>
-              <a:rPr lang="en-US" sz="1200" b="1" spc="200" kern="0" dirty="0">
+              <a:rPr lang="en-US" sz="1200" b="1" kern="0" spc="200" dirty="0">
                 <a:solidFill>
                   <a:srgbClr val="0E7C86"/>
                 </a:solidFill>
@@ -23596,7 +23502,7 @@
           <a:bodyPr wrap="square" lIns="0" tIns="0" rIns="0" bIns="0" rtlCol="0" anchor="t"/>
           <a:lstStyle/>
           <a:p>
-            <a:pPr indent="0" marL="0">
+            <a:pPr marL="0" indent="0">
               <a:buNone/>
             </a:pPr>
             <a:r>
@@ -23635,7 +23541,7 @@
           <a:bodyPr wrap="square" lIns="0" tIns="0" rIns="0" bIns="0" rtlCol="0" anchor="ctr"/>
           <a:lstStyle/>
           <a:p>
-            <a:pPr indent="0" marL="0">
+            <a:pPr marL="0" indent="0">
               <a:buNone/>
             </a:pPr>
             <a:r>
@@ -23674,7 +23580,7 @@
           <a:bodyPr wrap="square" lIns="0" tIns="0" rIns="0" bIns="0" rtlCol="0" anchor="ctr"/>
           <a:lstStyle/>
           <a:p>
-            <a:pPr algn="r" indent="0" marL="0">
+            <a:pPr marL="0" indent="0" algn="r">
               <a:buNone/>
             </a:pPr>
             <a:r>
@@ -23973,7 +23879,7 @@
           </a:solidFill>
           <a:ln/>
           <a:effectLst>
-            <a:outerShdw sx="100000" sy="100000" kx="0" ky="0" algn="bl" rotWithShape="0" blurRad="88900" dist="38100" dir="5400000">
+            <a:outerShdw blurRad="88900" dist="38100" dir="5400000" algn="bl" rotWithShape="0">
               <a:srgbClr val="000000">
                 <a:alpha val="12000"/>
               </a:srgbClr>
@@ -24002,7 +23908,7 @@
           <a:bodyPr wrap="square" lIns="0" tIns="0" rIns="0" bIns="0" rtlCol="0" anchor="ctr"/>
           <a:lstStyle/>
           <a:p>
-            <a:pPr algn="ctr" indent="0" marL="0">
+            <a:pPr marL="0" indent="0" algn="ctr">
               <a:buNone/>
             </a:pPr>
             <a:r>
@@ -24019,7 +23925,7 @@
             <a:endParaRPr lang="en-US" sz="1000" dirty="0"/>
           </a:p>
           <a:p>
-            <a:pPr algn="ctr" indent="0" marL="0">
+            <a:pPr marL="0" indent="0" algn="ctr">
               <a:buNone/>
             </a:pPr>
             <a:r>
@@ -24058,7 +23964,7 @@
           <a:bodyPr wrap="square" lIns="0" tIns="0" rIns="0" bIns="0" rtlCol="0" anchor="ctr"/>
           <a:lstStyle/>
           <a:p>
-            <a:pPr indent="0" marL="0">
+            <a:pPr marL="0" indent="0">
               <a:buNone/>
             </a:pPr>
             <a:r>
@@ -24092,6 +23998,7 @@
         <a:solidFill>
           <a:srgbClr val="FFFFFF"/>
         </a:solidFill>
+        <a:effectLst/>
       </p:bgPr>
     </p:bg>
     <p:spTree>
@@ -24129,11 +24036,11 @@
           <a:bodyPr wrap="square" lIns="0" tIns="0" rIns="0" bIns="0" rtlCol="0" anchor="ctr"/>
           <a:lstStyle/>
           <a:p>
-            <a:pPr indent="0" marL="0">
+            <a:pPr marL="0" indent="0">
               <a:buNone/>
             </a:pPr>
             <a:r>
-              <a:rPr lang="en-US" sz="1200" b="1" spc="200" kern="0" dirty="0">
+              <a:rPr lang="en-US" sz="1200" b="1" kern="0" spc="200" dirty="0">
                 <a:solidFill>
                   <a:srgbClr val="0E7C86"/>
                 </a:solidFill>
@@ -24168,7 +24075,7 @@
           <a:bodyPr wrap="square" lIns="0" tIns="0" rIns="0" bIns="0" rtlCol="0" anchor="t"/>
           <a:lstStyle/>
           <a:p>
-            <a:pPr indent="0" marL="0">
+            <a:pPr marL="0" indent="0">
               <a:buNone/>
             </a:pPr>
             <a:r>
@@ -24207,7 +24114,7 @@
           <a:bodyPr wrap="square" lIns="0" tIns="0" rIns="0" bIns="0" rtlCol="0" anchor="ctr"/>
           <a:lstStyle/>
           <a:p>
-            <a:pPr indent="0" marL="0">
+            <a:pPr marL="0" indent="0">
               <a:buNone/>
             </a:pPr>
             <a:r>
@@ -24246,7 +24153,7 @@
           <a:bodyPr wrap="square" lIns="0" tIns="0" rIns="0" bIns="0" rtlCol="0" anchor="ctr"/>
           <a:lstStyle/>
           <a:p>
-            <a:pPr algn="r" indent="0" marL="0">
+            <a:pPr marL="0" indent="0" algn="r">
               <a:buNone/>
             </a:pPr>
             <a:r>
@@ -24401,7 +24308,7 @@
         <p:spPr>
           <a:xfrm>
             <a:off x="7315200" y="5120640"/>
-            <a:ext cx="228600" cy="-502920"/>
+            <a:ext cx="228600" cy="0"/>
           </a:xfrm>
           <a:prstGeom prst="line">
             <a:avLst/>
@@ -24447,7 +24354,7 @@
         <p:spPr>
           <a:xfrm>
             <a:off x="8092440" y="4617720"/>
-            <a:ext cx="228600" cy="-502920"/>
+            <a:ext cx="228600" cy="0"/>
           </a:xfrm>
           <a:prstGeom prst="line">
             <a:avLst/>
@@ -24493,7 +24400,7 @@
         <p:spPr>
           <a:xfrm>
             <a:off x="8869680" y="4114800"/>
-            <a:ext cx="228600" cy="-502920"/>
+            <a:ext cx="228600" cy="0"/>
           </a:xfrm>
           <a:prstGeom prst="line">
             <a:avLst/>
@@ -24551,7 +24458,7 @@
           <a:bodyPr wrap="square" lIns="0" tIns="0" rIns="0" bIns="0" rtlCol="0" anchor="ctr"/>
           <a:lstStyle/>
           <a:p>
-            <a:pPr indent="0" marL="0">
+            <a:pPr marL="0" indent="0">
               <a:buNone/>
             </a:pPr>
             <a:r>
@@ -24596,502 +24503,244 @@
       </p:sp>
       <p:sp>
         <p:nvSpPr>
-          <p:cNvPr id="17" name="Text 14"/>
-          <p:cNvSpPr/>
-          <p:nvPr/>
-        </p:nvSpPr>
-        <p:spPr>
-          <a:xfrm>
-            <a:off x="9692640" y="1901952"/>
-            <a:ext cx="1737360" cy="274320"/>
-          </a:xfrm>
-          <a:prstGeom prst="rect">
-            <a:avLst/>
-          </a:prstGeom>
-          <a:noFill/>
-          <a:ln/>
-        </p:spPr>
-        <p:txBody>
-          <a:bodyPr wrap="square" lIns="0" tIns="0" rIns="0" bIns="0" rtlCol="0" anchor="ctr"/>
-          <a:lstStyle/>
-          <a:p>
-            <a:pPr algn="ctr" indent="0" marL="0">
-              <a:buNone/>
-            </a:pPr>
-            <a:r>
-              <a:rPr lang="en-US" sz="900" dirty="0">
-                <a:solidFill>
-                  <a:srgbClr val="5B6B70"/>
-                </a:solidFill>
-                <a:latin typeface="Calibri" pitchFamily="34" charset="0"/>
-                <a:ea typeface="Calibri" pitchFamily="34" charset="-122"/>
-                <a:cs typeface="Calibri" pitchFamily="34" charset="-120"/>
-              </a:rPr>
-              <a:t>train ↓ / val ↑ (overfit)</a:t>
-            </a:r>
-            <a:endParaRPr lang="en-US" sz="900" dirty="0"/>
-          </a:p>
-        </p:txBody>
-      </p:sp>
-      <p:sp>
-        <p:nvSpPr>
-          <p:cNvPr id="18" name="Shape 15"/>
-          <p:cNvSpPr/>
-          <p:nvPr/>
-        </p:nvSpPr>
-        <p:spPr>
-          <a:xfrm>
-            <a:off x="9692640" y="2331720"/>
-            <a:ext cx="173736" cy="96012"/>
-          </a:xfrm>
-          <a:prstGeom prst="line">
-            <a:avLst/>
-          </a:prstGeom>
-          <a:noFill/>
-          <a:ln w="19050">
+          <p:cNvPr id="701" name="curve"/>
+          <p:cNvSpPr/>
+          <p:nvPr/>
+        </p:nvSpPr>
+        <p:spPr>
+          <a:xfrm>
+            <a:off x="9752640" y="2380688"/>
+            <a:ext cx="1627360" cy="961280"/>
+          </a:xfrm>
+          <a:custGeom>
+            <a:avLst/>
+            <a:gdLst/>
+            <a:ahLst/>
+            <a:cxnLst/>
+            <a:rect l="0" t="0" r="0" b="0"/>
+            <a:pathLst>
+              <a:path w="1627360" h="961280">
+                <a:moveTo>
+                  <a:pt x="0" y="0"/>
+                </a:moveTo>
+                <a:lnTo>
+                  <a:pt x="81368" y="48064"/>
+                </a:lnTo>
+                <a:lnTo>
+                  <a:pt x="162736" y="96128"/>
+                </a:lnTo>
+                <a:lnTo>
+                  <a:pt x="244104" y="144192"/>
+                </a:lnTo>
+                <a:lnTo>
+                  <a:pt x="325472" y="192256"/>
+                </a:lnTo>
+                <a:lnTo>
+                  <a:pt x="406840" y="240320"/>
+                </a:lnTo>
+                <a:lnTo>
+                  <a:pt x="488208" y="288384"/>
+                </a:lnTo>
+                <a:lnTo>
+                  <a:pt x="569576" y="336448"/>
+                </a:lnTo>
+                <a:lnTo>
+                  <a:pt x="650944" y="384512"/>
+                </a:lnTo>
+                <a:lnTo>
+                  <a:pt x="732312" y="432576"/>
+                </a:lnTo>
+                <a:lnTo>
+                  <a:pt x="813680" y="480640"/>
+                </a:lnTo>
+                <a:lnTo>
+                  <a:pt x="895048" y="528704"/>
+                </a:lnTo>
+                <a:lnTo>
+                  <a:pt x="976416" y="576768"/>
+                </a:lnTo>
+                <a:lnTo>
+                  <a:pt x="1057784" y="624832"/>
+                </a:lnTo>
+                <a:lnTo>
+                  <a:pt x="1139152" y="672896"/>
+                </a:lnTo>
+                <a:lnTo>
+                  <a:pt x="1220520" y="720960"/>
+                </a:lnTo>
+                <a:lnTo>
+                  <a:pt x="1301888" y="769024"/>
+                </a:lnTo>
+                <a:lnTo>
+                  <a:pt x="1383256" y="817088"/>
+                </a:lnTo>
+                <a:lnTo>
+                  <a:pt x="1464624" y="865152"/>
+                </a:lnTo>
+                <a:lnTo>
+                  <a:pt x="1545992" y="913216"/>
+                </a:lnTo>
+                <a:lnTo>
+                  <a:pt x="1627360" y="961280"/>
+                </a:lnTo>
+              </a:path>
+            </a:pathLst>
+          </a:custGeom>
+          <a:noFill/>
+          <a:ln w="19050" cap="rnd">
             <a:solidFill>
               <a:srgbClr val="0E7C86"/>
             </a:solidFill>
-            <a:prstDash val="solid"/>
+            <a:round/>
           </a:ln>
         </p:spPr>
-      </p:sp>
-      <p:sp>
-        <p:nvSpPr>
-          <p:cNvPr id="19" name="Shape 16"/>
-          <p:cNvSpPr/>
-          <p:nvPr/>
-        </p:nvSpPr>
-        <p:spPr>
-          <a:xfrm>
-            <a:off x="9866376" y="2427732"/>
-            <a:ext cx="173736" cy="96012"/>
-          </a:xfrm>
-          <a:prstGeom prst="line">
-            <a:avLst/>
-          </a:prstGeom>
-          <a:noFill/>
-          <a:ln w="19050">
-            <a:solidFill>
-              <a:srgbClr val="0E7C86"/>
-            </a:solidFill>
-            <a:prstDash val="solid"/>
-          </a:ln>
-        </p:spPr>
-      </p:sp>
-      <p:sp>
-        <p:nvSpPr>
-          <p:cNvPr id="20" name="Shape 17"/>
-          <p:cNvSpPr/>
-          <p:nvPr/>
-        </p:nvSpPr>
-        <p:spPr>
-          <a:xfrm>
-            <a:off x="10040112" y="2523744"/>
-            <a:ext cx="173736" cy="96012"/>
-          </a:xfrm>
-          <a:prstGeom prst="line">
-            <a:avLst/>
-          </a:prstGeom>
-          <a:noFill/>
-          <a:ln w="19050">
-            <a:solidFill>
-              <a:srgbClr val="0E7C86"/>
-            </a:solidFill>
-            <a:prstDash val="solid"/>
-          </a:ln>
-        </p:spPr>
-      </p:sp>
-      <p:sp>
-        <p:nvSpPr>
-          <p:cNvPr id="21" name="Shape 18"/>
-          <p:cNvSpPr/>
-          <p:nvPr/>
-        </p:nvSpPr>
-        <p:spPr>
-          <a:xfrm>
-            <a:off x="10213848" y="2619756"/>
-            <a:ext cx="173736" cy="96012"/>
-          </a:xfrm>
-          <a:prstGeom prst="line">
-            <a:avLst/>
-          </a:prstGeom>
-          <a:noFill/>
-          <a:ln w="19050">
-            <a:solidFill>
-              <a:srgbClr val="0E7C86"/>
-            </a:solidFill>
-            <a:prstDash val="solid"/>
-          </a:ln>
-        </p:spPr>
-      </p:sp>
-      <p:sp>
-        <p:nvSpPr>
-          <p:cNvPr id="22" name="Shape 19"/>
-          <p:cNvSpPr/>
-          <p:nvPr/>
-        </p:nvSpPr>
-        <p:spPr>
-          <a:xfrm>
-            <a:off x="10387584" y="2715768"/>
-            <a:ext cx="173736" cy="96012"/>
-          </a:xfrm>
-          <a:prstGeom prst="line">
-            <a:avLst/>
-          </a:prstGeom>
-          <a:noFill/>
-          <a:ln w="19050">
-            <a:solidFill>
-              <a:srgbClr val="0E7C86"/>
-            </a:solidFill>
-            <a:prstDash val="solid"/>
-          </a:ln>
-        </p:spPr>
-      </p:sp>
-      <p:sp>
-        <p:nvSpPr>
-          <p:cNvPr id="23" name="Shape 20"/>
-          <p:cNvSpPr/>
-          <p:nvPr/>
-        </p:nvSpPr>
-        <p:spPr>
-          <a:xfrm>
-            <a:off x="10561320" y="2811780"/>
-            <a:ext cx="173736" cy="96012"/>
-          </a:xfrm>
-          <a:prstGeom prst="line">
-            <a:avLst/>
-          </a:prstGeom>
-          <a:noFill/>
-          <a:ln w="19050">
-            <a:solidFill>
-              <a:srgbClr val="0E7C86"/>
-            </a:solidFill>
-            <a:prstDash val="solid"/>
-          </a:ln>
-        </p:spPr>
-      </p:sp>
-      <p:sp>
-        <p:nvSpPr>
-          <p:cNvPr id="24" name="Shape 21"/>
-          <p:cNvSpPr/>
-          <p:nvPr/>
-        </p:nvSpPr>
-        <p:spPr>
-          <a:xfrm>
-            <a:off x="10735056" y="2907792"/>
-            <a:ext cx="173736" cy="96012"/>
-          </a:xfrm>
-          <a:prstGeom prst="line">
-            <a:avLst/>
-          </a:prstGeom>
-          <a:noFill/>
-          <a:ln w="19050">
-            <a:solidFill>
-              <a:srgbClr val="0E7C86"/>
-            </a:solidFill>
-            <a:prstDash val="solid"/>
-          </a:ln>
-        </p:spPr>
-      </p:sp>
-      <p:sp>
-        <p:nvSpPr>
-          <p:cNvPr id="25" name="Shape 22"/>
-          <p:cNvSpPr/>
-          <p:nvPr/>
-        </p:nvSpPr>
-        <p:spPr>
-          <a:xfrm>
-            <a:off x="10908792" y="3003804"/>
-            <a:ext cx="173736" cy="96012"/>
-          </a:xfrm>
-          <a:prstGeom prst="line">
-            <a:avLst/>
-          </a:prstGeom>
-          <a:noFill/>
-          <a:ln w="19050">
-            <a:solidFill>
-              <a:srgbClr val="0E7C86"/>
-            </a:solidFill>
-            <a:prstDash val="solid"/>
-          </a:ln>
-        </p:spPr>
-      </p:sp>
-      <p:sp>
-        <p:nvSpPr>
-          <p:cNvPr id="26" name="Shape 23"/>
-          <p:cNvSpPr/>
-          <p:nvPr/>
-        </p:nvSpPr>
-        <p:spPr>
-          <a:xfrm>
-            <a:off x="11082528" y="3099816"/>
-            <a:ext cx="173736" cy="96012"/>
-          </a:xfrm>
-          <a:prstGeom prst="line">
-            <a:avLst/>
-          </a:prstGeom>
-          <a:noFill/>
-          <a:ln w="19050">
-            <a:solidFill>
-              <a:srgbClr val="0E7C86"/>
-            </a:solidFill>
-            <a:prstDash val="solid"/>
-          </a:ln>
-        </p:spPr>
-      </p:sp>
-      <p:sp>
-        <p:nvSpPr>
-          <p:cNvPr id="27" name="Shape 24"/>
-          <p:cNvSpPr/>
-          <p:nvPr/>
-        </p:nvSpPr>
-        <p:spPr>
-          <a:xfrm>
-            <a:off x="11256264" y="3195828"/>
-            <a:ext cx="173736" cy="96012"/>
-          </a:xfrm>
-          <a:prstGeom prst="line">
-            <a:avLst/>
-          </a:prstGeom>
-          <a:noFill/>
-          <a:ln w="19050">
-            <a:solidFill>
-              <a:srgbClr val="0E7C86"/>
-            </a:solidFill>
-            <a:prstDash val="solid"/>
-          </a:ln>
-        </p:spPr>
-      </p:sp>
-      <p:sp>
-        <p:nvSpPr>
-          <p:cNvPr id="28" name="Shape 25"/>
-          <p:cNvSpPr/>
-          <p:nvPr/>
-        </p:nvSpPr>
-        <p:spPr>
-          <a:xfrm>
-            <a:off x="9692640" y="2537460"/>
-            <a:ext cx="173736" cy="38405"/>
-          </a:xfrm>
-          <a:prstGeom prst="line">
-            <a:avLst/>
-          </a:prstGeom>
-          <a:noFill/>
-          <a:ln w="19050">
+        <p:txBody>
+          <a:bodyPr/>
+          <a:lstStyle/>
+          <a:p>
+            <a:endParaRPr lang="en-US"/>
+          </a:p>
+        </p:txBody>
+      </p:sp>
+      <p:sp>
+        <p:nvSpPr>
+          <p:cNvPr id="702" name="curve"/>
+          <p:cNvSpPr/>
+          <p:nvPr/>
+        </p:nvSpPr>
+        <p:spPr>
+          <a:xfrm>
+            <a:off x="9752640" y="2344640"/>
+            <a:ext cx="1627360" cy="597195"/>
+          </a:xfrm>
+          <a:custGeom>
+            <a:avLst/>
+            <a:gdLst/>
+            <a:ahLst/>
+            <a:cxnLst/>
+            <a:rect l="0" t="0" r="0" b="0"/>
+            <a:pathLst>
+              <a:path w="1627360" h="597195">
+                <a:moveTo>
+                  <a:pt x="0" y="0"/>
+                </a:moveTo>
+                <a:lnTo>
+                  <a:pt x="81368" y="54672"/>
+                </a:lnTo>
+                <a:lnTo>
+                  <a:pt x="162736" y="130523"/>
+                </a:lnTo>
+                <a:lnTo>
+                  <a:pt x="244104" y="200667"/>
+                </a:lnTo>
+                <a:lnTo>
+                  <a:pt x="325472" y="265103"/>
+                </a:lnTo>
+                <a:lnTo>
+                  <a:pt x="406840" y="323831"/>
+                </a:lnTo>
+                <a:lnTo>
+                  <a:pt x="488208" y="376851"/>
+                </a:lnTo>
+                <a:lnTo>
+                  <a:pt x="569576" y="424164"/>
+                </a:lnTo>
+                <a:lnTo>
+                  <a:pt x="650944" y="465770"/>
+                </a:lnTo>
+                <a:lnTo>
+                  <a:pt x="732312" y="501668"/>
+                </a:lnTo>
+                <a:lnTo>
+                  <a:pt x="813680" y="531858"/>
+                </a:lnTo>
+                <a:lnTo>
+                  <a:pt x="895048" y="556340"/>
+                </a:lnTo>
+                <a:lnTo>
+                  <a:pt x="976416" y="575115"/>
+                </a:lnTo>
+                <a:lnTo>
+                  <a:pt x="1057784" y="588183"/>
+                </a:lnTo>
+                <a:lnTo>
+                  <a:pt x="1139152" y="595543"/>
+                </a:lnTo>
+                <a:lnTo>
+                  <a:pt x="1220520" y="597195"/>
+                </a:lnTo>
+                <a:lnTo>
+                  <a:pt x="1301888" y="593139"/>
+                </a:lnTo>
+                <a:lnTo>
+                  <a:pt x="1383256" y="583376"/>
+                </a:lnTo>
+                <a:lnTo>
+                  <a:pt x="1464624" y="567906"/>
+                </a:lnTo>
+                <a:lnTo>
+                  <a:pt x="1545992" y="546728"/>
+                </a:lnTo>
+                <a:lnTo>
+                  <a:pt x="1627360" y="519842"/>
+                </a:lnTo>
+              </a:path>
+            </a:pathLst>
+          </a:custGeom>
+          <a:noFill/>
+          <a:ln w="19050" cap="rnd">
             <a:solidFill>
               <a:srgbClr val="C2772B"/>
             </a:solidFill>
-            <a:prstDash val="solid"/>
+            <a:round/>
           </a:ln>
         </p:spPr>
-      </p:sp>
-      <p:sp>
-        <p:nvSpPr>
-          <p:cNvPr id="29" name="Shape 26"/>
-          <p:cNvSpPr/>
-          <p:nvPr/>
-        </p:nvSpPr>
-        <p:spPr>
-          <a:xfrm>
-            <a:off x="9866376" y="2575865"/>
-            <a:ext cx="173736" cy="5486"/>
-          </a:xfrm>
-          <a:prstGeom prst="line">
-            <a:avLst/>
-          </a:prstGeom>
-          <a:noFill/>
-          <a:ln w="19050">
-            <a:solidFill>
-              <a:srgbClr val="C2772B"/>
-            </a:solidFill>
-            <a:prstDash val="solid"/>
-          </a:ln>
-        </p:spPr>
-      </p:sp>
-      <p:sp>
-        <p:nvSpPr>
-          <p:cNvPr id="30" name="Shape 27"/>
-          <p:cNvSpPr/>
-          <p:nvPr/>
-        </p:nvSpPr>
-        <p:spPr>
-          <a:xfrm>
-            <a:off x="10040112" y="2581351"/>
-            <a:ext cx="173736" cy="-27432"/>
-          </a:xfrm>
-          <a:prstGeom prst="line">
-            <a:avLst/>
-          </a:prstGeom>
-          <a:noFill/>
-          <a:ln w="19050">
-            <a:solidFill>
-              <a:srgbClr val="C2772B"/>
-            </a:solidFill>
-            <a:prstDash val="solid"/>
-          </a:ln>
-        </p:spPr>
-      </p:sp>
-      <p:sp>
-        <p:nvSpPr>
-          <p:cNvPr id="31" name="Shape 28"/>
-          <p:cNvSpPr/>
-          <p:nvPr/>
-        </p:nvSpPr>
-        <p:spPr>
-          <a:xfrm>
-            <a:off x="10213848" y="2553919"/>
-            <a:ext cx="173736" cy="-60350"/>
-          </a:xfrm>
-          <a:prstGeom prst="line">
-            <a:avLst/>
-          </a:prstGeom>
-          <a:noFill/>
-          <a:ln w="19050">
-            <a:solidFill>
-              <a:srgbClr val="C2772B"/>
-            </a:solidFill>
-            <a:prstDash val="solid"/>
-          </a:ln>
-        </p:spPr>
-      </p:sp>
-      <p:sp>
-        <p:nvSpPr>
-          <p:cNvPr id="32" name="Shape 29"/>
-          <p:cNvSpPr/>
-          <p:nvPr/>
-        </p:nvSpPr>
-        <p:spPr>
-          <a:xfrm>
-            <a:off x="10387584" y="2493569"/>
-            <a:ext cx="173736" cy="-93269"/>
-          </a:xfrm>
-          <a:prstGeom prst="line">
-            <a:avLst/>
-          </a:prstGeom>
-          <a:noFill/>
-          <a:ln w="19050">
-            <a:solidFill>
-              <a:srgbClr val="C2772B"/>
-            </a:solidFill>
-            <a:prstDash val="solid"/>
-          </a:ln>
-        </p:spPr>
-      </p:sp>
-      <p:sp>
-        <p:nvSpPr>
-          <p:cNvPr id="33" name="Shape 30"/>
-          <p:cNvSpPr/>
-          <p:nvPr/>
-        </p:nvSpPr>
-        <p:spPr>
-          <a:xfrm>
-            <a:off x="10561320" y="2400300"/>
-            <a:ext cx="173736" cy="-126187"/>
-          </a:xfrm>
-          <a:prstGeom prst="line">
-            <a:avLst/>
-          </a:prstGeom>
-          <a:noFill/>
-          <a:ln w="19050">
-            <a:solidFill>
-              <a:srgbClr val="C2772B"/>
-            </a:solidFill>
-            <a:prstDash val="solid"/>
-          </a:ln>
-        </p:spPr>
-      </p:sp>
-      <p:sp>
-        <p:nvSpPr>
-          <p:cNvPr id="34" name="Shape 31"/>
-          <p:cNvSpPr/>
-          <p:nvPr/>
-        </p:nvSpPr>
-        <p:spPr>
-          <a:xfrm>
-            <a:off x="10735056" y="2274113"/>
-            <a:ext cx="173736" cy="-159106"/>
-          </a:xfrm>
-          <a:prstGeom prst="line">
-            <a:avLst/>
-          </a:prstGeom>
-          <a:noFill/>
-          <a:ln w="19050">
-            <a:solidFill>
-              <a:srgbClr val="C2772B"/>
-            </a:solidFill>
-            <a:prstDash val="solid"/>
-          </a:ln>
-        </p:spPr>
-      </p:sp>
-      <p:sp>
-        <p:nvSpPr>
-          <p:cNvPr id="35" name="Shape 32"/>
-          <p:cNvSpPr/>
-          <p:nvPr/>
-        </p:nvSpPr>
-        <p:spPr>
-          <a:xfrm>
-            <a:off x="10908792" y="2115007"/>
-            <a:ext cx="173736" cy="-192024"/>
-          </a:xfrm>
-          <a:prstGeom prst="line">
-            <a:avLst/>
-          </a:prstGeom>
-          <a:noFill/>
-          <a:ln w="19050">
-            <a:solidFill>
-              <a:srgbClr val="C2772B"/>
-            </a:solidFill>
-            <a:prstDash val="solid"/>
-          </a:ln>
-        </p:spPr>
-      </p:sp>
-      <p:sp>
-        <p:nvSpPr>
-          <p:cNvPr id="36" name="Shape 33"/>
-          <p:cNvSpPr/>
-          <p:nvPr/>
-        </p:nvSpPr>
-        <p:spPr>
-          <a:xfrm>
-            <a:off x="11082528" y="1922983"/>
-            <a:ext cx="173736" cy="-224942"/>
-          </a:xfrm>
-          <a:prstGeom prst="line">
-            <a:avLst/>
-          </a:prstGeom>
-          <a:noFill/>
-          <a:ln w="19050">
-            <a:solidFill>
-              <a:srgbClr val="C2772B"/>
-            </a:solidFill>
-            <a:prstDash val="solid"/>
-          </a:ln>
-        </p:spPr>
-      </p:sp>
-      <p:sp>
-        <p:nvSpPr>
-          <p:cNvPr id="37" name="Shape 34"/>
-          <p:cNvSpPr/>
-          <p:nvPr/>
-        </p:nvSpPr>
-        <p:spPr>
-          <a:xfrm>
-            <a:off x="11256264" y="1698041"/>
-            <a:ext cx="173736" cy="-257861"/>
-          </a:xfrm>
-          <a:prstGeom prst="line">
-            <a:avLst/>
-          </a:prstGeom>
-          <a:noFill/>
-          <a:ln w="19050">
-            <a:solidFill>
-              <a:srgbClr val="C2772B"/>
-            </a:solidFill>
-            <a:prstDash val="solid"/>
-          </a:ln>
-        </p:spPr>
+        <p:txBody>
+          <a:bodyPr/>
+          <a:lstStyle/>
+          <a:p>
+            <a:endParaRPr lang="en-US"/>
+          </a:p>
+        </p:txBody>
+      </p:sp>
+      <p:sp>
+        <p:nvSpPr>
+          <p:cNvPr id="17" name="Text 14"/>
+          <p:cNvSpPr/>
+          <p:nvPr/>
+        </p:nvSpPr>
+        <p:spPr>
+          <a:xfrm>
+            <a:off x="9692640" y="1901952"/>
+            <a:ext cx="1737360" cy="274320"/>
+          </a:xfrm>
+          <a:prstGeom prst="rect">
+            <a:avLst/>
+          </a:prstGeom>
+          <a:noFill/>
+          <a:ln/>
+        </p:spPr>
+        <p:txBody>
+          <a:bodyPr wrap="square" lIns="0" tIns="0" rIns="0" bIns="0" rtlCol="0" anchor="ctr"/>
+          <a:lstStyle/>
+          <a:p>
+            <a:pPr marL="0" indent="0" algn="ctr">
+              <a:buNone/>
+            </a:pPr>
+            <a:r>
+              <a:rPr lang="en-US" sz="900" dirty="0">
+                <a:solidFill>
+                  <a:srgbClr val="5B6B70"/>
+                </a:solidFill>
+                <a:latin typeface="Calibri" pitchFamily="34" charset="0"/>
+                <a:ea typeface="Calibri" pitchFamily="34" charset="-122"/>
+                <a:cs typeface="Calibri" pitchFamily="34" charset="-120"/>
+              </a:rPr>
+              <a:t>train ↓ / val ↑ (overfit)</a:t>
+            </a:r>
+            <a:endParaRPr lang="en-US" sz="900" dirty="0"/>
+          </a:p>
+        </p:txBody>
       </p:sp>
     </p:spTree>
   </p:cSld>
@@ -25109,6 +24758,7 @@
         <a:solidFill>
           <a:srgbClr val="FFFFFF"/>
         </a:solidFill>
+        <a:effectLst/>
       </p:bgPr>
     </p:bg>
     <p:spTree>
@@ -25146,11 +24796,11 @@
           <a:bodyPr wrap="square" lIns="0" tIns="0" rIns="0" bIns="0" rtlCol="0" anchor="ctr"/>
           <a:lstStyle/>
           <a:p>
-            <a:pPr indent="0" marL="0">
+            <a:pPr marL="0" indent="0">
               <a:buNone/>
             </a:pPr>
             <a:r>
-              <a:rPr lang="en-US" sz="1200" b="1" spc="200" kern="0" dirty="0">
+              <a:rPr lang="en-US" sz="1200" b="1" kern="0" spc="200" dirty="0">
                 <a:solidFill>
                   <a:srgbClr val="0E7C86"/>
                 </a:solidFill>
@@ -25185,7 +24835,7 @@
           <a:bodyPr wrap="square" lIns="0" tIns="0" rIns="0" bIns="0" rtlCol="0" anchor="t"/>
           <a:lstStyle/>
           <a:p>
-            <a:pPr indent="0" marL="0">
+            <a:pPr marL="0" indent="0">
               <a:buNone/>
             </a:pPr>
             <a:r>
@@ -25224,7 +24874,7 @@
           <a:bodyPr wrap="square" lIns="0" tIns="0" rIns="0" bIns="0" rtlCol="0" anchor="ctr"/>
           <a:lstStyle/>
           <a:p>
-            <a:pPr indent="0" marL="0">
+            <a:pPr marL="0" indent="0">
               <a:buNone/>
             </a:pPr>
             <a:r>
@@ -25263,7 +24913,7 @@
           <a:bodyPr wrap="square" lIns="0" tIns="0" rIns="0" bIns="0" rtlCol="0" anchor="ctr"/>
           <a:lstStyle/>
           <a:p>
-            <a:pPr algn="r" indent="0" marL="0">
+            <a:pPr marL="0" indent="0" algn="r">
               <a:buNone/>
             </a:pPr>
             <a:r>
@@ -25327,7 +24977,7 @@
           <a:bodyPr wrap="square" lIns="0" tIns="0" rIns="0" bIns="0" rtlCol="0" anchor="ctr"/>
           <a:lstStyle/>
           <a:p>
-            <a:pPr algn="l" indent="0" marL="0">
+            <a:pPr marL="0" indent="0" algn="l">
               <a:buNone/>
             </a:pPr>
             <a:endParaRPr lang="en-US" sz="1100" dirty="0"/>
@@ -25380,7 +25030,7 @@
           <a:bodyPr wrap="square" lIns="0" tIns="0" rIns="0" bIns="0" rtlCol="0" anchor="ctr"/>
           <a:lstStyle/>
           <a:p>
-            <a:pPr algn="ctr" indent="0" marL="0">
+            <a:pPr marL="0" indent="0" algn="ctr">
               <a:buNone/>
             </a:pPr>
             <a:r>
@@ -25444,7 +25094,7 @@
           <a:bodyPr wrap="square" lIns="0" tIns="0" rIns="0" bIns="0" rtlCol="0" anchor="ctr"/>
           <a:lstStyle/>
           <a:p>
-            <a:pPr algn="ctr" indent="0" marL="0">
+            <a:pPr marL="0" indent="0" algn="ctr">
               <a:buNone/>
             </a:pPr>
             <a:r>
@@ -25508,7 +25158,7 @@
           <a:bodyPr wrap="square" lIns="0" tIns="0" rIns="0" bIns="0" rtlCol="0" anchor="ctr"/>
           <a:lstStyle/>
           <a:p>
-            <a:pPr algn="ctr" indent="0" marL="0">
+            <a:pPr marL="0" indent="0" algn="ctr">
               <a:buNone/>
             </a:pPr>
             <a:r>
@@ -25572,7 +25222,7 @@
           <a:bodyPr wrap="square" lIns="0" tIns="0" rIns="0" bIns="0" rtlCol="0" anchor="ctr"/>
           <a:lstStyle/>
           <a:p>
-            <a:pPr algn="ctr" indent="0" marL="0">
+            <a:pPr marL="0" indent="0" algn="ctr">
               <a:buNone/>
             </a:pPr>
             <a:r>
@@ -25636,7 +25286,7 @@
           <a:bodyPr wrap="square" lIns="0" tIns="0" rIns="0" bIns="0" rtlCol="0" anchor="ctr"/>
           <a:lstStyle/>
           <a:p>
-            <a:pPr algn="l" indent="0" marL="0">
+            <a:pPr marL="0" indent="0" algn="l">
               <a:buNone/>
             </a:pPr>
             <a:r>
@@ -25700,7 +25350,7 @@
           <a:bodyPr wrap="square" lIns="0" tIns="0" rIns="0" bIns="0" rtlCol="0" anchor="ctr"/>
           <a:lstStyle/>
           <a:p>
-            <a:pPr algn="ctr" indent="0" marL="0">
+            <a:pPr marL="0" indent="0" algn="ctr">
               <a:buNone/>
             </a:pPr>
             <a:r>
@@ -25764,7 +25414,7 @@
           <a:bodyPr wrap="square" lIns="0" tIns="0" rIns="0" bIns="0" rtlCol="0" anchor="ctr"/>
           <a:lstStyle/>
           <a:p>
-            <a:pPr algn="ctr" indent="0" marL="0">
+            <a:pPr marL="0" indent="0" algn="ctr">
               <a:buNone/>
             </a:pPr>
             <a:r>
@@ -25828,7 +25478,7 @@
           <a:bodyPr wrap="square" lIns="0" tIns="0" rIns="0" bIns="0" rtlCol="0" anchor="ctr"/>
           <a:lstStyle/>
           <a:p>
-            <a:pPr algn="ctr" indent="0" marL="0">
+            <a:pPr marL="0" indent="0" algn="ctr">
               <a:buNone/>
             </a:pPr>
             <a:r>
@@ -25892,7 +25542,7 @@
           <a:bodyPr wrap="square" lIns="0" tIns="0" rIns="0" bIns="0" rtlCol="0" anchor="ctr"/>
           <a:lstStyle/>
           <a:p>
-            <a:pPr algn="ctr" indent="0" marL="0">
+            <a:pPr marL="0" indent="0" algn="ctr">
               <a:buNone/>
             </a:pPr>
             <a:r>
@@ -25956,7 +25606,7 @@
           <a:bodyPr wrap="square" lIns="0" tIns="0" rIns="0" bIns="0" rtlCol="0" anchor="ctr"/>
           <a:lstStyle/>
           <a:p>
-            <a:pPr algn="l" indent="0" marL="0">
+            <a:pPr marL="0" indent="0" algn="l">
               <a:buNone/>
             </a:pPr>
             <a:r>
@@ -26020,7 +25670,7 @@
           <a:bodyPr wrap="square" lIns="0" tIns="0" rIns="0" bIns="0" rtlCol="0" anchor="ctr"/>
           <a:lstStyle/>
           <a:p>
-            <a:pPr algn="ctr" indent="0" marL="0">
+            <a:pPr marL="0" indent="0" algn="ctr">
               <a:buNone/>
             </a:pPr>
             <a:r>
@@ -26084,7 +25734,7 @@
           <a:bodyPr wrap="square" lIns="0" tIns="0" rIns="0" bIns="0" rtlCol="0" anchor="ctr"/>
           <a:lstStyle/>
           <a:p>
-            <a:pPr algn="ctr" indent="0" marL="0">
+            <a:pPr marL="0" indent="0" algn="ctr">
               <a:buNone/>
             </a:pPr>
             <a:r>
@@ -26148,7 +25798,7 @@
           <a:bodyPr wrap="square" lIns="0" tIns="0" rIns="0" bIns="0" rtlCol="0" anchor="ctr"/>
           <a:lstStyle/>
           <a:p>
-            <a:pPr algn="ctr" indent="0" marL="0">
+            <a:pPr marL="0" indent="0" algn="ctr">
               <a:buNone/>
             </a:pPr>
             <a:r>
@@ -26212,7 +25862,7 @@
           <a:bodyPr wrap="square" lIns="0" tIns="0" rIns="0" bIns="0" rtlCol="0" anchor="ctr"/>
           <a:lstStyle/>
           <a:p>
-            <a:pPr algn="ctr" indent="0" marL="0">
+            <a:pPr marL="0" indent="0" algn="ctr">
               <a:buNone/>
             </a:pPr>
             <a:r>
@@ -26276,7 +25926,7 @@
           <a:bodyPr wrap="square" lIns="0" tIns="0" rIns="0" bIns="0" rtlCol="0" anchor="ctr"/>
           <a:lstStyle/>
           <a:p>
-            <a:pPr algn="l" indent="0" marL="0">
+            <a:pPr marL="0" indent="0" algn="l">
               <a:buNone/>
             </a:pPr>
             <a:r>
@@ -26340,7 +25990,7 @@
           <a:bodyPr wrap="square" lIns="0" tIns="0" rIns="0" bIns="0" rtlCol="0" anchor="ctr"/>
           <a:lstStyle/>
           <a:p>
-            <a:pPr algn="ctr" indent="0" marL="0">
+            <a:pPr marL="0" indent="0" algn="ctr">
               <a:buNone/>
             </a:pPr>
             <a:r>
@@ -26404,7 +26054,7 @@
           <a:bodyPr wrap="square" lIns="0" tIns="0" rIns="0" bIns="0" rtlCol="0" anchor="ctr"/>
           <a:lstStyle/>
           <a:p>
-            <a:pPr algn="ctr" indent="0" marL="0">
+            <a:pPr marL="0" indent="0" algn="ctr">
               <a:buNone/>
             </a:pPr>
             <a:r>
@@ -26468,7 +26118,7 @@
           <a:bodyPr wrap="square" lIns="0" tIns="0" rIns="0" bIns="0" rtlCol="0" anchor="ctr"/>
           <a:lstStyle/>
           <a:p>
-            <a:pPr algn="ctr" indent="0" marL="0">
+            <a:pPr marL="0" indent="0" algn="ctr">
               <a:buNone/>
             </a:pPr>
             <a:r>
@@ -26532,7 +26182,7 @@
           <a:bodyPr wrap="square" lIns="0" tIns="0" rIns="0" bIns="0" rtlCol="0" anchor="ctr"/>
           <a:lstStyle/>
           <a:p>
-            <a:pPr algn="ctr" indent="0" marL="0">
+            <a:pPr marL="0" indent="0" algn="ctr">
               <a:buNone/>
             </a:pPr>
             <a:r>
@@ -26571,7 +26221,7 @@
           <a:bodyPr wrap="square" lIns="0" tIns="0" rIns="0" bIns="0" rtlCol="0" anchor="ctr"/>
           <a:lstStyle/>
           <a:p>
-            <a:pPr algn="ctr" indent="0" marL="0">
+            <a:pPr marL="0" indent="0" algn="ctr">
               <a:buNone/>
             </a:pPr>
             <a:r>
@@ -26890,4 +26540,299 @@
     </a:ext>
   </a:extLst>
 </a:theme>
+</file>
+
+<file path=ppt/theme/theme2.xml><?xml version="1.0" encoding="utf-8"?>
+<a:theme xmlns:a="http://schemas.openxmlformats.org/drawingml/2006/main" name="Office Theme">
+  <a:themeElements>
+    <a:clrScheme name="Office">
+      <a:dk1>
+        <a:sysClr val="windowText" lastClr="000000"/>
+      </a:dk1>
+      <a:lt1>
+        <a:sysClr val="window" lastClr="FFFFFF"/>
+      </a:lt1>
+      <a:dk2>
+        <a:srgbClr val="44546A"/>
+      </a:dk2>
+      <a:lt2>
+        <a:srgbClr val="E7E6E6"/>
+      </a:lt2>
+      <a:accent1>
+        <a:srgbClr val="4472C4"/>
+      </a:accent1>
+      <a:accent2>
+        <a:srgbClr val="ED7D31"/>
+      </a:accent2>
+      <a:accent3>
+        <a:srgbClr val="A5A5A5"/>
+      </a:accent3>
+      <a:accent4>
+        <a:srgbClr val="FFC000"/>
+      </a:accent4>
+      <a:accent5>
+        <a:srgbClr val="5B9BD5"/>
+      </a:accent5>
+      <a:accent6>
+        <a:srgbClr val="70AD47"/>
+      </a:accent6>
+      <a:hlink>
+        <a:srgbClr val="0563C1"/>
+      </a:hlink>
+      <a:folHlink>
+        <a:srgbClr val="954F72"/>
+      </a:folHlink>
+    </a:clrScheme>
+    <a:fontScheme name="Office">
+      <a:majorFont>
+        <a:latin typeface="Calibri Light" panose="020F0302020204030204"/>
+        <a:ea typeface=""/>
+        <a:cs typeface=""/>
+        <a:font script="Jpan" typeface="游ゴシック Light"/>
+        <a:font script="Hang" typeface="맑은 고딕"/>
+        <a:font script="Hans" typeface="等线 Light"/>
+        <a:font script="Hant" typeface="新細明體"/>
+        <a:font script="Arab" typeface="Times New Roman"/>
+        <a:font script="Hebr" typeface="Times New Roman"/>
+        <a:font script="Thai" typeface="Angsana New"/>
+        <a:font script="Ethi" typeface="Nyala"/>
+        <a:font script="Beng" typeface="Vrinda"/>
+        <a:font script="Gujr" typeface="Shruti"/>
+        <a:font script="Khmr" typeface="MoolBoran"/>
+        <a:font script="Knda" typeface="Tunga"/>
+        <a:font script="Guru" typeface="Raavi"/>
+        <a:font script="Cans" typeface="Euphemia"/>
+        <a:font script="Cher" typeface="Plantagenet Cherokee"/>
+        <a:font script="Yiii" typeface="Microsoft Yi Baiti"/>
+        <a:font script="Tibt" typeface="Microsoft Himalaya"/>
+        <a:font script="Thaa" typeface="MV Boli"/>
+        <a:font script="Deva" typeface="Mangal"/>
+        <a:font script="Telu" typeface="Gautami"/>
+        <a:font script="Taml" typeface="Latha"/>
+        <a:font script="Syrc" typeface="Estrangelo Edessa"/>
+        <a:font script="Orya" typeface="Kalinga"/>
+        <a:font script="Mlym" typeface="Kartika"/>
+        <a:font script="Laoo" typeface="DokChampa"/>
+        <a:font script="Sinh" typeface="Iskoola Pota"/>
+        <a:font script="Mong" typeface="Mongolian Baiti"/>
+        <a:font script="Viet" typeface="Times New Roman"/>
+        <a:font script="Uigh" typeface="Microsoft Uighur"/>
+        <a:font script="Geor" typeface="Sylfaen"/>
+        <a:font script="Armn" typeface="Arial"/>
+        <a:font script="Bugi" typeface="Leelawadee UI"/>
+        <a:font script="Bopo" typeface="Microsoft JhengHei"/>
+        <a:font script="Java" typeface="Javanese Text"/>
+        <a:font script="Lisu" typeface="Segoe UI"/>
+        <a:font script="Mymr" typeface="Myanmar Text"/>
+        <a:font script="Nkoo" typeface="Ebrima"/>
+        <a:font script="Olck" typeface="Nirmala UI"/>
+        <a:font script="Osma" typeface="Ebrima"/>
+        <a:font script="Phag" typeface="Phagspa"/>
+        <a:font script="Syrn" typeface="Estrangelo Edessa"/>
+        <a:font script="Syrj" typeface="Estrangelo Edessa"/>
+        <a:font script="Syre" typeface="Estrangelo Edessa"/>
+        <a:font script="Sora" typeface="Nirmala UI"/>
+        <a:font script="Tale" typeface="Microsoft Tai Le"/>
+        <a:font script="Talu" typeface="Microsoft New Tai Lue"/>
+        <a:font script="Tfng" typeface="Ebrima"/>
+      </a:majorFont>
+      <a:minorFont>
+        <a:latin typeface="Calibri" panose="020F0502020204030204"/>
+        <a:ea typeface=""/>
+        <a:cs typeface=""/>
+        <a:font script="Jpan" typeface="游ゴシック"/>
+        <a:font script="Hang" typeface="맑은 고딕"/>
+        <a:font script="Hans" typeface="等线"/>
+        <a:font script="Hant" typeface="新細明體"/>
+        <a:font script="Arab" typeface="Arial"/>
+        <a:font script="Hebr" typeface="Arial"/>
+        <a:font script="Thai" typeface="Cordia New"/>
+        <a:font script="Ethi" typeface="Nyala"/>
+        <a:font script="Beng" typeface="Vrinda"/>
+        <a:font script="Gujr" typeface="Shruti"/>
+        <a:font script="Khmr" typeface="DaunPenh"/>
+        <a:font script="Knda" typeface="Tunga"/>
+        <a:font script="Guru" typeface="Raavi"/>
+        <a:font script="Cans" typeface="Euphemia"/>
+        <a:font script="Cher" typeface="Plantagenet Cherokee"/>
+        <a:font script="Yiii" typeface="Microsoft Yi Baiti"/>
+        <a:font script="Tibt" typeface="Microsoft Himalaya"/>
+        <a:font script="Thaa" typeface="MV Boli"/>
+        <a:font script="Deva" typeface="Mangal"/>
+        <a:font script="Telu" typeface="Gautami"/>
+        <a:font script="Taml" typeface="Latha"/>
+        <a:font script="Syrc" typeface="Estrangelo Edessa"/>
+        <a:font script="Orya" typeface="Kalinga"/>
+        <a:font script="Mlym" typeface="Kartika"/>
+        <a:font script="Laoo" typeface="DokChampa"/>
+        <a:font script="Sinh" typeface="Iskoola Pota"/>
+        <a:font script="Mong" typeface="Mongolian Baiti"/>
+        <a:font script="Viet" typeface="Arial"/>
+        <a:font script="Uigh" typeface="Microsoft Uighur"/>
+        <a:font script="Geor" typeface="Sylfaen"/>
+        <a:font script="Armn" typeface="Arial"/>
+        <a:font script="Bugi" typeface="Leelawadee UI"/>
+        <a:font script="Bopo" typeface="Microsoft JhengHei"/>
+        <a:font script="Java" typeface="Javanese Text"/>
+        <a:font script="Lisu" typeface="Segoe UI"/>
+        <a:font script="Mymr" typeface="Myanmar Text"/>
+        <a:font script="Nkoo" typeface="Ebrima"/>
+        <a:font script="Olck" typeface="Nirmala UI"/>
+        <a:font script="Osma" typeface="Ebrima"/>
+        <a:font script="Phag" typeface="Phagspa"/>
+        <a:font script="Syrn" typeface="Estrangelo Edessa"/>
+        <a:font script="Syrj" typeface="Estrangelo Edessa"/>
+        <a:font script="Syre" typeface="Estrangelo Edessa"/>
+        <a:font script="Sora" typeface="Nirmala UI"/>
+        <a:font script="Tale" typeface="Microsoft Tai Le"/>
+        <a:font script="Talu" typeface="Microsoft New Tai Lue"/>
+        <a:font script="Tfng" typeface="Ebrima"/>
+      </a:minorFont>
+    </a:fontScheme>
+    <a:fmtScheme name="Office">
+      <a:fillStyleLst>
+        <a:solidFill>
+          <a:schemeClr val="phClr"/>
+        </a:solidFill>
+        <a:gradFill rotWithShape="1">
+          <a:gsLst>
+            <a:gs pos="0">
+              <a:schemeClr val="phClr">
+                <a:lumMod val="110000"/>
+                <a:satMod val="105000"/>
+                <a:tint val="67000"/>
+              </a:schemeClr>
+            </a:gs>
+            <a:gs pos="50000">
+              <a:schemeClr val="phClr">
+                <a:lumMod val="105000"/>
+                <a:satMod val="103000"/>
+                <a:tint val="73000"/>
+              </a:schemeClr>
+            </a:gs>
+            <a:gs pos="100000">
+              <a:schemeClr val="phClr">
+                <a:lumMod val="105000"/>
+                <a:satMod val="109000"/>
+                <a:tint val="81000"/>
+              </a:schemeClr>
+            </a:gs>
+          </a:gsLst>
+          <a:lin ang="5400000" scaled="0"/>
+        </a:gradFill>
+        <a:gradFill rotWithShape="1">
+          <a:gsLst>
+            <a:gs pos="0">
+              <a:schemeClr val="phClr">
+                <a:satMod val="103000"/>
+                <a:lumMod val="102000"/>
+                <a:tint val="94000"/>
+              </a:schemeClr>
+            </a:gs>
+            <a:gs pos="50000">
+              <a:schemeClr val="phClr">
+                <a:satMod val="110000"/>
+                <a:lumMod val="100000"/>
+                <a:shade val="100000"/>
+              </a:schemeClr>
+            </a:gs>
+            <a:gs pos="100000">
+              <a:schemeClr val="phClr">
+                <a:lumMod val="99000"/>
+                <a:satMod val="120000"/>
+                <a:shade val="78000"/>
+              </a:schemeClr>
+            </a:gs>
+          </a:gsLst>
+          <a:lin ang="5400000" scaled="0"/>
+        </a:gradFill>
+      </a:fillStyleLst>
+      <a:lnStyleLst>
+        <a:ln w="6350" cap="flat" cmpd="sng" algn="ctr">
+          <a:solidFill>
+            <a:schemeClr val="phClr"/>
+          </a:solidFill>
+          <a:prstDash val="solid"/>
+          <a:miter lim="800000"/>
+        </a:ln>
+        <a:ln w="12700" cap="flat" cmpd="sng" algn="ctr">
+          <a:solidFill>
+            <a:schemeClr val="phClr"/>
+          </a:solidFill>
+          <a:prstDash val="solid"/>
+          <a:miter lim="800000"/>
+        </a:ln>
+        <a:ln w="19050" cap="flat" cmpd="sng" algn="ctr">
+          <a:solidFill>
+            <a:schemeClr val="phClr"/>
+          </a:solidFill>
+          <a:prstDash val="solid"/>
+          <a:miter lim="800000"/>
+        </a:ln>
+      </a:lnStyleLst>
+      <a:effectStyleLst>
+        <a:effectStyle>
+          <a:effectLst/>
+        </a:effectStyle>
+        <a:effectStyle>
+          <a:effectLst/>
+        </a:effectStyle>
+        <a:effectStyle>
+          <a:effectLst>
+            <a:outerShdw blurRad="57150" dist="19050" dir="5400000" algn="ctr" rotWithShape="0">
+              <a:srgbClr val="000000">
+                <a:alpha val="63000"/>
+              </a:srgbClr>
+            </a:outerShdw>
+          </a:effectLst>
+        </a:effectStyle>
+      </a:effectStyleLst>
+      <a:bgFillStyleLst>
+        <a:solidFill>
+          <a:schemeClr val="phClr"/>
+        </a:solidFill>
+        <a:solidFill>
+          <a:schemeClr val="phClr">
+            <a:tint val="95000"/>
+            <a:satMod val="170000"/>
+          </a:schemeClr>
+        </a:solidFill>
+        <a:gradFill rotWithShape="1">
+          <a:gsLst>
+            <a:gs pos="0">
+              <a:schemeClr val="phClr">
+                <a:tint val="93000"/>
+                <a:satMod val="150000"/>
+                <a:shade val="98000"/>
+                <a:lumMod val="102000"/>
+              </a:schemeClr>
+            </a:gs>
+            <a:gs pos="50000">
+              <a:schemeClr val="phClr">
+                <a:tint val="98000"/>
+                <a:satMod val="130000"/>
+                <a:shade val="90000"/>
+                <a:lumMod val="103000"/>
+              </a:schemeClr>
+            </a:gs>
+            <a:gs pos="100000">
+              <a:schemeClr val="phClr">
+                <a:shade val="63000"/>
+                <a:satMod val="120000"/>
+              </a:schemeClr>
+            </a:gs>
+          </a:gsLst>
+          <a:lin ang="5400000" scaled="0"/>
+        </a:gradFill>
+      </a:bgFillStyleLst>
+    </a:fmtScheme>
+  </a:themeElements>
+  <a:objectDefaults/>
+  <a:extraClrSchemeLst/>
+  <a:extLst>
+    <a:ext uri="{05A4C25C-085E-4340-85A3-A5531E510DB2}">
+      <thm15:themeFamily xmlns:thm15="http://schemas.microsoft.com/office/thememl/2012/main" name="Office Theme" id="{62F939B6-93AF-4DB8-9C6B-D6C7DFDC589F}" vid="{4A3C46E8-61CC-4603-A589-7422A47A8E4A}"/>
+    </a:ext>
+  </a:extLst>
+</a:theme>
 </file>
--- a/lessons/lesson04_model_validation/theory/slides/Lecture4 - Model Improvement, Validation, and Interpretation.pptx
+++ b/lessons/lesson04_model_validation/theory/slides/Lecture4 - Model Improvement, Validation, and Interpretation.pptx
@@ -16015,7 +16015,7 @@
                 <a:ea typeface="Calibri" pitchFamily="34" charset="-122"/>
                 <a:cs typeface="Calibri" pitchFamily="34" charset="-120"/>
               </a:rPr>
-              <a:t>SHAP attributes each prediction to its features — a consistent, per-patient explanation.</a:t>
+              <a:t>SHAP attributes each prediction to its features: a consistent, per-patient explanation.</a:t>
             </a:r>
             <a:endParaRPr lang="en-US" sz="1500" dirty="0"/>
           </a:p>
@@ -16059,7 +16059,6 @@
               </a:rPr>
               <a:t>Limit: it explains the model, not the biology: a faithful explanation of a flawed model is still flawed.</a:t>
             </a:r>
-            <a:endParaRPr lang="en-US" sz="1500" dirty="0"/>
           </a:p>
           <a:p>
             <a:pPr marL="203200" indent="-203200">
@@ -16070,6 +16069,26 @@
               <a:buChar char="•"/>
             </a:pPr>
             <a:r>
+              <a:rPr lang="en-US" sz="1500" dirty="0">
+                <a:solidFill>
+                  <a:srgbClr val="C2772B"/>
+                </a:solidFill>
+                <a:latin typeface="Calibri" pitchFamily="34" charset="0"/>
+                <a:cs typeface="Calibri" pitchFamily="34" charset="-120"/>
+              </a:rPr>
+              <a:t>Limit: correlated features get split contribution</a:t>
+            </a:r>
+            <a:endParaRPr lang="en-US" sz="1500" dirty="0"/>
+          </a:p>
+          <a:p>
+            <a:pPr marL="203200" indent="-203200">
+              <a:spcAft>
+                <a:spcPts val="1200"/>
+              </a:spcAft>
+              <a:buSzPct val="100000"/>
+              <a:buChar char="•"/>
+            </a:pPr>
+            <a:r>
               <a:rPr lang="en-US" sz="1500" b="1" dirty="0">
                 <a:solidFill>
                   <a:srgbClr val="A8403A"/>
@@ -16111,45 +16130,6 @@
           <a:lstStyle/>
           <a:p>
             <a:endParaRPr lang="en-IT"/>
-          </a:p>
-        </p:txBody>
-      </p:sp>
-      <p:sp>
-        <p:nvSpPr>
-          <p:cNvPr id="9" name="Text 6"/>
-          <p:cNvSpPr/>
-          <p:nvPr/>
-        </p:nvSpPr>
-        <p:spPr>
-          <a:xfrm>
-            <a:off x="7040880" y="2240280"/>
-            <a:ext cx="3840480" cy="274320"/>
-          </a:xfrm>
-          <a:prstGeom prst="rect">
-            <a:avLst/>
-          </a:prstGeom>
-          <a:noFill/>
-          <a:ln/>
-        </p:spPr>
-        <p:txBody>
-          <a:bodyPr wrap="square" lIns="0" tIns="0" rIns="0" bIns="0" rtlCol="0" anchor="ctr"/>
-          <a:lstStyle/>
-          <a:p>
-            <a:pPr marL="0" indent="0" algn="ctr">
-              <a:buNone/>
-            </a:pPr>
-            <a:r>
-              <a:rPr lang="en-US" sz="900" dirty="0">
-                <a:solidFill>
-                  <a:srgbClr val="5B6B70"/>
-                </a:solidFill>
-                <a:latin typeface="Calibri" pitchFamily="34" charset="0"/>
-                <a:ea typeface="Calibri" pitchFamily="34" charset="-122"/>
-                <a:cs typeface="Calibri" pitchFamily="34" charset="-120"/>
-              </a:rPr>
-              <a:t>base → prediction</a:t>
-            </a:r>
-            <a:endParaRPr lang="en-US" sz="900" dirty="0"/>
           </a:p>
         </p:txBody>
       </p:sp>

--- a/lessons/lesson04_model_validation/theory/slides/Lecture4 - Model Improvement, Validation, and Interpretation.pptx
+++ b/lessons/lesson04_model_validation/theory/slides/Lecture4 - Model Improvement, Validation, and Interpretation.pptx
@@ -844,7 +844,7 @@
           <a:p>
             <a:r>
               <a:rPr lang="en-US" dirty="0"/>
-              <a:t>1 min. Frame the tension: students want fancier models; we'll honour that, but the lesson is that proving a model is better is harder than building a fancier one. A better algorithm is the easy part; a trustworthy estimate is the hard part.</a:t>
+              <a:t>We keep features and improve models, how to check model performance and different interpretation levels for different models</a:t>
             </a:r>
           </a:p>
         </p:txBody>
@@ -931,7 +931,41 @@
           <a:p>
             <a:r>
               <a:rPr lang="en-US" dirty="0"/>
-              <a:t>4 min. Parameters are learned FROM data during fitting (gene coefficients). Hyperparameters are set BEFORE fitting and control the model (depth, #trees, penalty C). You don't learn hyperparameters by fitting -- you search and must validate honestly.</a:t>
+              <a:t>Now the fitting vs tuning part. ML is a function with parameters you find the values of parameters to get a function such that given the input, the output of the function fits well the labels in the train data. 1 -&gt; 2 -&gt; 3 -&gt; 4.</a:t>
+            </a:r>
+            <a:br>
+              <a:rPr lang="en-US" dirty="0"/>
+            </a:br>
+            <a:br>
+              <a:rPr lang="en-US" dirty="0"/>
+            </a:br>
+            <a:r>
+              <a:rPr lang="en-US" dirty="0"/>
+              <a:t>The way you can do it: train, </a:t>
+            </a:r>
+            <a:r>
+              <a:rPr lang="en-US" dirty="0" err="1"/>
+              <a:t>val</a:t>
+            </a:r>
+            <a:r>
+              <a:rPr lang="en-US" dirty="0"/>
+              <a:t>, test -&gt; train and </a:t>
+            </a:r>
+            <a:r>
+              <a:rPr lang="en-US" dirty="0" err="1"/>
+              <a:t>val</a:t>
+            </a:r>
+            <a:r>
+              <a:rPr lang="en-US" dirty="0"/>
+              <a:t> used for hyper params tuning -&gt; test as </a:t>
+            </a:r>
+            <a:r>
+              <a:rPr lang="en-US" dirty="0" err="1"/>
+              <a:t>ext</a:t>
+            </a:r>
+            <a:r>
+              <a:rPr lang="en-US" dirty="0"/>
+              <a:t> validation -&gt; overfit tuning as we will see</a:t>
             </a:r>
           </a:p>
         </p:txBody>
@@ -1018,7 +1052,29 @@
           <a:p>
             <a:r>
               <a:rPr lang="en-US" dirty="0"/>
-              <a:t>5 min. Grid: every combination -- thorough but expensive. Random: sampled combinations -- often finds good values far cheaper. Every candidate scored by CV, never the test set. Cost explodes with #hyperparameters.</a:t>
+              <a:t>How to tune: different strategy_</a:t>
+            </a:r>
+          </a:p>
+          <a:p>
+            <a:r>
+              <a:rPr lang="en-US" dirty="0"/>
+              <a:t>1 -&gt; 2 (because very often model perform depends on few </a:t>
+            </a:r>
+            <a:r>
+              <a:rPr lang="en-US" dirty="0" err="1"/>
+              <a:t>hyperparams</a:t>
+            </a:r>
+            <a:r>
+              <a:rPr lang="en-US" dirty="0"/>
+              <a:t> -&gt; you waste a lot of resources on the ones that do not change with grid search) -&gt;3  cross </a:t>
+            </a:r>
+            <a:r>
+              <a:rPr lang="en-US" dirty="0" err="1"/>
+              <a:t>val</a:t>
+            </a:r>
+            <a:r>
+              <a:rPr lang="en-US" dirty="0"/>
+              <a:t> (with caution) -&gt; 4</a:t>
             </a:r>
           </a:p>
         </p:txBody>
@@ -1086,7 +1142,21 @@
             <p:ph type="sldImg"/>
           </p:nvPr>
         </p:nvSpPr>
-        <p:spPr/>
+        <p:spPr>
+          <a:xfrm>
+            <a:off x="-228600" y="1524000"/>
+            <a:ext cx="7315200" cy="4114800"/>
+          </a:xfrm>
+          <a:prstGeom prst="rect">
+            <a:avLst/>
+          </a:prstGeom>
+          <a:noFill/>
+          <a:ln w="12700">
+            <a:solidFill>
+              <a:prstClr val="black"/>
+            </a:solidFill>
+          </a:ln>
+        </p:spPr>
       </p:sp>
       <p:sp>
         <p:nvSpPr>
@@ -1098,45 +1168,30 @@
             <p:ph type="body" idx="1"/>
           </p:nvPr>
         </p:nvSpPr>
-        <p:spPr/>
-        <p:txBody>
-          <a:bodyPr/>
-          <a:lstStyle/>
-          <a:p>
-            <a:r>
-              <a:rPr lang="en-US" dirty="0"/>
-              <a:t>4 min. Every time you tune to the validation score, you use up its honesty. Tune hard enough and the score becomes optimistic -- you overfit the TUNING. The model never saw test data, yet the ESTIMATE is inflated. Fix is structural: nested CV.</a:t>
-            </a:r>
-          </a:p>
-        </p:txBody>
-      </p:sp>
-      <p:sp>
-        <p:nvSpPr>
-          <p:cNvPr id="4" name="Slide Number Placeholder 3"/>
-          <p:cNvSpPr>
-            <a:spLocks noGrp="1"/>
-          </p:cNvSpPr>
-          <p:nvPr>
-            <p:ph type="sldNum" sz="quarter" idx="10"/>
-          </p:nvPr>
-        </p:nvSpPr>
-        <p:spPr/>
-        <p:txBody>
-          <a:bodyPr/>
-          <a:lstStyle/>
-          <a:p>
-            <a:fld id="{F7021451-1387-4CA6-816F-3879F97B5CBC}" type="slidenum">
-              <a:rPr lang="en-US"/>
-              <a:t>13</a:t>
-            </a:fld>
-            <a:endParaRPr lang="en-US"/>
+        <p:spPr>
+          <a:xfrm>
+            <a:off x="685800" y="5867400"/>
+            <a:ext cx="5486400" cy="4800600"/>
+          </a:xfrm>
+          <a:prstGeom prst="rect">
+            <a:avLst/>
+          </a:prstGeom>
+        </p:spPr>
+        <p:txBody>
+          <a:bodyPr/>
+          <a:lstStyle/>
+          <a:p>
+            <a:r>
+              <a:rPr lang="en-IT" dirty="0"/>
+              <a:t>Follow the slide</a:t>
+            </a:r>
           </a:p>
         </p:txBody>
       </p:sp>
     </p:spTree>
     <p:extLst>
       <p:ext uri="{BB962C8B-B14F-4D97-AF65-F5344CB8AC3E}">
-        <p14:creationId xmlns:p14="http://schemas.microsoft.com/office/powerpoint/2010/main" val="1024086991"/>
+        <p14:creationId xmlns:p14="http://schemas.microsoft.com/office/powerpoint/2010/main" val="2389845536"/>
       </p:ext>
     </p:extLst>
   </p:cSld>
@@ -1192,7 +1247,7 @@
           <a:p>
             <a:r>
               <a:rPr lang="en-US" dirty="0"/>
-              <a:t>4 min. k-fold rotates the held-out fold and averages. Everything data-dependent refits inside each fold. This estimates a FIXED modelling choice. But what if the choice (hyperparameters) was selected using the data?</a:t>
+              <a:t>The danger in tuning, </a:t>
             </a:r>
           </a:p>
         </p:txBody>
@@ -1214,7 +1269,7 @@
           <a:p>
             <a:fld id="{F7021451-1387-4CA6-816F-3879F97B5CBC}" type="slidenum">
               <a:rPr lang="en-US"/>
-              <a:t>14</a:t>
+              <a:t>13</a:t>
             </a:fld>
             <a:endParaRPr lang="en-US"/>
           </a:p>
@@ -1279,7 +1334,15 @@
           <a:p>
             <a:r>
               <a:rPr lang="en-US" dirty="0"/>
-              <a:t>5 min. Two loops: inner selects hyperparameters; outer estimates performance. The outer fold is never used to choose anything. Result: an honest estimate that INCLUDES the cost of tuning. Expensive but correct.</a:t>
+              <a:t>Cross validation review: 1 -&gt; 2 -&gt; 3 -&gt;4 ( this uses up the cross </a:t>
+            </a:r>
+            <a:r>
+              <a:rPr lang="en-US" dirty="0" err="1"/>
+              <a:t>val</a:t>
+            </a:r>
+            <a:r>
+              <a:rPr lang="en-US" dirty="0"/>
+              <a:t>) -&gt; optimistic estimates!</a:t>
             </a:r>
           </a:p>
         </p:txBody>
@@ -1301,7 +1364,7 @@
           <a:p>
             <a:fld id="{F7021451-1387-4CA6-816F-3879F97B5CBC}" type="slidenum">
               <a:rPr lang="en-US"/>
-              <a:t>15</a:t>
+              <a:t>14</a:t>
             </a:fld>
             <a:endParaRPr lang="en-US"/>
           </a:p>
@@ -1366,7 +1429,7 @@
           <a:p>
             <a:r>
               <a:rPr lang="en-US" dirty="0"/>
-              <a:t>4 min. Without it, tuned models report optimistic scores that don't replicate -- worst at small n, many hyperparameters, flexible models. Rule: if you tuned on it, you can't also report performance on it. Measured in the practical.</a:t>
+              <a:t>Solution is nested cross validation. 1 -&gt; 2 -&gt; example on the right -&gt; 3 -&gt; 4 -&gt; 5</a:t>
             </a:r>
           </a:p>
         </p:txBody>
@@ -1388,7 +1451,7 @@
           <a:p>
             <a:fld id="{F7021451-1387-4CA6-816F-3879F97B5CBC}" type="slidenum">
               <a:rPr lang="en-US"/>
-              <a:t>16</a:t>
+              <a:t>15</a:t>
             </a:fld>
             <a:endParaRPr lang="en-US"/>
           </a:p>
@@ -1453,7 +1516,7 @@
           <a:p>
             <a:r>
               <a:rPr lang="en-US" dirty="0"/>
-              <a:t>5 min. A model can look great in-cohort and collapse on independent data. Usual culprit: technical variation between cohorts -- batch effects. Our setting: METABRIC (Illumina) vs GSE6532 (Affymetrix). Cross-cohort validation is the closest thing to truth.</a:t>
+              <a:t>Read slide</a:t>
             </a:r>
           </a:p>
         </p:txBody>
@@ -1475,7 +1538,7 @@
           <a:p>
             <a:fld id="{F7021451-1387-4CA6-816F-3879F97B5CBC}" type="slidenum">
               <a:rPr lang="en-US"/>
-              <a:t>17</a:t>
+              <a:t>16</a:t>
             </a:fld>
             <a:endParaRPr lang="en-US"/>
           </a:p>
@@ -1540,7 +1603,7 @@
           <a:p>
             <a:r>
               <a:rPr lang="en-US" dirty="0"/>
-              <a:t>5 min. ComBat/RUV estimate and subtract batch effects -&gt; cohorts become comparable. Risk: aggressive correction removes real biology, or done wrong leaks the outcome. Pathway features (L3) are a gentler, more platform-robust alternative.</a:t>
+              <a:t>Now let’s move to the reason why models fail on new cohorts. This will happen -&gt; 1 -&gt; 2 it’s possible that the model is good but data different (different scale, different norm) -&gt; figure -&gt; 3 out setting -&gt; we expect different scales -&gt; 4 </a:t>
             </a:r>
           </a:p>
         </p:txBody>
@@ -1562,7 +1625,7 @@
           <a:p>
             <a:fld id="{F7021451-1387-4CA6-816F-3879F97B5CBC}" type="slidenum">
               <a:rPr lang="en-US"/>
-              <a:t>18</a:t>
+              <a:t>17</a:t>
             </a:fld>
             <a:endParaRPr lang="en-US"/>
           </a:p>
@@ -1627,7 +1690,7 @@
           <a:p>
             <a:r>
               <a:rPr lang="en-US" dirty="0"/>
-              <a:t>5 min. Cardinal rule: correction must not use the outcome and must respect the split. Estimate on train, apply same transform to held-out. Correcting everything together is leakage. If batch is perfectly confounded with outcome, no method can rescue it.</a:t>
+              <a:t>How to correct for batch? Title -&gt; 1 -&gt; 2 -&gt; 3 (answer: some information just align with batch and these might be important) -&gt; 4</a:t>
             </a:r>
           </a:p>
         </p:txBody>
@@ -1649,7 +1712,7 @@
           <a:p>
             <a:fld id="{F7021451-1387-4CA6-816F-3879F97B5CBC}" type="slidenum">
               <a:rPr lang="en-US"/>
-              <a:t>19</a:t>
+              <a:t>18</a:t>
             </a:fld>
             <a:endParaRPr lang="en-US"/>
           </a:p>
@@ -1714,7 +1777,7 @@
           <a:p>
             <a:r>
               <a:rPr lang="en-US" dirty="0"/>
-              <a:t>4 min. Coefficients: direction+magnitude but scale/correlation-dependent. RF importance: biased, unstable. Correlated genes share/split importance. Always check stability across folds before believing a ranking.</a:t>
+              <a:t>READ the slide</a:t>
             </a:r>
           </a:p>
         </p:txBody>
@@ -1736,7 +1799,7 @@
           <a:p>
             <a:fld id="{F7021451-1387-4CA6-816F-3879F97B5CBC}" type="slidenum">
               <a:rPr lang="en-US"/>
-              <a:t>20</a:t>
+              <a:t>19</a:t>
             </a:fld>
             <a:endParaRPr lang="en-US"/>
           </a:p>
@@ -1801,7 +1864,7 @@
           <a:p>
             <a:r>
               <a:rPr lang="en-US" dirty="0"/>
-              <a:t>2 min. Trustworthy problem (L1), model (L2), features (L3). You can build a biologically-informed baseline and you want to make it fancier. Today: more powerful families, proper tuning, and the validation that keeps them honest. Resist: 'more complex = better'.</a:t>
+              <a:t>To recap: 1 -&gt; 2 -&gt; 3 </a:t>
             </a:r>
           </a:p>
         </p:txBody>
@@ -1887,9 +1950,20 @@
           <a:lstStyle/>
           <a:p>
             <a:r>
+              <a:rPr lang="en-US" dirty="0" err="1"/>
+              <a:t>Interpreatation</a:t>
+            </a:r>
+            <a:r>
               <a:rPr lang="en-US" dirty="0"/>
-              <a:t>4 min. SHAP attributes each prediction to its features -- a consistent per-patient explanation. Useful: shows HOW the model decided for an individual tumour. Limit: explains the MODEL, not the biology. Never present SHAP as mechanism/causation.</a:t>
-            </a:r>
+              <a:t> is important. 1-&gt; 2 -&gt; 3 -&gt; 4</a:t>
+            </a:r>
+            <a:r>
+              <a:rPr lang="en-US" dirty="0">
+                <a:sym typeface="Wingdings" pitchFamily="2" charset="2"/>
+              </a:rPr>
+              <a:t> 5 -&gt;6</a:t>
+            </a:r>
+            <a:endParaRPr lang="en-US" dirty="0"/>
           </a:p>
         </p:txBody>
       </p:sp>
@@ -1910,7 +1984,7 @@
           <a:p>
             <a:fld id="{F7021451-1387-4CA6-816F-3879F97B5CBC}" type="slidenum">
               <a:rPr lang="en-US"/>
-              <a:t>21</a:t>
+              <a:t>20</a:t>
             </a:fld>
             <a:endParaRPr lang="en-US"/>
           </a:p>
@@ -1975,7 +2049,15 @@
           <a:p>
             <a:r>
               <a:rPr lang="en-US" dirty="0"/>
-              <a:t>4 min. Random seeds: fix &amp; report. Pipelines: encapsulate preprocessing+model so it refits inside CV. Version control + environment capture. Notebook organisation &amp; experiment tracking: every number regenerable.</a:t>
+              <a:t>When a model does not give you the importance score -&gt; use </a:t>
+            </a:r>
+            <a:r>
+              <a:rPr lang="en-US" dirty="0" err="1"/>
+              <a:t>shap</a:t>
+            </a:r>
+            <a:r>
+              <a:rPr lang="en-US" dirty="0"/>
+              <a:t> -&gt; 1 -&gt; 2 -&gt; 3 -&gt; 4 -&gt; 5</a:t>
             </a:r>
           </a:p>
         </p:txBody>
@@ -1997,7 +2079,7 @@
           <a:p>
             <a:fld id="{F7021451-1387-4CA6-816F-3879F97B5CBC}" type="slidenum">
               <a:rPr lang="en-US"/>
-              <a:t>22</a:t>
+              <a:t>21</a:t>
             </a:fld>
             <a:endParaRPr lang="en-US"/>
           </a:p>
@@ -2060,10 +2142,7 @@
           <a:bodyPr/>
           <a:lstStyle/>
           <a:p>
-            <a:r>
-              <a:rPr lang="en-US" dirty="0"/>
-              <a:t>4 min. Not the most complex, not the highest training score. The best model is robust, interpretable, reproducible, well-validated. Prefer the simplest model whose advantage survives honest (nested, cross-cohort) validation.</a:t>
-            </a:r>
+            <a:endParaRPr lang="en-US" dirty="0"/>
           </a:p>
         </p:txBody>
       </p:sp>
@@ -2084,7 +2163,7 @@
           <a:p>
             <a:fld id="{F7021451-1387-4CA6-816F-3879F97B5CBC}" type="slidenum">
               <a:rPr lang="en-US"/>
-              <a:t>23</a:t>
+              <a:t>22</a:t>
             </a:fld>
             <a:endParaRPr lang="en-US"/>
           </a:p>
@@ -2149,7 +2228,7 @@
           <a:p>
             <a:r>
               <a:rPr lang="en-US" dirty="0"/>
-              <a:t>2 min. Deliver the thesis. Three corollaries: gains are smaller than expected; validation errors do more damage than model choice; plausibility is not causation. This is where students graduate from building models to judging them.</a:t>
+              <a:t>1 -&gt; 2 -&gt; 3 -&gt; 4</a:t>
             </a:r>
           </a:p>
         </p:txBody>
@@ -2171,7 +2250,7 @@
           <a:p>
             <a:fld id="{F7021451-1387-4CA6-816F-3879F97B5CBC}" type="slidenum">
               <a:rPr lang="en-US"/>
-              <a:t>24</a:t>
+              <a:t>23</a:t>
             </a:fld>
             <a:endParaRPr lang="en-US"/>
           </a:p>
@@ -2234,10 +2313,7 @@
           <a:bodyPr/>
           <a:lstStyle/>
           <a:p>
-            <a:r>
-              <a:rPr lang="en-US" dirty="0"/>
-              <a:t>2 min. Tick objectives. Practical: compare LR/RF/GBM on the same features; tune one with grid/random search; estimate honestly with nested CV; batch-correction experiment (METABRIC-&gt;GSE6532, with/without); interpret importances responsibly; choose a model for publication. Next: research-grade ML -- survival models, external validation at scale.</a:t>
-            </a:r>
+            <a:endParaRPr lang="en-US" dirty="0"/>
           </a:p>
         </p:txBody>
       </p:sp>
@@ -2258,7 +2334,7 @@
           <a:p>
             <a:fld id="{F7021451-1387-4CA6-816F-3879F97B5CBC}" type="slidenum">
               <a:rPr lang="en-US"/>
-              <a:t>25</a:t>
+              <a:t>24</a:t>
             </a:fld>
             <a:endParaRPr lang="en-US"/>
           </a:p>
@@ -2278,6 +2354,93 @@
 </file>
 
 <file path=ppt/notesSlides/notesSlide25.xml><?xml version="1.0" encoding="utf-8"?>
+<p:notes xmlns:a="http://schemas.openxmlformats.org/drawingml/2006/main" xmlns:r="http://schemas.openxmlformats.org/officeDocument/2006/relationships" xmlns:p="http://schemas.openxmlformats.org/presentationml/2006/main">
+  <p:cSld>
+    <p:spTree>
+      <p:nvGrpSpPr>
+        <p:cNvPr id="1" name=""/>
+        <p:cNvGrpSpPr/>
+        <p:nvPr/>
+      </p:nvGrpSpPr>
+      <p:grpSpPr>
+        <a:xfrm>
+          <a:off x="0" y="0"/>
+          <a:ext cx="0" cy="0"/>
+          <a:chOff x="0" y="0"/>
+          <a:chExt cx="0" cy="0"/>
+        </a:xfrm>
+      </p:grpSpPr>
+      <p:sp>
+        <p:nvSpPr>
+          <p:cNvPr id="2" name="Slide Image Placeholder 1"/>
+          <p:cNvSpPr>
+            <a:spLocks noGrp="1" noRot="1" noChangeAspect="1"/>
+          </p:cNvSpPr>
+          <p:nvPr>
+            <p:ph type="sldImg"/>
+          </p:nvPr>
+        </p:nvSpPr>
+        <p:spPr/>
+      </p:sp>
+      <p:sp>
+        <p:nvSpPr>
+          <p:cNvPr id="3" name="Notes Placeholder 2"/>
+          <p:cNvSpPr>
+            <a:spLocks noGrp="1"/>
+          </p:cNvSpPr>
+          <p:nvPr>
+            <p:ph type="body" idx="1"/>
+          </p:nvPr>
+        </p:nvSpPr>
+        <p:spPr/>
+        <p:txBody>
+          <a:bodyPr/>
+          <a:lstStyle/>
+          <a:p>
+            <a:r>
+              <a:rPr lang="en-US" dirty="0"/>
+              <a:t>2 min. Tick objectives. Practical: compare LR/RF/GBM on the same features; tune one with grid/random search; estimate honestly with nested CV; batch-correction experiment (METABRIC-&gt;GSE6532, with/without); interpret importances responsibly; choose a model for publication. Next: research-grade ML -- survival models, external validation at scale.</a:t>
+            </a:r>
+          </a:p>
+        </p:txBody>
+      </p:sp>
+      <p:sp>
+        <p:nvSpPr>
+          <p:cNvPr id="4" name="Slide Number Placeholder 3"/>
+          <p:cNvSpPr>
+            <a:spLocks noGrp="1"/>
+          </p:cNvSpPr>
+          <p:nvPr>
+            <p:ph type="sldNum" sz="quarter" idx="10"/>
+          </p:nvPr>
+        </p:nvSpPr>
+        <p:spPr/>
+        <p:txBody>
+          <a:bodyPr/>
+          <a:lstStyle/>
+          <a:p>
+            <a:fld id="{F7021451-1387-4CA6-816F-3879F97B5CBC}" type="slidenum">
+              <a:rPr lang="en-US"/>
+              <a:t>25</a:t>
+            </a:fld>
+            <a:endParaRPr lang="en-US"/>
+          </a:p>
+        </p:txBody>
+      </p:sp>
+    </p:spTree>
+    <p:extLst>
+      <p:ext uri="{BB962C8B-B14F-4D97-AF65-F5344CB8AC3E}">
+        <p14:creationId xmlns:p14="http://schemas.microsoft.com/office/powerpoint/2010/main" val="1024086991"/>
+      </p:ext>
+    </p:extLst>
+  </p:cSld>
+  <p:clrMapOvr>
+    <a:masterClrMapping/>
+  </p:clrMapOvr>
+</p:notes>
+</file>
+
+<file path=ppt/notesSlides/notesSlide26.xml><?xml version="1.0" encoding="utf-8"?>
 <p:notes xmlns:a="http://schemas.openxmlformats.org/drawingml/2006/main" xmlns:r="http://schemas.openxmlformats.org/officeDocument/2006/relationships" xmlns:p="http://schemas.openxmlformats.org/presentationml/2006/main">
   <p:cSld>
     <p:spTree>
@@ -2434,7 +2597,7 @@
           <a:p>
             <a:r>
               <a:rPr lang="en-US" dirty="0"/>
-              <a:t>2 min. Checklist ticked as we go. The two carrying the weight: nested cross-validation (why tuning inflates estimates) and batch correction done correctly (why models fail on new cohorts).</a:t>
+              <a:t>Describe all of them. Common mistakes: wrong cross validation; wrong batch correction; data leakage and overfitting in hyper params tuning</a:t>
             </a:r>
           </a:p>
         </p:txBody>
@@ -2521,7 +2684,7 @@
           <a:p>
             <a:r>
               <a:rPr lang="en-US" dirty="0"/>
-              <a:t>4 min. You own a validated baseline. The real question isn't 'can I build something fancier?' but 'can I SHOW it's better?' A complex model must EARN its complexity with validated gain.</a:t>
+              <a:t>1 Logistic regression with regularization with biologically meaningful features, our prior knowledge and eval on cross validation  -&gt; 2 (you can always build fancier model) -&gt; 3 </a:t>
             </a:r>
           </a:p>
         </p:txBody>
@@ -2608,7 +2771,15 @@
           <a:p>
             <a:r>
               <a:rPr lang="en-US" dirty="0"/>
-              <a:t>4 min. Compare on the same split/metrics/validation -- change only the model. A difference within CV noise is NOT an improvement. Prefer the simpler model unless the gain is real, validated, meaningful.</a:t>
+              <a:t>Title -&gt; 1 (this is the rule actually in every field) -&gt; 2 -&gt; comment figure (average is higher in B, but cross </a:t>
+            </a:r>
+            <a:r>
+              <a:rPr lang="en-US" dirty="0" err="1"/>
+              <a:t>val</a:t>
+            </a:r>
+            <a:r>
+              <a:rPr lang="en-US" dirty="0"/>
+              <a:t> CV overlap) -&gt; 3</a:t>
             </a:r>
           </a:p>
         </p:txBody>
@@ -2695,7 +2866,15 @@
           <a:p>
             <a:r>
               <a:rPr lang="en-US" dirty="0"/>
-              <a:t>5 min. A tree is a cascade of yes/no biological rules -- reads like clinical decision-making, very interpretable for ONE tree. But single trees are unstable (resample -&gt; different tree) and overfit without constraints.</a:t>
+              <a:t>The class of model we </a:t>
+            </a:r>
+            <a:r>
+              <a:rPr lang="en-US" dirty="0" err="1"/>
+              <a:t>wanna</a:t>
+            </a:r>
+            <a:r>
+              <a:rPr lang="en-US" dirty="0"/>
+              <a:t> describe, Tree based. First and simplest is decision tree. 1 -&gt; figure -&gt; 2 -&gt; 3 (data split change, order of questions (features)) -&gt; 3 </a:t>
             </a:r>
           </a:p>
         </p:txBody>
@@ -2782,7 +2961,13 @@
           <a:p>
             <a:r>
               <a:rPr lang="en-US" dirty="0"/>
-              <a:t>5 min. Many trees on resampled data/features, voting. Averaging unstable trees -&gt; robust, lower-variance predictor. Free (caveated) importance. Limits: less interpretable, biased importances, not magic on small n.</a:t>
+              <a:t>The instability and overfitting motivates random forests. If single overfit, what about many different trees? It works</a:t>
+            </a:r>
+          </a:p>
+          <a:p>
+            <a:r>
+              <a:rPr lang="en-US" dirty="0"/>
+              <a:t>1 -&gt; 2 (answer to the question: errors are independent and when averaging, they cancel out, while signal stays) -&gt; 3 (importance is the sum of all decrease in impurity across trees) -&gt; 4</a:t>
             </a:r>
           </a:p>
         </p:txBody>
@@ -2869,7 +3054,7 @@
           <a:p>
             <a:r>
               <a:rPr lang="en-US" dirty="0"/>
-              <a:t>5 min. Trees built sequentially, each correcting the last's mistakes. Often the strongest tabular predictor -- but the easiest to overfit and most tuning-sensitive. In p&gt;&gt;n with modest signal, its edge over a good baseline is often small.</a:t>
+              <a:t>Contrast between RF and GB: 1 -&gt; 2 -&gt; 3 (wins but not generalizable because we overfit the tuning)</a:t>
             </a:r>
           </a:p>
         </p:txBody>
@@ -2956,7 +3141,7 @@
           <a:p>
             <a:r>
               <a:rPr lang="en-US" dirty="0"/>
-              <a:t>4 min. Linear: interpretable, stable, strong in p&gt;&gt;n -- the default. RF: robust, low-tuning, weaker interpretability. GBM: highest ceiling, highest overfitting risk. Honest expectation: complex models rarely beat a good baseline by much here.</a:t>
+              <a:t>R LR ok -&gt; RF (interpretability less than LR, but it is interpretable. One often takes RF across CV and do GO) -&gt; </a:t>
             </a:r>
           </a:p>
         </p:txBody>
@@ -6416,7 +6601,7 @@
           <p:nvPr/>
         </p:nvPicPr>
         <p:blipFill>
-          <a:blip r:embed="rId2"/>
+          <a:blip r:embed="rId3"/>
           <a:stretch>
             <a:fillRect/>
           </a:stretch>
@@ -15110,7 +15295,7 @@
                 <a:ea typeface="Calibri" pitchFamily="34" charset="-122"/>
                 <a:cs typeface="Calibri" pitchFamily="34" charset="-120"/>
               </a:rPr>
-              <a:t>Three interpretation tools: linear coefficients, tree-based importance, SHAP values.</a:t>
+              <a:t>Three interpretation tools: linear coefficients, tree-based importance, SHAP values (next slide).</a:t>
             </a:r>
             <a:endParaRPr lang="en-US" sz="1500" dirty="0">
               <a:solidFill>
@@ -22769,7 +22954,7 @@
                 <a:ea typeface="Calibri" pitchFamily="34" charset="-122"/>
                 <a:cs typeface="Calibri" pitchFamily="34" charset="-120"/>
               </a:rPr>
-              <a:t>Averaging many unstable trees → a robust, lower-variance predictor.</a:t>
+              <a:t>Averaging many unstable trees → a robust, lower-variance predictor. WHY is this?</a:t>
             </a:r>
             <a:endParaRPr lang="en-US" sz="1550" dirty="0"/>
           </a:p>
@@ -24903,7 +25088,7 @@
                 <a:ea typeface="Calibri" pitchFamily="34" charset="-122"/>
                 <a:cs typeface="Calibri" pitchFamily="34" charset="-120"/>
               </a:rPr>
-              <a:t>Small (high risk)</a:t>
+              <a:t>ok (high risk)</a:t>
             </a:r>
             <a:endParaRPr lang="en-US" sz="1200" dirty="0"/>
           </a:p>
